--- a/pitch/voxa-pitch.pptx
+++ b/pitch/voxa-pitch.pptx
@@ -511,7 +511,7 @@
           <a:p>
             <a:r>
               <a:rPr lang="en-US" dirty="0"/>
-              <a:t>Voxa is a voice-first AI assistant for real estate agents, on iPhone and iPad, powered by Grok: you just say it.
+              <a:t>Voxa is a voice-first AI assistant for real estate agents, on iPhone and iPad, powered by AI: you just say it.
 Sources: eriqbre/voxa-spec PR #232 (iPhone + iPad app). Screen: Simulator, Trusted friend conversation opening.</a:t>
             </a:r>
             <a:endParaRPr lang="en-US" dirty="0"/>
@@ -689,7 +689,7 @@
           <a:p>
             <a:r>
               <a:rPr lang="en-US" dirty="0"/>
-              <a:t>Most of an agent's week isn't selling: it's posts, open house prep, replies, feedback and follow-ups scattered across texts, email, calendar and social.</a:t>
+              <a:t>Most of an agent's week isn't selling; it's building and sticking to a marketing plan, daily posts, open house prep, replies and follow-ups scattered across texts, email, calendar and social.</a:t>
             </a:r>
             <a:endParaRPr lang="en-US" dirty="0"/>
           </a:p>
@@ -777,7 +777,7 @@
           <a:p>
             <a:r>
               <a:rPr lang="en-US" dirty="0"/>
-              <a:t>Voxa pulls out only what needs you today. Grok drafts; you decide. Nothing sends or posts without your tap.
+              <a:t>Voxa pulls out only what needs you today. Voxa drafts; you decide. Nothing sends or posts without your tap.
 The cards on the left are an illustration, not a screenshot. Sources: eriqbre/voxa-spec PRs #244/#245 (never posts on its own), #319 (staged events and reminders).</a:t>
             </a:r>
             <a:endParaRPr lang="en-US" dirty="0"/>
@@ -1044,7 +1044,7 @@
           <a:p>
             <a:r>
               <a:rPr lang="en-US" dirty="0"/>
-              <a:t>Ask about your inbox by voice. Grok tags each email to the listing it belongs to and summarizes documents, like contract highlights. Summaries are not legal advice.
+              <a:t>Ask about your inbox by voice. Voxa tags each email to the listing it belongs to and summarizes documents, like contract highlights. Summaries are not legal advice.
 Sources: eriqbre/voxa-spec PRs #316/#321 (mail tagging, document summaries).</a:t>
             </a:r>
             <a:endParaRPr lang="en-US" dirty="0"/>
@@ -1310,7 +1310,7 @@
           <a:p>
             <a:r>
               <a:rPr lang="en-US" dirty="0"/>
-              <a:t>Three steps: you speak, Grok does the work, you approve. What you say is sent to xAI so Grok can reply.</a:t>
+              <a:t>Three steps: you speak, Voxa does the work, you approve. What you say is sent to our AI provider so it can reply.</a:t>
             </a:r>
             <a:endParaRPr lang="en-US" dirty="0"/>
           </a:p>
@@ -2042,7 +2042,7 @@
                 <a:ea typeface="Manrope" pitchFamily="34" charset="-122"/>
                 <a:cs typeface="Manrope" pitchFamily="34" charset="-120"/>
               </a:rPr>
-              <a:t>Powered by Grok</a:t>
+              <a:t>Powered by AI</a:t>
             </a:r>
             <a:endParaRPr lang="en-US" sz="1400" dirty="0"/>
           </a:p>
@@ -2871,7 +2871,7 @@
                 <a:ea typeface="Manrope" pitchFamily="34" charset="-122"/>
                 <a:cs typeface="Manrope" pitchFamily="34" charset="-120"/>
               </a:rPr>
-              <a:t>Daily posts</a:t>
+              <a:t>Building and sticking to a marketing plan</a:t>
             </a:r>
             <a:endParaRPr lang="en-US" sz="1650" dirty="0"/>
           </a:p>
@@ -2910,7 +2910,7 @@
                 <a:ea typeface="Manrope" pitchFamily="34" charset="-122"/>
                 <a:cs typeface="Manrope" pitchFamily="34" charset="-120"/>
               </a:rPr>
-              <a:t>Social</a:t>
+              <a:t>Plan + social</a:t>
             </a:r>
             <a:endParaRPr lang="en-US" sz="1250" dirty="0"/>
           </a:p>
@@ -3044,7 +3044,7 @@
                 <a:ea typeface="Manrope" pitchFamily="34" charset="-122"/>
                 <a:cs typeface="Manrope" pitchFamily="34" charset="-120"/>
               </a:rPr>
-              <a:t>Open house prep and follow-up</a:t>
+              <a:t>Daily posts</a:t>
             </a:r>
             <a:endParaRPr lang="en-US" sz="1650" dirty="0"/>
           </a:p>
@@ -3083,7 +3083,7 @@
                 <a:ea typeface="Manrope" pitchFamily="34" charset="-122"/>
                 <a:cs typeface="Manrope" pitchFamily="34" charset="-120"/>
               </a:rPr>
-              <a:t>Calendar + texts</a:t>
+              <a:t>Social</a:t>
             </a:r>
             <a:endParaRPr lang="en-US" sz="1250" dirty="0"/>
           </a:p>
@@ -3217,7 +3217,7 @@
                 <a:ea typeface="Manrope" pitchFamily="34" charset="-122"/>
                 <a:cs typeface="Manrope" pitchFamily="34" charset="-120"/>
               </a:rPr>
-              <a:t>Email replies</a:t>
+              <a:t>Open house prep and follow-up</a:t>
             </a:r>
             <a:endParaRPr lang="en-US" sz="1650" dirty="0"/>
           </a:p>
@@ -3256,7 +3256,7 @@
                 <a:ea typeface="Manrope" pitchFamily="34" charset="-122"/>
                 <a:cs typeface="Manrope" pitchFamily="34" charset="-120"/>
               </a:rPr>
-              <a:t>Email</a:t>
+              <a:t>Calendar + texts</a:t>
             </a:r>
             <a:endParaRPr lang="en-US" sz="1250" dirty="0"/>
           </a:p>
@@ -3390,7 +3390,7 @@
                 <a:ea typeface="Manrope" pitchFamily="34" charset="-122"/>
                 <a:cs typeface="Manrope" pitchFamily="34" charset="-120"/>
               </a:rPr>
-              <a:t>Showing feedback</a:t>
+              <a:t>Email replies</a:t>
             </a:r>
             <a:endParaRPr lang="en-US" sz="1650" dirty="0"/>
           </a:p>
@@ -3429,7 +3429,7 @@
                 <a:ea typeface="Manrope" pitchFamily="34" charset="-122"/>
                 <a:cs typeface="Manrope" pitchFamily="34" charset="-120"/>
               </a:rPr>
-              <a:t>Texts + email</a:t>
+              <a:t>Email</a:t>
             </a:r>
             <a:endParaRPr lang="en-US" sz="1250" dirty="0"/>
           </a:p>
@@ -3904,7 +3904,7 @@
                 <a:ea typeface="Manrope" pitchFamily="34" charset="-122"/>
                 <a:cs typeface="Manrope" pitchFamily="34" charset="-120"/>
               </a:rPr>
-              <a:t>Grok drafted it in your voice.</a:t>
+              <a:t>Voxa drafted it in your voice.</a:t>
             </a:r>
             <a:endParaRPr lang="en-US" sz="1300" dirty="0"/>
           </a:p>
@@ -4418,7 +4418,7 @@
                 <a:ea typeface="Fraunces" pitchFamily="34" charset="-122"/>
                 <a:cs typeface="Fraunces" pitchFamily="34" charset="-120"/>
               </a:rPr>
-              <a:t>Grok drafts. You decide.</a:t>
+              <a:t>Voxa drafts. You decide.</a:t>
             </a:r>
             <a:endParaRPr lang="en-US" sz="2800" dirty="0"/>
           </a:p>
@@ -6761,7 +6761,7 @@
                 <a:ea typeface="Manrope" pitchFamily="34" charset="-122"/>
                 <a:cs typeface="Manrope" pitchFamily="34" charset="-120"/>
               </a:rPr>
-              <a:t>Ask what came in. Grok sorts it out.</a:t>
+              <a:t>Ask what came in. Voxa sorts it out.</a:t>
             </a:r>
             <a:endParaRPr lang="en-US" sz="1900" dirty="0"/>
           </a:p>
@@ -6932,7 +6932,7 @@
                 <a:ea typeface="Manrope" pitchFamily="34" charset="-122"/>
                 <a:cs typeface="Manrope" pitchFamily="34" charset="-120"/>
               </a:rPr>
-              <a:t>Grok tags each email to the listing it belongs to.</a:t>
+              <a:t>Voxa tags each email to the listing it belongs to.</a:t>
             </a:r>
             <a:endParaRPr lang="en-US" sz="1500" dirty="0"/>
           </a:p>
@@ -9084,7 +9084,7 @@
                 <a:ea typeface="Fraunces" pitchFamily="34" charset="-122"/>
                 <a:cs typeface="Fraunces" pitchFamily="34" charset="-120"/>
               </a:rPr>
-              <a:t>Speak. Grok works. You approve.</a:t>
+              <a:t>Speak. Voxa works. You approve.</a:t>
             </a:r>
             <a:endParaRPr lang="en-US" sz="4200" dirty="0"/>
           </a:p>
@@ -9353,7 +9353,7 @@
                 <a:ea typeface="Fraunces" pitchFamily="34" charset="-122"/>
                 <a:cs typeface="Fraunces" pitchFamily="34" charset="-120"/>
               </a:rPr>
-              <a:t>Grok works</a:t>
+              <a:t>Voxa works</a:t>
             </a:r>
             <a:endParaRPr lang="en-US" sz="2800" dirty="0"/>
           </a:p>
@@ -9595,7 +9595,7 @@
                 <a:ea typeface="Manrope" pitchFamily="34" charset="-122"/>
                 <a:cs typeface="Manrope" pitchFamily="34" charset="-120"/>
               </a:rPr>
-              <a:t>What you say is sent to xAI so Grok can reply.</a:t>
+              <a:t>What you say is sent to our AI provider so it can reply.</a:t>
             </a:r>
             <a:endParaRPr lang="en-US" sz="1300" dirty="0"/>
           </a:p>

--- a/pitch/voxa-pitch.pptx
+++ b/pitch/voxa-pitch.pptx
@@ -4,9 +4,6 @@
   <p:sldMasterIdLst>
     <p:sldMasterId id="2147483648" r:id="rId1"/>
   </p:sldMasterIdLst>
-  <p:notesMasterIdLst>
-    <p:notesMasterId r:id="rId12"/>
-  </p:notesMasterIdLst>
   <p:sldIdLst>
     <p:sldId id="256" r:id="rId2"/>
     <p:sldId id="257" r:id="rId3"/>
@@ -18,7 +15,11 @@
     <p:sldId id="263" r:id="rId9"/>
     <p:sldId id="264" r:id="rId10"/>
     <p:sldId id="265" r:id="rId11"/>
+    <p:sldId id="266" r:id="rId12"/>
   </p:sldIdLst>
+  <p:notesMasterIdLst>
+    <p:notesMasterId r:id="rId13"/>
+  </p:notesMasterIdLst>
   <p:sldSz cx="12192000" cy="6858000"/>
   <p:notesSz cx="6858000" cy="12192000"/>
   <p:defaultTextStyle>
@@ -600,8 +601,7 @@
           <a:p>
             <a:r>
               <a:rPr lang="en-US" dirty="0"/>
-              <a:t>Scan to join the waitlist at eriqbre.github.io/voxa-site, and ask me for a demo.
-QR decodes to https://eriqbre.github.io/voxa-site/ (verified).</a:t>
+              <a:t>Three steps: you speak, Voxa does the work, you approve. What you say is sent to our AI provider so it can reply.</a:t>
             </a:r>
             <a:endParaRPr lang="en-US" dirty="0"/>
           </a:p>
@@ -625,6 +625,95 @@
             <a:fld id="{F7021451-1387-4CA6-816F-3879F97B5CBC}" type="slidenum">
               <a:rPr lang="en-US"/>
               <a:t>10</a:t>
+            </a:fld>
+            <a:endParaRPr lang="en-US"/>
+          </a:p>
+        </p:txBody>
+      </p:sp>
+    </p:spTree>
+    <p:extLst>
+      <p:ext uri="{BB962C8B-B14F-4D97-AF65-F5344CB8AC3E}">
+        <p14:creationId xmlns:p14="http://schemas.microsoft.com/office/powerpoint/2010/main" val="1024086991"/>
+      </p:ext>
+    </p:extLst>
+  </p:cSld>
+  <p:clrMapOvr>
+    <a:masterClrMapping/>
+  </p:clrMapOvr>
+</p:notes>
+</file>
+
+<file path=ppt/notesSlides/notesSlide11.xml><?xml version="1.0" encoding="utf-8"?>
+<p:notes xmlns:a="http://schemas.openxmlformats.org/drawingml/2006/main" xmlns:r="http://schemas.openxmlformats.org/officeDocument/2006/relationships" xmlns:p="http://schemas.openxmlformats.org/presentationml/2006/main">
+  <p:cSld>
+    <p:spTree>
+      <p:nvGrpSpPr>
+        <p:cNvPr id="1" name=""/>
+        <p:cNvGrpSpPr/>
+        <p:nvPr/>
+      </p:nvGrpSpPr>
+      <p:grpSpPr>
+        <a:xfrm>
+          <a:off x="0" y="0"/>
+          <a:ext cx="0" cy="0"/>
+          <a:chOff x="0" y="0"/>
+          <a:chExt cx="0" cy="0"/>
+        </a:xfrm>
+      </p:grpSpPr>
+      <p:sp>
+        <p:nvSpPr>
+          <p:cNvPr id="2" name="Slide Image Placeholder 1"/>
+          <p:cNvSpPr>
+            <a:spLocks noGrp="1" noRot="1" noChangeAspect="1"/>
+          </p:cNvSpPr>
+          <p:nvPr>
+            <p:ph type="sldImg"/>
+          </p:nvPr>
+        </p:nvSpPr>
+        <p:spPr/>
+      </p:sp>
+      <p:sp>
+        <p:nvSpPr>
+          <p:cNvPr id="3" name="Notes Placeholder 2"/>
+          <p:cNvSpPr>
+            <a:spLocks noGrp="1"/>
+          </p:cNvSpPr>
+          <p:nvPr>
+            <p:ph type="body" idx="1"/>
+          </p:nvPr>
+        </p:nvSpPr>
+        <p:spPr/>
+        <p:txBody>
+          <a:bodyPr/>
+          <a:lstStyle/>
+          <a:p>
+            <a:r>
+              <a:rPr lang="en-US" dirty="0"/>
+              <a:t>Scan to join the waitlist at eriqbre.github.io/voxa-site, and ask me for a demo.
+QR decodes to https://eriqbre.github.io/voxa-site/ (verified).</a:t>
+            </a:r>
+            <a:endParaRPr lang="en-US" dirty="0"/>
+          </a:p>
+        </p:txBody>
+      </p:sp>
+      <p:sp>
+        <p:nvSpPr>
+          <p:cNvPr id="4" name="Slide Number Placeholder 3"/>
+          <p:cNvSpPr>
+            <a:spLocks noGrp="1"/>
+          </p:cNvSpPr>
+          <p:nvPr>
+            <p:ph type="sldNum" sz="quarter" idx="10"/>
+          </p:nvPr>
+        </p:nvSpPr>
+        <p:spPr/>
+        <p:txBody>
+          <a:bodyPr/>
+          <a:lstStyle/>
+          <a:p>
+            <a:fld id="{F7021451-1387-4CA6-816F-3879F97B5CBC}" type="slidenum">
+              <a:rPr lang="en-US"/>
+              <a:t>11</a:t>
             </a:fld>
             <a:endParaRPr lang="en-US"/>
           </a:p>
@@ -866,8 +955,7 @@
           <a:p>
             <a:r>
               <a:rPr lang="en-US" dirty="0"/>
-              <a:t>Watch: Voxa opens with a couple of ideas, pushes back when it should, and stages events and reminders you add with one tap, with Undo.
-Sources: eriqbre/voxa-spec PRs #319/#320/#322 (Trusted friend).</a:t>
+              <a:t>You don’t need perfect words. Talk the way you normally do, ums and all, and Voxa works out what you mean. It checks your calendar before booking: Friday at 2 clashes with a showing, so it offers noon or anytime Saturday. Pick noon and it fills in an event card, Lunch with client, Fri 12:00 PM, with an Add to calendar button for you to tap.</a:t>
             </a:r>
             <a:endParaRPr lang="en-US" dirty="0"/>
           </a:p>
@@ -955,8 +1043,8 @@
           <a:p>
             <a:r>
               <a:rPr lang="en-US" dirty="0"/>
-              <a:t>A short goals interview becomes a 90-day plan, and the drafts sound like you, with photos and sources. You tap to post; Voxa never posts on its own.
-Sources: eriqbre/voxa-spec PRs #257/#276/#285 (goals interview, 90-day plan), #256 (learns voice), #244/#245 (AI posts with sources, never posts on its own).</a:t>
+              <a:t>Watch: Voxa opens with a couple of ideas, pushes back when it should, and stages events and reminders you add with one tap, with Undo.
+Sources: eriqbre/voxa-spec PRs #319/#320/#322 (Trusted friend).</a:t>
             </a:r>
             <a:endParaRPr lang="en-US" dirty="0"/>
           </a:p>
@@ -1044,8 +1132,8 @@
           <a:p>
             <a:r>
               <a:rPr lang="en-US" dirty="0"/>
-              <a:t>Ask about your inbox by voice. Voxa tags each email to the listing it belongs to and summarizes documents, like contract highlights. Summaries are not legal advice.
-Sources: eriqbre/voxa-spec PRs #316/#321 (mail tagging, document summaries).</a:t>
+              <a:t>A short goals interview becomes a 90-day plan, and the drafts sound like you, with photos and sources. You tap to post; Voxa never posts on its own.
+Sources: eriqbre/voxa-spec PRs #257/#276/#285 (goals interview, 90-day plan), #256 (learns voice), #244/#245 (AI posts with sources, never posts on its own).</a:t>
             </a:r>
             <a:endParaRPr lang="en-US" dirty="0"/>
           </a:p>
@@ -1133,8 +1221,8 @@
           <a:p>
             <a:r>
               <a:rPr lang="en-US" dirty="0"/>
-              <a:t>Voxa remembers your preferences, and you can see, edit or forget any of them. Memory storage is off until you turn it on.
-Sources: eriqbre/voxa-spec PRs #319/#320/#322 (memory, privacy off by default).</a:t>
+              <a:t>Ask about your inbox by voice. Voxa tags each email to the listing it belongs to and summarizes documents, like contract highlights. Summaries are not legal advice.
+Sources: eriqbre/voxa-spec PRs #316/#321 (mail tagging, document summaries).</a:t>
             </a:r>
             <a:endParaRPr lang="en-US" dirty="0"/>
           </a:p>
@@ -1222,7 +1310,8 @@
           <a:p>
             <a:r>
               <a:rPr lang="en-US" dirty="0"/>
-              <a:t>This is a design preview, not shipped: a Home screen with everything that needs you today, plus open house and showing workflows. Prototype screens, example data.</a:t>
+              <a:t>Voxa remembers your preferences, and you can see, edit or forget any of them. Memory storage is off until you turn it on.
+Sources: eriqbre/voxa-spec PRs #319/#320/#322 (memory, privacy off by default).</a:t>
             </a:r>
             <a:endParaRPr lang="en-US" dirty="0"/>
           </a:p>
@@ -1310,7 +1399,7 @@
           <a:p>
             <a:r>
               <a:rPr lang="en-US" dirty="0"/>
-              <a:t>Three steps: you speak, Voxa does the work, you approve. What you say is sent to our AI provider so it can reply.</a:t>
+              <a:t>This is a design preview, not shipped: a Home screen with everything that needs you today, plus open house and showing workflows. Prototype screens, example data.</a:t>
             </a:r>
             <a:endParaRPr lang="en-US" dirty="0"/>
           </a:p>
@@ -2062,6 +2151,729 @@
     <p:bg>
       <p:bgPr>
         <a:solidFill>
+          <a:srgbClr val="F6F8F7"/>
+        </a:solidFill>
+      </p:bgPr>
+    </p:bg>
+    <p:spTree>
+      <p:nvGrpSpPr>
+        <p:cNvPr id="1" name=""/>
+        <p:cNvGrpSpPr/>
+        <p:nvPr/>
+      </p:nvGrpSpPr>
+      <p:grpSpPr>
+        <a:xfrm>
+          <a:off x="0" y="0"/>
+          <a:ext cx="0" cy="0"/>
+          <a:chOff x="0" y="0"/>
+          <a:chExt cx="0" cy="0"/>
+        </a:xfrm>
+      </p:grpSpPr>
+      <p:pic>
+        <p:nvPicPr>
+          <p:cNvPr id="2" name="Image 0" descr="/workspace/slides/voxa-pitch-CTbDK0/assets/voxa-mark.png">    </p:cNvPr>
+          <p:cNvPicPr>
+            <a:picLocks noChangeAspect="1"/>
+          </p:cNvPicPr>
+          <p:nvPr/>
+        </p:nvPicPr>
+        <p:blipFill>
+          <a:blip r:embed="rId1"/>
+          <a:stretch>
+            <a:fillRect/>
+          </a:stretch>
+        </p:blipFill>
+        <p:spPr>
+          <a:xfrm>
+            <a:off x="548640" y="384048"/>
+            <a:ext cx="329184" cy="329184"/>
+          </a:xfrm>
+          <a:prstGeom prst="rect">
+            <a:avLst/>
+          </a:prstGeom>
+        </p:spPr>
+      </p:pic>
+      <p:sp>
+        <p:nvSpPr>
+          <p:cNvPr id="3" name="Text 0"/>
+          <p:cNvSpPr/>
+          <p:nvPr/>
+        </p:nvSpPr>
+        <p:spPr>
+          <a:xfrm>
+            <a:off x="969264" y="365760"/>
+            <a:ext cx="1371600" cy="365760"/>
+          </a:xfrm>
+          <a:prstGeom prst="rect">
+            <a:avLst/>
+          </a:prstGeom>
+          <a:noFill/>
+          <a:ln/>
+        </p:spPr>
+        <p:txBody>
+          <a:bodyPr wrap="square" lIns="0" tIns="0" rIns="0" bIns="0" rtlCol="0" anchor="ctr"/>
+          <a:lstStyle/>
+          <a:p>
+            <a:pPr indent="0" marL="0">
+              <a:buNone/>
+            </a:pPr>
+            <a:r>
+              <a:rPr lang="en-US" sz="1700" b="1" dirty="0">
+                <a:solidFill>
+                  <a:srgbClr val="10201C"/>
+                </a:solidFill>
+                <a:latin typeface="Fraunces" pitchFamily="34" charset="0"/>
+                <a:ea typeface="Fraunces" pitchFamily="34" charset="-122"/>
+                <a:cs typeface="Fraunces" pitchFamily="34" charset="-120"/>
+              </a:rPr>
+              <a:t>Voxa</a:t>
+            </a:r>
+            <a:endParaRPr lang="en-US" sz="1700" dirty="0"/>
+          </a:p>
+        </p:txBody>
+      </p:sp>
+      <p:sp>
+        <p:nvSpPr>
+          <p:cNvPr id="4" name="Text 1"/>
+          <p:cNvSpPr/>
+          <p:nvPr/>
+        </p:nvSpPr>
+        <p:spPr>
+          <a:xfrm>
+            <a:off x="10241280" y="365760"/>
+            <a:ext cx="1399032" cy="365760"/>
+          </a:xfrm>
+          <a:prstGeom prst="rect">
+            <a:avLst/>
+          </a:prstGeom>
+          <a:noFill/>
+          <a:ln/>
+        </p:spPr>
+        <p:txBody>
+          <a:bodyPr wrap="square" lIns="0" tIns="0" rIns="0" bIns="0" rtlCol="0" anchor="ctr"/>
+          <a:lstStyle/>
+          <a:p>
+            <a:pPr algn="r" indent="0" marL="0">
+              <a:buNone/>
+            </a:pPr>
+            <a:r>
+              <a:rPr lang="en-US" sz="1100" dirty="0">
+                <a:solidFill>
+                  <a:srgbClr val="6B7C77"/>
+                </a:solidFill>
+                <a:latin typeface="Manrope" pitchFamily="34" charset="0"/>
+                <a:ea typeface="Manrope" pitchFamily="34" charset="-122"/>
+                <a:cs typeface="Manrope" pitchFamily="34" charset="-120"/>
+              </a:rPr>
+              <a:t>10 / 11</a:t>
+            </a:r>
+            <a:endParaRPr lang="en-US" sz="1100" dirty="0"/>
+          </a:p>
+        </p:txBody>
+      </p:sp>
+      <p:sp>
+        <p:nvSpPr>
+          <p:cNvPr id="5" name="Text 2"/>
+          <p:cNvSpPr/>
+          <p:nvPr/>
+        </p:nvSpPr>
+        <p:spPr>
+          <a:xfrm>
+            <a:off x="685800" y="1051560"/>
+            <a:ext cx="10817352" cy="274320"/>
+          </a:xfrm>
+          <a:prstGeom prst="rect">
+            <a:avLst/>
+          </a:prstGeom>
+          <a:noFill/>
+          <a:ln/>
+        </p:spPr>
+        <p:txBody>
+          <a:bodyPr wrap="square" lIns="0" tIns="0" rIns="0" bIns="0" rtlCol="0" anchor="t"/>
+          <a:lstStyle/>
+          <a:p>
+            <a:pPr algn="ctr" indent="0" marL="0">
+              <a:buNone/>
+            </a:pPr>
+            <a:r>
+              <a:rPr lang="en-US" sz="1200" b="1" spc="250" kern="0" dirty="0">
+                <a:solidFill>
+                  <a:srgbClr val="1D9A84"/>
+                </a:solidFill>
+                <a:latin typeface="Manrope" pitchFamily="34" charset="0"/>
+                <a:ea typeface="Manrope" pitchFamily="34" charset="-122"/>
+                <a:cs typeface="Manrope" pitchFamily="34" charset="-120"/>
+              </a:rPr>
+              <a:t>HOW IT WORKS</a:t>
+            </a:r>
+            <a:endParaRPr lang="en-US" sz="1200" dirty="0"/>
+          </a:p>
+        </p:txBody>
+      </p:sp>
+      <p:sp>
+        <p:nvSpPr>
+          <p:cNvPr id="6" name="Text 3"/>
+          <p:cNvSpPr/>
+          <p:nvPr/>
+        </p:nvSpPr>
+        <p:spPr>
+          <a:xfrm>
+            <a:off x="685800" y="1371600"/>
+            <a:ext cx="10817352" cy="822960"/>
+          </a:xfrm>
+          <a:prstGeom prst="rect">
+            <a:avLst/>
+          </a:prstGeom>
+          <a:noFill/>
+          <a:ln/>
+        </p:spPr>
+        <p:txBody>
+          <a:bodyPr wrap="square" lIns="0" tIns="0" rIns="0" bIns="0" rtlCol="0" anchor="t"/>
+          <a:lstStyle/>
+          <a:p>
+            <a:pPr algn="ctr" indent="0" marL="0">
+              <a:buNone/>
+            </a:pPr>
+            <a:r>
+              <a:rPr lang="en-US" sz="4200" b="1" dirty="0">
+                <a:solidFill>
+                  <a:srgbClr val="10201C"/>
+                </a:solidFill>
+                <a:latin typeface="Fraunces" pitchFamily="34" charset="0"/>
+                <a:ea typeface="Fraunces" pitchFamily="34" charset="-122"/>
+                <a:cs typeface="Fraunces" pitchFamily="34" charset="-120"/>
+              </a:rPr>
+              <a:t>Speak. Voxa works. You approve.</a:t>
+            </a:r>
+            <a:endParaRPr lang="en-US" sz="4200" dirty="0"/>
+          </a:p>
+        </p:txBody>
+      </p:sp>
+      <p:sp>
+        <p:nvSpPr>
+          <p:cNvPr id="7" name="Shape 4"/>
+          <p:cNvSpPr/>
+          <p:nvPr/>
+        </p:nvSpPr>
+        <p:spPr>
+          <a:xfrm>
+            <a:off x="1249528" y="2514600"/>
+            <a:ext cx="2651760" cy="2651760"/>
+          </a:xfrm>
+          <a:prstGeom prst="ellipse">
+            <a:avLst/>
+          </a:prstGeom>
+          <a:solidFill>
+            <a:srgbClr val="0F5A4F"/>
+          </a:solidFill>
+          <a:ln/>
+          <a:effectLst>
+            <a:outerShdw sx="100000" sy="100000" kx="0" ky="0" algn="bl" rotWithShape="0" blurRad="304800" dist="50800" dir="5400000">
+              <a:srgbClr val="0F5A4F">
+                <a:alpha val="10000"/>
+              </a:srgbClr>
+            </a:outerShdw>
+          </a:effectLst>
+        </p:spPr>
+      </p:sp>
+      <p:sp>
+        <p:nvSpPr>
+          <p:cNvPr id="8" name="Text 5"/>
+          <p:cNvSpPr/>
+          <p:nvPr/>
+        </p:nvSpPr>
+        <p:spPr>
+          <a:xfrm>
+            <a:off x="1249528" y="2926080"/>
+            <a:ext cx="2651760" cy="457200"/>
+          </a:xfrm>
+          <a:prstGeom prst="rect">
+            <a:avLst/>
+          </a:prstGeom>
+          <a:noFill/>
+          <a:ln/>
+        </p:spPr>
+        <p:txBody>
+          <a:bodyPr wrap="square" lIns="0" tIns="0" rIns="0" bIns="0" rtlCol="0" anchor="ctr"/>
+          <a:lstStyle/>
+          <a:p>
+            <a:pPr algn="ctr" indent="0" marL="0">
+              <a:buNone/>
+            </a:pPr>
+            <a:r>
+              <a:rPr lang="en-US" sz="1400" b="1" dirty="0">
+                <a:solidFill>
+                  <a:srgbClr val="A9D6C9"/>
+                </a:solidFill>
+                <a:latin typeface="Manrope" pitchFamily="34" charset="0"/>
+                <a:ea typeface="Manrope" pitchFamily="34" charset="-122"/>
+                <a:cs typeface="Manrope" pitchFamily="34" charset="-120"/>
+              </a:rPr>
+              <a:t>1</a:t>
+            </a:r>
+            <a:endParaRPr lang="en-US" sz="1400" dirty="0"/>
+          </a:p>
+        </p:txBody>
+      </p:sp>
+      <p:sp>
+        <p:nvSpPr>
+          <p:cNvPr id="9" name="Text 6"/>
+          <p:cNvSpPr/>
+          <p:nvPr/>
+        </p:nvSpPr>
+        <p:spPr>
+          <a:xfrm>
+            <a:off x="1249528" y="3383280"/>
+            <a:ext cx="2651760" cy="731520"/>
+          </a:xfrm>
+          <a:prstGeom prst="rect">
+            <a:avLst/>
+          </a:prstGeom>
+          <a:noFill/>
+          <a:ln/>
+        </p:spPr>
+        <p:txBody>
+          <a:bodyPr wrap="square" lIns="0" tIns="0" rIns="0" bIns="0" rtlCol="0" anchor="ctr"/>
+          <a:lstStyle/>
+          <a:p>
+            <a:pPr algn="ctr" indent="0" marL="0">
+              <a:buNone/>
+            </a:pPr>
+            <a:r>
+              <a:rPr lang="en-US" sz="2800" b="1" dirty="0">
+                <a:solidFill>
+                  <a:srgbClr val="FFFFFF"/>
+                </a:solidFill>
+                <a:latin typeface="Fraunces" pitchFamily="34" charset="0"/>
+                <a:ea typeface="Fraunces" pitchFamily="34" charset="-122"/>
+                <a:cs typeface="Fraunces" pitchFamily="34" charset="-120"/>
+              </a:rPr>
+              <a:t>Speak</a:t>
+            </a:r>
+            <a:endParaRPr lang="en-US" sz="2800" dirty="0"/>
+          </a:p>
+        </p:txBody>
+      </p:sp>
+      <p:sp>
+        <p:nvSpPr>
+          <p:cNvPr id="10" name="Text 7"/>
+          <p:cNvSpPr/>
+          <p:nvPr/>
+        </p:nvSpPr>
+        <p:spPr>
+          <a:xfrm>
+            <a:off x="1066648" y="5349240"/>
+            <a:ext cx="3017520" cy="685800"/>
+          </a:xfrm>
+          <a:prstGeom prst="rect">
+            <a:avLst/>
+          </a:prstGeom>
+          <a:noFill/>
+          <a:ln/>
+        </p:spPr>
+        <p:txBody>
+          <a:bodyPr wrap="square" lIns="0" tIns="0" rIns="0" bIns="0" rtlCol="0" anchor="ctr"/>
+          <a:lstStyle/>
+          <a:p>
+            <a:pPr algn="ctr" indent="0" marL="0">
+              <a:buNone/>
+            </a:pPr>
+            <a:r>
+              <a:rPr lang="en-US" sz="1500" dirty="0">
+                <a:solidFill>
+                  <a:srgbClr val="3E504B"/>
+                </a:solidFill>
+                <a:latin typeface="Manrope" pitchFamily="34" charset="0"/>
+                <a:ea typeface="Manrope" pitchFamily="34" charset="-122"/>
+                <a:cs typeface="Manrope" pitchFamily="34" charset="-120"/>
+              </a:rPr>
+              <a:t>Tap the mic and say it the way you would say it.</a:t>
+            </a:r>
+            <a:endParaRPr lang="en-US" sz="1500" dirty="0"/>
+          </a:p>
+        </p:txBody>
+      </p:sp>
+      <p:sp>
+        <p:nvSpPr>
+          <p:cNvPr id="11" name="Shape 8"/>
+          <p:cNvSpPr/>
+          <p:nvPr/>
+        </p:nvSpPr>
+        <p:spPr>
+          <a:xfrm>
+            <a:off x="4102456" y="3657600"/>
+            <a:ext cx="457200" cy="365760"/>
+          </a:xfrm>
+          <a:prstGeom prst="rightArrow">
+            <a:avLst/>
+          </a:prstGeom>
+          <a:solidFill>
+            <a:srgbClr val="1D9A84"/>
+          </a:solidFill>
+          <a:ln/>
+        </p:spPr>
+      </p:sp>
+      <p:sp>
+        <p:nvSpPr>
+          <p:cNvPr id="12" name="Shape 9"/>
+          <p:cNvSpPr/>
+          <p:nvPr/>
+        </p:nvSpPr>
+        <p:spPr>
+          <a:xfrm>
+            <a:off x="4769968" y="2514600"/>
+            <a:ext cx="2651760" cy="2651760"/>
+          </a:xfrm>
+          <a:prstGeom prst="ellipse">
+            <a:avLst/>
+          </a:prstGeom>
+          <a:solidFill>
+            <a:srgbClr val="E3F1EC"/>
+          </a:solidFill>
+          <a:ln/>
+          <a:effectLst>
+            <a:outerShdw sx="100000" sy="100000" kx="0" ky="0" algn="bl" rotWithShape="0" blurRad="304800" dist="50800" dir="5400000">
+              <a:srgbClr val="0F5A4F">
+                <a:alpha val="10000"/>
+              </a:srgbClr>
+            </a:outerShdw>
+          </a:effectLst>
+        </p:spPr>
+      </p:sp>
+      <p:sp>
+        <p:nvSpPr>
+          <p:cNvPr id="13" name="Text 10"/>
+          <p:cNvSpPr/>
+          <p:nvPr/>
+        </p:nvSpPr>
+        <p:spPr>
+          <a:xfrm>
+            <a:off x="4769968" y="2926080"/>
+            <a:ext cx="2651760" cy="457200"/>
+          </a:xfrm>
+          <a:prstGeom prst="rect">
+            <a:avLst/>
+          </a:prstGeom>
+          <a:noFill/>
+          <a:ln/>
+        </p:spPr>
+        <p:txBody>
+          <a:bodyPr wrap="square" lIns="0" tIns="0" rIns="0" bIns="0" rtlCol="0" anchor="ctr"/>
+          <a:lstStyle/>
+          <a:p>
+            <a:pPr algn="ctr" indent="0" marL="0">
+              <a:buNone/>
+            </a:pPr>
+            <a:r>
+              <a:rPr lang="en-US" sz="1400" b="1" dirty="0">
+                <a:solidFill>
+                  <a:srgbClr val="1D9A84"/>
+                </a:solidFill>
+                <a:latin typeface="Manrope" pitchFamily="34" charset="0"/>
+                <a:ea typeface="Manrope" pitchFamily="34" charset="-122"/>
+                <a:cs typeface="Manrope" pitchFamily="34" charset="-120"/>
+              </a:rPr>
+              <a:t>2</a:t>
+            </a:r>
+            <a:endParaRPr lang="en-US" sz="1400" dirty="0"/>
+          </a:p>
+        </p:txBody>
+      </p:sp>
+      <p:sp>
+        <p:nvSpPr>
+          <p:cNvPr id="14" name="Text 11"/>
+          <p:cNvSpPr/>
+          <p:nvPr/>
+        </p:nvSpPr>
+        <p:spPr>
+          <a:xfrm>
+            <a:off x="4769968" y="3383280"/>
+            <a:ext cx="2651760" cy="731520"/>
+          </a:xfrm>
+          <a:prstGeom prst="rect">
+            <a:avLst/>
+          </a:prstGeom>
+          <a:noFill/>
+          <a:ln/>
+        </p:spPr>
+        <p:txBody>
+          <a:bodyPr wrap="square" lIns="0" tIns="0" rIns="0" bIns="0" rtlCol="0" anchor="ctr"/>
+          <a:lstStyle/>
+          <a:p>
+            <a:pPr algn="ctr" indent="0" marL="0">
+              <a:buNone/>
+            </a:pPr>
+            <a:r>
+              <a:rPr lang="en-US" sz="2800" b="1" dirty="0">
+                <a:solidFill>
+                  <a:srgbClr val="0F5A4F"/>
+                </a:solidFill>
+                <a:latin typeface="Fraunces" pitchFamily="34" charset="0"/>
+                <a:ea typeface="Fraunces" pitchFamily="34" charset="-122"/>
+                <a:cs typeface="Fraunces" pitchFamily="34" charset="-120"/>
+              </a:rPr>
+              <a:t>Voxa works</a:t>
+            </a:r>
+            <a:endParaRPr lang="en-US" sz="2800" dirty="0"/>
+          </a:p>
+        </p:txBody>
+      </p:sp>
+      <p:sp>
+        <p:nvSpPr>
+          <p:cNvPr id="15" name="Text 12"/>
+          <p:cNvSpPr/>
+          <p:nvPr/>
+        </p:nvSpPr>
+        <p:spPr>
+          <a:xfrm>
+            <a:off x="4587088" y="5349240"/>
+            <a:ext cx="3017520" cy="685800"/>
+          </a:xfrm>
+          <a:prstGeom prst="rect">
+            <a:avLst/>
+          </a:prstGeom>
+          <a:noFill/>
+          <a:ln/>
+        </p:spPr>
+        <p:txBody>
+          <a:bodyPr wrap="square" lIns="0" tIns="0" rIns="0" bIns="0" rtlCol="0" anchor="ctr"/>
+          <a:lstStyle/>
+          <a:p>
+            <a:pPr algn="ctr" indent="0" marL="0">
+              <a:buNone/>
+            </a:pPr>
+            <a:r>
+              <a:rPr lang="en-US" sz="1500" dirty="0">
+                <a:solidFill>
+                  <a:srgbClr val="3E504B"/>
+                </a:solidFill>
+                <a:latin typeface="Manrope" pitchFamily="34" charset="0"/>
+                <a:ea typeface="Manrope" pitchFamily="34" charset="-122"/>
+                <a:cs typeface="Manrope" pitchFamily="34" charset="-120"/>
+              </a:rPr>
+              <a:t>Drafts, research, sorting and reminders.</a:t>
+            </a:r>
+            <a:endParaRPr lang="en-US" sz="1500" dirty="0"/>
+          </a:p>
+        </p:txBody>
+      </p:sp>
+      <p:sp>
+        <p:nvSpPr>
+          <p:cNvPr id="16" name="Shape 13"/>
+          <p:cNvSpPr/>
+          <p:nvPr/>
+        </p:nvSpPr>
+        <p:spPr>
+          <a:xfrm>
+            <a:off x="7622896" y="3657600"/>
+            <a:ext cx="457200" cy="365760"/>
+          </a:xfrm>
+          <a:prstGeom prst="rightArrow">
+            <a:avLst/>
+          </a:prstGeom>
+          <a:solidFill>
+            <a:srgbClr val="1D9A84"/>
+          </a:solidFill>
+          <a:ln/>
+        </p:spPr>
+      </p:sp>
+      <p:sp>
+        <p:nvSpPr>
+          <p:cNvPr id="17" name="Shape 14"/>
+          <p:cNvSpPr/>
+          <p:nvPr/>
+        </p:nvSpPr>
+        <p:spPr>
+          <a:xfrm>
+            <a:off x="8290408" y="2514600"/>
+            <a:ext cx="2651760" cy="2651760"/>
+          </a:xfrm>
+          <a:prstGeom prst="ellipse">
+            <a:avLst/>
+          </a:prstGeom>
+          <a:solidFill>
+            <a:srgbClr val="0F5A4F"/>
+          </a:solidFill>
+          <a:ln/>
+          <a:effectLst>
+            <a:outerShdw sx="100000" sy="100000" kx="0" ky="0" algn="bl" rotWithShape="0" blurRad="304800" dist="50800" dir="5400000">
+              <a:srgbClr val="0F5A4F">
+                <a:alpha val="10000"/>
+              </a:srgbClr>
+            </a:outerShdw>
+          </a:effectLst>
+        </p:spPr>
+      </p:sp>
+      <p:sp>
+        <p:nvSpPr>
+          <p:cNvPr id="18" name="Text 15"/>
+          <p:cNvSpPr/>
+          <p:nvPr/>
+        </p:nvSpPr>
+        <p:spPr>
+          <a:xfrm>
+            <a:off x="8290408" y="2926080"/>
+            <a:ext cx="2651760" cy="457200"/>
+          </a:xfrm>
+          <a:prstGeom prst="rect">
+            <a:avLst/>
+          </a:prstGeom>
+          <a:noFill/>
+          <a:ln/>
+        </p:spPr>
+        <p:txBody>
+          <a:bodyPr wrap="square" lIns="0" tIns="0" rIns="0" bIns="0" rtlCol="0" anchor="ctr"/>
+          <a:lstStyle/>
+          <a:p>
+            <a:pPr algn="ctr" indent="0" marL="0">
+              <a:buNone/>
+            </a:pPr>
+            <a:r>
+              <a:rPr lang="en-US" sz="1400" b="1" dirty="0">
+                <a:solidFill>
+                  <a:srgbClr val="A9D6C9"/>
+                </a:solidFill>
+                <a:latin typeface="Manrope" pitchFamily="34" charset="0"/>
+                <a:ea typeface="Manrope" pitchFamily="34" charset="-122"/>
+                <a:cs typeface="Manrope" pitchFamily="34" charset="-120"/>
+              </a:rPr>
+              <a:t>3</a:t>
+            </a:r>
+            <a:endParaRPr lang="en-US" sz="1400" dirty="0"/>
+          </a:p>
+        </p:txBody>
+      </p:sp>
+      <p:sp>
+        <p:nvSpPr>
+          <p:cNvPr id="19" name="Text 16"/>
+          <p:cNvSpPr/>
+          <p:nvPr/>
+        </p:nvSpPr>
+        <p:spPr>
+          <a:xfrm>
+            <a:off x="8290408" y="3383280"/>
+            <a:ext cx="2651760" cy="731520"/>
+          </a:xfrm>
+          <a:prstGeom prst="rect">
+            <a:avLst/>
+          </a:prstGeom>
+          <a:noFill/>
+          <a:ln/>
+        </p:spPr>
+        <p:txBody>
+          <a:bodyPr wrap="square" lIns="0" tIns="0" rIns="0" bIns="0" rtlCol="0" anchor="ctr"/>
+          <a:lstStyle/>
+          <a:p>
+            <a:pPr algn="ctr" indent="0" marL="0">
+              <a:buNone/>
+            </a:pPr>
+            <a:r>
+              <a:rPr lang="en-US" sz="2800" b="1" dirty="0">
+                <a:solidFill>
+                  <a:srgbClr val="FFFFFF"/>
+                </a:solidFill>
+                <a:latin typeface="Fraunces" pitchFamily="34" charset="0"/>
+                <a:ea typeface="Fraunces" pitchFamily="34" charset="-122"/>
+                <a:cs typeface="Fraunces" pitchFamily="34" charset="-120"/>
+              </a:rPr>
+              <a:t>You approve</a:t>
+            </a:r>
+            <a:endParaRPr lang="en-US" sz="2800" dirty="0"/>
+          </a:p>
+        </p:txBody>
+      </p:sp>
+      <p:sp>
+        <p:nvSpPr>
+          <p:cNvPr id="20" name="Text 17"/>
+          <p:cNvSpPr/>
+          <p:nvPr/>
+        </p:nvSpPr>
+        <p:spPr>
+          <a:xfrm>
+            <a:off x="8107528" y="5349240"/>
+            <a:ext cx="3017520" cy="685800"/>
+          </a:xfrm>
+          <a:prstGeom prst="rect">
+            <a:avLst/>
+          </a:prstGeom>
+          <a:noFill/>
+          <a:ln/>
+        </p:spPr>
+        <p:txBody>
+          <a:bodyPr wrap="square" lIns="0" tIns="0" rIns="0" bIns="0" rtlCol="0" anchor="ctr"/>
+          <a:lstStyle/>
+          <a:p>
+            <a:pPr algn="ctr" indent="0" marL="0">
+              <a:buNone/>
+            </a:pPr>
+            <a:r>
+              <a:rPr lang="en-US" sz="1500" dirty="0">
+                <a:solidFill>
+                  <a:srgbClr val="3E504B"/>
+                </a:solidFill>
+                <a:latin typeface="Manrope" pitchFamily="34" charset="0"/>
+                <a:ea typeface="Manrope" pitchFamily="34" charset="-122"/>
+                <a:cs typeface="Manrope" pitchFamily="34" charset="-120"/>
+              </a:rPr>
+              <a:t>Nothing goes out until you tap.</a:t>
+            </a:r>
+            <a:endParaRPr lang="en-US" sz="1500" dirty="0"/>
+          </a:p>
+        </p:txBody>
+      </p:sp>
+      <p:sp>
+        <p:nvSpPr>
+          <p:cNvPr id="21" name="Text 18"/>
+          <p:cNvSpPr/>
+          <p:nvPr/>
+        </p:nvSpPr>
+        <p:spPr>
+          <a:xfrm>
+            <a:off x="685800" y="6199632"/>
+            <a:ext cx="10817352" cy="320040"/>
+          </a:xfrm>
+          <a:prstGeom prst="rect">
+            <a:avLst/>
+          </a:prstGeom>
+          <a:noFill/>
+          <a:ln/>
+        </p:spPr>
+        <p:txBody>
+          <a:bodyPr wrap="square" lIns="0" tIns="0" rIns="0" bIns="0" rtlCol="0" anchor="ctr"/>
+          <a:lstStyle/>
+          <a:p>
+            <a:pPr algn="ctr" indent="0" marL="0">
+              <a:buNone/>
+            </a:pPr>
+            <a:r>
+              <a:rPr lang="en-US" sz="1300" dirty="0">
+                <a:solidFill>
+                  <a:srgbClr val="6B7C77"/>
+                </a:solidFill>
+                <a:latin typeface="Manrope" pitchFamily="34" charset="0"/>
+                <a:ea typeface="Manrope" pitchFamily="34" charset="-122"/>
+                <a:cs typeface="Manrope" pitchFamily="34" charset="-120"/>
+              </a:rPr>
+              <a:t>What you say is sent to our AI provider so it can reply.</a:t>
+            </a:r>
+            <a:endParaRPr lang="en-US" sz="1300" dirty="0"/>
+          </a:p>
+        </p:txBody>
+      </p:sp>
+    </p:spTree>
+  </p:cSld>
+  <p:clrMapOvr>
+    <a:masterClrMapping/>
+  </p:clrMapOvr>
+</p:sld>
+</file>
+
+<file path=ppt/slides/slide11.xml><?xml version="1.0" encoding="utf-8"?>
+<p:sld xmlns:a="http://schemas.openxmlformats.org/drawingml/2006/main" xmlns:r="http://schemas.openxmlformats.org/officeDocument/2006/relationships" xmlns:p="http://schemas.openxmlformats.org/presentationml/2006/main">
+  <p:cSld name="Slide 11">
+    <p:bg>
+      <p:bgPr>
+        <a:solidFill>
           <a:srgbClr val="E3F1EC"/>
         </a:solidFill>
       </p:bgPr>
@@ -2617,7 +3429,7 @@
                 <a:ea typeface="Manrope" pitchFamily="34" charset="-122"/>
                 <a:cs typeface="Manrope" pitchFamily="34" charset="-120"/>
               </a:rPr>
-              <a:t>02 / 10</a:t>
+              <a:t>02 / 11</a:t>
             </a:r>
             <a:endParaRPr lang="en-US" sz="1100" dirty="0"/>
           </a:p>
@@ -3736,7 +4548,7 @@
                 <a:ea typeface="Manrope" pitchFamily="34" charset="-122"/>
                 <a:cs typeface="Manrope" pitchFamily="34" charset="-120"/>
               </a:rPr>
-              <a:t>03 / 10</a:t>
+              <a:t>03 / 11</a:t>
             </a:r>
             <a:endParaRPr lang="en-US" sz="1100" dirty="0"/>
           </a:p>
@@ -4677,7 +5489,7 @@
                 <a:ea typeface="Manrope" pitchFamily="34" charset="-122"/>
                 <a:cs typeface="Manrope" pitchFamily="34" charset="-120"/>
               </a:rPr>
-              <a:t>04 / 10</a:t>
+              <a:t>04 / 11</a:t>
             </a:r>
             <a:endParaRPr lang="en-US" sz="1100" dirty="0"/>
           </a:p>
@@ -4685,533 +5497,13 @@
       </p:sp>
       <p:sp>
         <p:nvSpPr>
-          <p:cNvPr id="5" name="Text 2"/>
-          <p:cNvSpPr/>
-          <p:nvPr/>
-        </p:nvSpPr>
-        <p:spPr>
-          <a:xfrm>
-            <a:off x="685800" y="1188720"/>
-            <a:ext cx="4572000" cy="274320"/>
-          </a:xfrm>
-          <a:prstGeom prst="rect">
-            <a:avLst/>
-          </a:prstGeom>
-          <a:noFill/>
-          <a:ln/>
-        </p:spPr>
-        <p:txBody>
-          <a:bodyPr wrap="square" lIns="0" tIns="0" rIns="0" bIns="0" rtlCol="0" anchor="t"/>
-          <a:lstStyle/>
-          <a:p>
-            <a:pPr indent="0" marL="0">
-              <a:buNone/>
-            </a:pPr>
-            <a:r>
-              <a:rPr lang="en-US" sz="1200" b="1" spc="250" kern="0" dirty="0">
-                <a:solidFill>
-                  <a:srgbClr val="1D9A84"/>
-                </a:solidFill>
-                <a:latin typeface="Manrope" pitchFamily="34" charset="0"/>
-                <a:ea typeface="Manrope" pitchFamily="34" charset="-122"/>
-                <a:cs typeface="Manrope" pitchFamily="34" charset="-120"/>
-              </a:rPr>
-              <a:t>TRUSTED FRIEND</a:t>
-            </a:r>
-            <a:endParaRPr lang="en-US" sz="1200" dirty="0"/>
-          </a:p>
-        </p:txBody>
-      </p:sp>
-      <p:sp>
-        <p:nvSpPr>
-          <p:cNvPr id="6" name="Text 3"/>
-          <p:cNvSpPr/>
-          <p:nvPr/>
-        </p:nvSpPr>
-        <p:spPr>
-          <a:xfrm>
-            <a:off x="685800" y="1554480"/>
-            <a:ext cx="6766560" cy="822960"/>
-          </a:xfrm>
-          <a:prstGeom prst="rect">
-            <a:avLst/>
-          </a:prstGeom>
-          <a:noFill/>
-          <a:ln/>
-        </p:spPr>
-        <p:txBody>
-          <a:bodyPr wrap="square" lIns="0" tIns="0" rIns="0" bIns="0" rtlCol="0" anchor="t"/>
-          <a:lstStyle/>
-          <a:p>
-            <a:pPr indent="0" marL="0">
-              <a:buNone/>
-            </a:pPr>
-            <a:r>
-              <a:rPr lang="en-US" sz="4400" b="1" dirty="0">
-                <a:solidFill>
-                  <a:srgbClr val="10201C"/>
-                </a:solidFill>
-                <a:latin typeface="Fraunces" pitchFamily="34" charset="0"/>
-                <a:ea typeface="Fraunces" pitchFamily="34" charset="-122"/>
-                <a:cs typeface="Fraunces" pitchFamily="34" charset="-120"/>
-              </a:rPr>
-              <a:t>Talk it through.</a:t>
-            </a:r>
-            <a:endParaRPr lang="en-US" sz="4400" dirty="0"/>
-          </a:p>
-        </p:txBody>
-      </p:sp>
-      <p:sp>
-        <p:nvSpPr>
-          <p:cNvPr id="7" name="Shape 4"/>
-          <p:cNvSpPr/>
-          <p:nvPr/>
-        </p:nvSpPr>
-        <p:spPr>
-          <a:xfrm>
-            <a:off x="548640" y="2697480"/>
-            <a:ext cx="7680960" cy="3429000"/>
-          </a:xfrm>
-          <a:prstGeom prst="roundRect">
-            <a:avLst>
-              <a:gd name="adj" fmla="val 8000"/>
-            </a:avLst>
-          </a:prstGeom>
-          <a:solidFill>
-            <a:srgbClr val="E3F1EC"/>
-          </a:solidFill>
-          <a:ln/>
-        </p:spPr>
-      </p:sp>
-      <p:sp>
-        <p:nvSpPr>
-          <p:cNvPr id="8" name="Shape 5"/>
-          <p:cNvSpPr/>
-          <p:nvPr/>
-        </p:nvSpPr>
-        <p:spPr>
-          <a:xfrm>
-            <a:off x="914400" y="3063240"/>
-            <a:ext cx="384048" cy="384048"/>
-          </a:xfrm>
-          <a:prstGeom prst="ellipse">
-            <a:avLst/>
-          </a:prstGeom>
-          <a:solidFill>
-            <a:srgbClr val="0F5A4F"/>
-          </a:solidFill>
-          <a:ln/>
-        </p:spPr>
-      </p:sp>
-      <p:sp>
-        <p:nvSpPr>
-          <p:cNvPr id="9" name="Text 6"/>
-          <p:cNvSpPr/>
-          <p:nvPr/>
-        </p:nvSpPr>
-        <p:spPr>
-          <a:xfrm>
-            <a:off x="914400" y="3063240"/>
-            <a:ext cx="384048" cy="384048"/>
-          </a:xfrm>
-          <a:prstGeom prst="rect">
-            <a:avLst/>
-          </a:prstGeom>
-          <a:noFill/>
-          <a:ln/>
-        </p:spPr>
-        <p:txBody>
-          <a:bodyPr wrap="square" lIns="0" tIns="0" rIns="0" bIns="0" rtlCol="0" anchor="ctr"/>
-          <a:lstStyle/>
-          <a:p>
-            <a:pPr algn="ctr" indent="0" marL="0">
-              <a:buNone/>
-            </a:pPr>
-            <a:r>
-              <a:rPr lang="en-US" sz="1700" b="1" dirty="0">
-                <a:solidFill>
-                  <a:srgbClr val="FFFFFF"/>
-                </a:solidFill>
-                <a:latin typeface="Manrope" pitchFamily="34" charset="0"/>
-                <a:ea typeface="Manrope" pitchFamily="34" charset="-122"/>
-                <a:cs typeface="Manrope" pitchFamily="34" charset="-120"/>
-              </a:rPr>
-              <a:t>✓</a:t>
-            </a:r>
-            <a:endParaRPr lang="en-US" sz="1700" dirty="0"/>
-          </a:p>
-        </p:txBody>
-      </p:sp>
-      <p:sp>
-        <p:nvSpPr>
-          <p:cNvPr id="10" name="Text 7"/>
-          <p:cNvSpPr/>
-          <p:nvPr/>
-        </p:nvSpPr>
-        <p:spPr>
-          <a:xfrm>
-            <a:off x="1508760" y="3017520"/>
-            <a:ext cx="6400800" cy="384048"/>
-          </a:xfrm>
-          <a:prstGeom prst="rect">
-            <a:avLst/>
-          </a:prstGeom>
-          <a:noFill/>
-          <a:ln/>
-        </p:spPr>
-        <p:txBody>
-          <a:bodyPr wrap="square" lIns="0" tIns="0" rIns="0" bIns="0" rtlCol="0" anchor="ctr"/>
-          <a:lstStyle/>
-          <a:p>
-            <a:pPr indent="0" marL="0">
-              <a:buNone/>
-            </a:pPr>
-            <a:r>
-              <a:rPr lang="en-US" sz="1900" b="1" dirty="0">
-                <a:solidFill>
-                  <a:srgbClr val="10201C"/>
-                </a:solidFill>
-                <a:latin typeface="Manrope" pitchFamily="34" charset="0"/>
-                <a:ea typeface="Manrope" pitchFamily="34" charset="-122"/>
-                <a:cs typeface="Manrope" pitchFamily="34" charset="-120"/>
-              </a:rPr>
-              <a:t>Voxa speaks first</a:t>
-            </a:r>
-            <a:endParaRPr lang="en-US" sz="1900" dirty="0"/>
-          </a:p>
-        </p:txBody>
-      </p:sp>
-      <p:sp>
-        <p:nvSpPr>
-          <p:cNvPr id="11" name="Text 8"/>
-          <p:cNvSpPr/>
-          <p:nvPr/>
-        </p:nvSpPr>
-        <p:spPr>
-          <a:xfrm>
-            <a:off x="1508760" y="3438144"/>
-            <a:ext cx="6400800" cy="411480"/>
-          </a:xfrm>
-          <a:prstGeom prst="rect">
-            <a:avLst/>
-          </a:prstGeom>
-          <a:noFill/>
-          <a:ln/>
-        </p:spPr>
-        <p:txBody>
-          <a:bodyPr wrap="square" lIns="0" tIns="0" rIns="0" bIns="0" rtlCol="0" anchor="t"/>
-          <a:lstStyle/>
-          <a:p>
-            <a:pPr indent="0" marL="0">
-              <a:lnSpc>
-                <a:spcPct val="130000"/>
-              </a:lnSpc>
-              <a:buNone/>
-            </a:pPr>
-            <a:r>
-              <a:rPr lang="en-US" sz="1600" dirty="0">
-                <a:solidFill>
-                  <a:srgbClr val="3E504B"/>
-                </a:solidFill>
-                <a:latin typeface="Manrope" pitchFamily="34" charset="0"/>
-                <a:ea typeface="Manrope" pitchFamily="34" charset="-122"/>
-                <a:cs typeface="Manrope" pitchFamily="34" charset="-120"/>
-              </a:rPr>
-              <a:t>It opens with 2–3 ideas for your day.</a:t>
-            </a:r>
-            <a:endParaRPr lang="en-US" sz="1600" dirty="0"/>
-          </a:p>
-        </p:txBody>
-      </p:sp>
-      <p:sp>
-        <p:nvSpPr>
-          <p:cNvPr id="12" name="Shape 9"/>
-          <p:cNvSpPr/>
-          <p:nvPr/>
-        </p:nvSpPr>
-        <p:spPr>
-          <a:xfrm>
-            <a:off x="914400" y="4069080"/>
-            <a:ext cx="384048" cy="384048"/>
-          </a:xfrm>
-          <a:prstGeom prst="ellipse">
-            <a:avLst/>
-          </a:prstGeom>
-          <a:solidFill>
-            <a:srgbClr val="0F5A4F"/>
-          </a:solidFill>
-          <a:ln/>
-        </p:spPr>
-      </p:sp>
-      <p:sp>
-        <p:nvSpPr>
-          <p:cNvPr id="13" name="Text 10"/>
-          <p:cNvSpPr/>
-          <p:nvPr/>
-        </p:nvSpPr>
-        <p:spPr>
-          <a:xfrm>
-            <a:off x="914400" y="4069080"/>
-            <a:ext cx="384048" cy="384048"/>
-          </a:xfrm>
-          <a:prstGeom prst="rect">
-            <a:avLst/>
-          </a:prstGeom>
-          <a:noFill/>
-          <a:ln/>
-        </p:spPr>
-        <p:txBody>
-          <a:bodyPr wrap="square" lIns="0" tIns="0" rIns="0" bIns="0" rtlCol="0" anchor="ctr"/>
-          <a:lstStyle/>
-          <a:p>
-            <a:pPr algn="ctr" indent="0" marL="0">
-              <a:buNone/>
-            </a:pPr>
-            <a:r>
-              <a:rPr lang="en-US" sz="1700" b="1" dirty="0">
-                <a:solidFill>
-                  <a:srgbClr val="FFFFFF"/>
-                </a:solidFill>
-                <a:latin typeface="Manrope" pitchFamily="34" charset="0"/>
-                <a:ea typeface="Manrope" pitchFamily="34" charset="-122"/>
-                <a:cs typeface="Manrope" pitchFamily="34" charset="-120"/>
-              </a:rPr>
-              <a:t>✓</a:t>
-            </a:r>
-            <a:endParaRPr lang="en-US" sz="1700" dirty="0"/>
-          </a:p>
-        </p:txBody>
-      </p:sp>
-      <p:sp>
-        <p:nvSpPr>
-          <p:cNvPr id="14" name="Text 11"/>
-          <p:cNvSpPr/>
-          <p:nvPr/>
-        </p:nvSpPr>
-        <p:spPr>
-          <a:xfrm>
-            <a:off x="1508760" y="4023360"/>
-            <a:ext cx="6400800" cy="384048"/>
-          </a:xfrm>
-          <a:prstGeom prst="rect">
-            <a:avLst/>
-          </a:prstGeom>
-          <a:noFill/>
-          <a:ln/>
-        </p:spPr>
-        <p:txBody>
-          <a:bodyPr wrap="square" lIns="0" tIns="0" rIns="0" bIns="0" rtlCol="0" anchor="ctr"/>
-          <a:lstStyle/>
-          <a:p>
-            <a:pPr indent="0" marL="0">
-              <a:buNone/>
-            </a:pPr>
-            <a:r>
-              <a:rPr lang="en-US" sz="1900" b="1" dirty="0">
-                <a:solidFill>
-                  <a:srgbClr val="10201C"/>
-                </a:solidFill>
-                <a:latin typeface="Manrope" pitchFamily="34" charset="0"/>
-                <a:ea typeface="Manrope" pitchFamily="34" charset="-122"/>
-                <a:cs typeface="Manrope" pitchFamily="34" charset="-120"/>
-              </a:rPr>
-              <a:t>It pushes back honestly</a:t>
-            </a:r>
-            <a:endParaRPr lang="en-US" sz="1900" dirty="0"/>
-          </a:p>
-        </p:txBody>
-      </p:sp>
-      <p:sp>
-        <p:nvSpPr>
-          <p:cNvPr id="15" name="Text 12"/>
-          <p:cNvSpPr/>
-          <p:nvPr/>
-        </p:nvSpPr>
-        <p:spPr>
-          <a:xfrm>
-            <a:off x="1508760" y="4443984"/>
-            <a:ext cx="6400800" cy="411480"/>
-          </a:xfrm>
-          <a:prstGeom prst="rect">
-            <a:avLst/>
-          </a:prstGeom>
-          <a:noFill/>
-          <a:ln/>
-        </p:spPr>
-        <p:txBody>
-          <a:bodyPr wrap="square" lIns="0" tIns="0" rIns="0" bIns="0" rtlCol="0" anchor="t"/>
-          <a:lstStyle/>
-          <a:p>
-            <a:pPr indent="0" marL="0">
-              <a:lnSpc>
-                <a:spcPct val="130000"/>
-              </a:lnSpc>
-              <a:buNone/>
-            </a:pPr>
-            <a:r>
-              <a:rPr lang="en-US" sz="1600" dirty="0">
-                <a:solidFill>
-                  <a:srgbClr val="3E504B"/>
-                </a:solidFill>
-                <a:latin typeface="Manrope" pitchFamily="34" charset="0"/>
-                <a:ea typeface="Manrope" pitchFamily="34" charset="-122"/>
-                <a:cs typeface="Manrope" pitchFamily="34" charset="-120"/>
-              </a:rPr>
-              <a:t>If a plan won’t work, it says so.</a:t>
-            </a:r>
-            <a:endParaRPr lang="en-US" sz="1600" dirty="0"/>
-          </a:p>
-        </p:txBody>
-      </p:sp>
-      <p:sp>
-        <p:nvSpPr>
-          <p:cNvPr id="16" name="Shape 13"/>
-          <p:cNvSpPr/>
-          <p:nvPr/>
-        </p:nvSpPr>
-        <p:spPr>
-          <a:xfrm>
-            <a:off x="914400" y="5074920"/>
-            <a:ext cx="384048" cy="384048"/>
-          </a:xfrm>
-          <a:prstGeom prst="ellipse">
-            <a:avLst/>
-          </a:prstGeom>
-          <a:solidFill>
-            <a:srgbClr val="0F5A4F"/>
-          </a:solidFill>
-          <a:ln/>
-        </p:spPr>
-      </p:sp>
-      <p:sp>
-        <p:nvSpPr>
-          <p:cNvPr id="17" name="Text 14"/>
-          <p:cNvSpPr/>
-          <p:nvPr/>
-        </p:nvSpPr>
-        <p:spPr>
-          <a:xfrm>
-            <a:off x="914400" y="5074920"/>
-            <a:ext cx="384048" cy="384048"/>
-          </a:xfrm>
-          <a:prstGeom prst="rect">
-            <a:avLst/>
-          </a:prstGeom>
-          <a:noFill/>
-          <a:ln/>
-        </p:spPr>
-        <p:txBody>
-          <a:bodyPr wrap="square" lIns="0" tIns="0" rIns="0" bIns="0" rtlCol="0" anchor="ctr"/>
-          <a:lstStyle/>
-          <a:p>
-            <a:pPr algn="ctr" indent="0" marL="0">
-              <a:buNone/>
-            </a:pPr>
-            <a:r>
-              <a:rPr lang="en-US" sz="1700" b="1" dirty="0">
-                <a:solidFill>
-                  <a:srgbClr val="FFFFFF"/>
-                </a:solidFill>
-                <a:latin typeface="Manrope" pitchFamily="34" charset="0"/>
-                <a:ea typeface="Manrope" pitchFamily="34" charset="-122"/>
-                <a:cs typeface="Manrope" pitchFamily="34" charset="-120"/>
-              </a:rPr>
-              <a:t>✓</a:t>
-            </a:r>
-            <a:endParaRPr lang="en-US" sz="1700" dirty="0"/>
-          </a:p>
-        </p:txBody>
-      </p:sp>
-      <p:sp>
-        <p:nvSpPr>
-          <p:cNvPr id="18" name="Text 15"/>
-          <p:cNvSpPr/>
-          <p:nvPr/>
-        </p:nvSpPr>
-        <p:spPr>
-          <a:xfrm>
-            <a:off x="1508760" y="5029200"/>
-            <a:ext cx="6400800" cy="384048"/>
-          </a:xfrm>
-          <a:prstGeom prst="rect">
-            <a:avLst/>
-          </a:prstGeom>
-          <a:noFill/>
-          <a:ln/>
-        </p:spPr>
-        <p:txBody>
-          <a:bodyPr wrap="square" lIns="0" tIns="0" rIns="0" bIns="0" rtlCol="0" anchor="ctr"/>
-          <a:lstStyle/>
-          <a:p>
-            <a:pPr indent="0" marL="0">
-              <a:buNone/>
-            </a:pPr>
-            <a:r>
-              <a:rPr lang="en-US" sz="1900" b="1" dirty="0">
-                <a:solidFill>
-                  <a:srgbClr val="10201C"/>
-                </a:solidFill>
-                <a:latin typeface="Manrope" pitchFamily="34" charset="0"/>
-                <a:ea typeface="Manrope" pitchFamily="34" charset="-122"/>
-                <a:cs typeface="Manrope" pitchFamily="34" charset="-120"/>
-              </a:rPr>
-              <a:t>It stages the details</a:t>
-            </a:r>
-            <a:endParaRPr lang="en-US" sz="1900" dirty="0"/>
-          </a:p>
-        </p:txBody>
-      </p:sp>
-      <p:sp>
-        <p:nvSpPr>
-          <p:cNvPr id="19" name="Text 16"/>
-          <p:cNvSpPr/>
-          <p:nvPr/>
-        </p:nvSpPr>
-        <p:spPr>
-          <a:xfrm>
-            <a:off x="1508760" y="5449824"/>
-            <a:ext cx="6400800" cy="411480"/>
-          </a:xfrm>
-          <a:prstGeom prst="rect">
-            <a:avLst/>
-          </a:prstGeom>
-          <a:noFill/>
-          <a:ln/>
-        </p:spPr>
-        <p:txBody>
-          <a:bodyPr wrap="square" lIns="0" tIns="0" rIns="0" bIns="0" rtlCol="0" anchor="t"/>
-          <a:lstStyle/>
-          <a:p>
-            <a:pPr indent="0" marL="0">
-              <a:lnSpc>
-                <a:spcPct val="130000"/>
-              </a:lnSpc>
-              <a:buNone/>
-            </a:pPr>
-            <a:r>
-              <a:rPr lang="en-US" sz="1600" dirty="0">
-                <a:solidFill>
-                  <a:srgbClr val="3E504B"/>
-                </a:solidFill>
-                <a:latin typeface="Manrope" pitchFamily="34" charset="0"/>
-                <a:ea typeface="Manrope" pitchFamily="34" charset="-122"/>
-                <a:cs typeface="Manrope" pitchFamily="34" charset="-120"/>
-              </a:rPr>
-              <a:t>Calendar events and reminders you add with one tap, with Undo.</a:t>
-            </a:r>
-            <a:endParaRPr lang="en-US" sz="1600" dirty="0"/>
-          </a:p>
-        </p:txBody>
-      </p:sp>
-      <p:sp>
-        <p:nvSpPr>
-          <p:cNvPr id="20" name="VIDEO_SLOT Demo 1"/>
-          <p:cNvSpPr/>
-          <p:nvPr/>
-        </p:nvSpPr>
-        <p:spPr>
-          <a:xfrm>
-            <a:off x="8915400" y="868680"/>
+          <p:cNvPr id="5" name="VIDEO_SLOT Demo 5"/>
+          <p:cNvSpPr/>
+          <p:nvPr/>
+        </p:nvSpPr>
+        <p:spPr>
+          <a:xfrm>
+            <a:off x="777240" y="868680"/>
             <a:ext cx="2574036" cy="5577840"/>
           </a:xfrm>
           <a:prstGeom prst="roundRect">
@@ -5234,13 +5526,13 @@
       </p:sp>
       <p:sp>
         <p:nvSpPr>
-          <p:cNvPr id="21" name="Shape 18"/>
-          <p:cNvSpPr/>
-          <p:nvPr/>
-        </p:nvSpPr>
-        <p:spPr>
-          <a:xfrm>
-            <a:off x="9006840" y="960120"/>
+          <p:cNvPr id="6" name="Shape 3"/>
+          <p:cNvSpPr/>
+          <p:nvPr/>
+        </p:nvSpPr>
+        <p:spPr>
+          <a:xfrm>
+            <a:off x="868680" y="960120"/>
             <a:ext cx="2391156" cy="5394960"/>
           </a:xfrm>
           <a:prstGeom prst="roundRect">
@@ -5256,13 +5548,13 @@
       </p:sp>
       <p:sp>
         <p:nvSpPr>
-          <p:cNvPr id="22" name="Shape 19"/>
-          <p:cNvSpPr/>
-          <p:nvPr/>
-        </p:nvSpPr>
-        <p:spPr>
-          <a:xfrm>
-            <a:off x="9790938" y="1051560"/>
+          <p:cNvPr id="7" name="Shape 4"/>
+          <p:cNvSpPr/>
+          <p:nvPr/>
+        </p:nvSpPr>
+        <p:spPr>
+          <a:xfrm>
+            <a:off x="1652778" y="1051560"/>
             <a:ext cx="822960" cy="201168"/>
           </a:xfrm>
           <a:prstGeom prst="roundRect">
@@ -5278,13 +5570,13 @@
       </p:sp>
       <p:sp>
         <p:nvSpPr>
-          <p:cNvPr id="23" name="Shape 20"/>
-          <p:cNvSpPr/>
-          <p:nvPr/>
-        </p:nvSpPr>
-        <p:spPr>
-          <a:xfrm>
-            <a:off x="9790938" y="2971800"/>
+          <p:cNvPr id="8" name="Shape 5"/>
+          <p:cNvSpPr/>
+          <p:nvPr/>
+        </p:nvSpPr>
+        <p:spPr>
+          <a:xfrm>
+            <a:off x="1652778" y="2971800"/>
             <a:ext cx="822960" cy="822960"/>
           </a:xfrm>
           <a:prstGeom prst="ellipse">
@@ -5298,13 +5590,13 @@
       </p:sp>
       <p:sp>
         <p:nvSpPr>
-          <p:cNvPr id="24" name="Shape 21"/>
+          <p:cNvPr id="9" name="Shape 6"/>
           <p:cNvSpPr/>
           <p:nvPr/>
         </p:nvSpPr>
         <p:spPr>
           <a:xfrm rot="5400000">
-            <a:off x="10083546" y="3218688"/>
+            <a:off x="1945386" y="3218688"/>
             <a:ext cx="329184" cy="329184"/>
           </a:xfrm>
           <a:prstGeom prst="triangle">
@@ -5318,13 +5610,13 @@
       </p:sp>
       <p:sp>
         <p:nvSpPr>
-          <p:cNvPr id="25" name="Text 22"/>
-          <p:cNvSpPr/>
-          <p:nvPr/>
-        </p:nvSpPr>
-        <p:spPr>
-          <a:xfrm>
-            <a:off x="8915400" y="3977640"/>
+          <p:cNvPr id="10" name="Text 7"/>
+          <p:cNvSpPr/>
+          <p:nvPr/>
+        </p:nvSpPr>
+        <p:spPr>
+          <a:xfrm>
+            <a:off x="777240" y="3977640"/>
             <a:ext cx="2574036" cy="457200"/>
           </a:xfrm>
           <a:prstGeom prst="rect">
@@ -5349,7 +5641,7 @@
                 <a:ea typeface="Fraunces" pitchFamily="34" charset="-122"/>
                 <a:cs typeface="Fraunces" pitchFamily="34" charset="-120"/>
               </a:rPr>
-              <a:t>Demo 1</a:t>
+              <a:t>Demo 5</a:t>
             </a:r>
             <a:endParaRPr lang="en-US" sz="2400" dirty="0"/>
           </a:p>
@@ -5357,40 +5649,533 @@
       </p:sp>
       <p:sp>
         <p:nvSpPr>
+          <p:cNvPr id="11" name="Text 8"/>
+          <p:cNvSpPr/>
+          <p:nvPr/>
+        </p:nvSpPr>
+        <p:spPr>
+          <a:xfrm>
+            <a:off x="777240" y="4434840"/>
+            <a:ext cx="2574036" cy="320040"/>
+          </a:xfrm>
+          <a:prstGeom prst="rect">
+            <a:avLst/>
+          </a:prstGeom>
+          <a:noFill/>
+          <a:ln/>
+        </p:spPr>
+        <p:txBody>
+          <a:bodyPr wrap="square" lIns="0" tIns="0" rIns="0" bIns="0" rtlCol="0" anchor="ctr"/>
+          <a:lstStyle/>
+          <a:p>
+            <a:pPr algn="ctr" indent="0" marL="0">
+              <a:buNone/>
+            </a:pPr>
+            <a:r>
+              <a:rPr lang="en-US" sz="1200" dirty="0">
+                <a:solidFill>
+                  <a:srgbClr val="6B7C77"/>
+                </a:solidFill>
+                <a:latin typeface="Manrope" pitchFamily="34" charset="0"/>
+                <a:ea typeface="Manrope" pitchFamily="34" charset="-122"/>
+                <a:cs typeface="Manrope" pitchFamily="34" charset="-120"/>
+              </a:rPr>
+              <a:t>Video plays here</a:t>
+            </a:r>
+            <a:endParaRPr lang="en-US" sz="1200" dirty="0"/>
+          </a:p>
+        </p:txBody>
+      </p:sp>
+      <p:sp>
+        <p:nvSpPr>
+          <p:cNvPr id="12" name="Text 9"/>
+          <p:cNvSpPr/>
+          <p:nvPr/>
+        </p:nvSpPr>
+        <p:spPr>
+          <a:xfrm>
+            <a:off x="4206240" y="1051560"/>
+            <a:ext cx="4572000" cy="274320"/>
+          </a:xfrm>
+          <a:prstGeom prst="rect">
+            <a:avLst/>
+          </a:prstGeom>
+          <a:noFill/>
+          <a:ln/>
+        </p:spPr>
+        <p:txBody>
+          <a:bodyPr wrap="square" lIns="0" tIns="0" rIns="0" bIns="0" rtlCol="0" anchor="t"/>
+          <a:lstStyle/>
+          <a:p>
+            <a:pPr indent="0" marL="0">
+              <a:buNone/>
+            </a:pPr>
+            <a:r>
+              <a:rPr lang="en-US" sz="1200" b="1" spc="250" kern="0" dirty="0">
+                <a:solidFill>
+                  <a:srgbClr val="1D9A84"/>
+                </a:solidFill>
+                <a:latin typeface="Manrope" pitchFamily="34" charset="0"/>
+                <a:ea typeface="Manrope" pitchFamily="34" charset="-122"/>
+                <a:cs typeface="Manrope" pitchFamily="34" charset="-120"/>
+              </a:rPr>
+              <a:t>JUST TALK</a:t>
+            </a:r>
+            <a:endParaRPr lang="en-US" sz="1200" dirty="0"/>
+          </a:p>
+        </p:txBody>
+      </p:sp>
+      <p:sp>
+        <p:nvSpPr>
+          <p:cNvPr id="13" name="Text 10"/>
+          <p:cNvSpPr/>
+          <p:nvPr/>
+        </p:nvSpPr>
+        <p:spPr>
+          <a:xfrm>
+            <a:off x="4206240" y="1371600"/>
+            <a:ext cx="7406640" cy="822960"/>
+          </a:xfrm>
+          <a:prstGeom prst="rect">
+            <a:avLst/>
+          </a:prstGeom>
+          <a:noFill/>
+          <a:ln/>
+        </p:spPr>
+        <p:txBody>
+          <a:bodyPr wrap="square" lIns="0" tIns="0" rIns="0" bIns="0" rtlCol="0" anchor="t"/>
+          <a:lstStyle/>
+          <a:p>
+            <a:pPr indent="0" marL="0">
+              <a:buNone/>
+            </a:pPr>
+            <a:r>
+              <a:rPr lang="en-US" sz="3600" b="1" dirty="0">
+                <a:solidFill>
+                  <a:srgbClr val="10201C"/>
+                </a:solidFill>
+                <a:latin typeface="Fraunces" pitchFamily="34" charset="0"/>
+                <a:ea typeface="Fraunces" pitchFamily="34" charset="-122"/>
+                <a:cs typeface="Fraunces" pitchFamily="34" charset="-120"/>
+              </a:rPr>
+              <a:t>You talk. Voxa listens and acts.</a:t>
+            </a:r>
+            <a:endParaRPr lang="en-US" sz="3600" dirty="0"/>
+          </a:p>
+        </p:txBody>
+      </p:sp>
+      <p:sp>
+        <p:nvSpPr>
+          <p:cNvPr id="14" name="Text 11"/>
+          <p:cNvSpPr/>
+          <p:nvPr/>
+        </p:nvSpPr>
+        <p:spPr>
+          <a:xfrm>
+            <a:off x="4206240" y="2359152"/>
+            <a:ext cx="7269480" cy="411480"/>
+          </a:xfrm>
+          <a:prstGeom prst="rect">
+            <a:avLst/>
+          </a:prstGeom>
+          <a:noFill/>
+          <a:ln/>
+        </p:spPr>
+        <p:txBody>
+          <a:bodyPr wrap="square" lIns="0" tIns="0" rIns="0" bIns="0" rtlCol="0" anchor="t"/>
+          <a:lstStyle/>
+          <a:p>
+            <a:pPr indent="0" marL="0">
+              <a:lnSpc>
+                <a:spcPct val="130000"/>
+              </a:lnSpc>
+              <a:buNone/>
+            </a:pPr>
+            <a:r>
+              <a:rPr lang="en-US" sz="1800" dirty="0">
+                <a:solidFill>
+                  <a:srgbClr val="3E504B"/>
+                </a:solidFill>
+                <a:latin typeface="Manrope" pitchFamily="34" charset="0"/>
+                <a:ea typeface="Manrope" pitchFamily="34" charset="-122"/>
+                <a:cs typeface="Manrope" pitchFamily="34" charset="-120"/>
+              </a:rPr>
+              <a:t>No perfect words needed. Talk like you normally do, ums and all.</a:t>
+            </a:r>
+            <a:endParaRPr lang="en-US" sz="1800" dirty="0"/>
+          </a:p>
+        </p:txBody>
+      </p:sp>
+      <p:sp>
+        <p:nvSpPr>
+          <p:cNvPr id="15" name="Shape 12"/>
+          <p:cNvSpPr/>
+          <p:nvPr/>
+        </p:nvSpPr>
+        <p:spPr>
+          <a:xfrm>
+            <a:off x="5257800" y="2926080"/>
+            <a:ext cx="6217920" cy="868680"/>
+          </a:xfrm>
+          <a:prstGeom prst="roundRect">
+            <a:avLst>
+              <a:gd name="adj" fmla="val 23158"/>
+            </a:avLst>
+          </a:prstGeom>
+          <a:solidFill>
+            <a:srgbClr val="FFFFFF"/>
+          </a:solidFill>
+          <a:ln w="9525">
+            <a:solidFill>
+              <a:srgbClr val="DBE6E2"/>
+            </a:solidFill>
+            <a:prstDash val="solid"/>
+          </a:ln>
+        </p:spPr>
+      </p:sp>
+      <p:sp>
+        <p:nvSpPr>
+          <p:cNvPr id="16" name="Text 13"/>
+          <p:cNvSpPr/>
+          <p:nvPr/>
+        </p:nvSpPr>
+        <p:spPr>
+          <a:xfrm>
+            <a:off x="5532120" y="2926080"/>
+            <a:ext cx="5669280" cy="868680"/>
+          </a:xfrm>
+          <a:prstGeom prst="rect">
+            <a:avLst/>
+          </a:prstGeom>
+          <a:noFill/>
+          <a:ln/>
+        </p:spPr>
+        <p:txBody>
+          <a:bodyPr wrap="square" lIns="0" tIns="0" rIns="0" bIns="0" rtlCol="0" anchor="ctr"/>
+          <a:lstStyle/>
+          <a:p>
+            <a:pPr indent="0" marL="0">
+              <a:lnSpc>
+                <a:spcPct val="115000"/>
+              </a:lnSpc>
+              <a:buNone/>
+            </a:pPr>
+            <a:r>
+              <a:rPr lang="en-US" sz="1550" i="1" dirty="0">
+                <a:solidFill>
+                  <a:srgbClr val="10201C"/>
+                </a:solidFill>
+                <a:latin typeface="Manrope" pitchFamily="34" charset="0"/>
+                <a:ea typeface="Manrope" pitchFamily="34" charset="-122"/>
+                <a:cs typeface="Manrope" pitchFamily="34" charset="-120"/>
+              </a:rPr>
+              <a:t>“Um, can you, uh… put lunch with a client on my, uh, calendar for Friday at, um, 2?”</a:t>
+            </a:r>
+            <a:endParaRPr lang="en-US" sz="1550" dirty="0"/>
+          </a:p>
+        </p:txBody>
+      </p:sp>
+      <p:sp>
+        <p:nvSpPr>
+          <p:cNvPr id="17" name="Shape 14"/>
+          <p:cNvSpPr/>
+          <p:nvPr/>
+        </p:nvSpPr>
+        <p:spPr>
+          <a:xfrm>
+            <a:off x="4206240" y="3931920"/>
+            <a:ext cx="6217920" cy="658368"/>
+          </a:xfrm>
+          <a:prstGeom prst="roundRect">
+            <a:avLst>
+              <a:gd name="adj" fmla="val 30556"/>
+            </a:avLst>
+          </a:prstGeom>
+          <a:solidFill>
+            <a:srgbClr val="0F5A4F"/>
+          </a:solidFill>
+          <a:ln/>
+        </p:spPr>
+      </p:sp>
+      <p:sp>
+        <p:nvSpPr>
+          <p:cNvPr id="18" name="Text 15"/>
+          <p:cNvSpPr/>
+          <p:nvPr/>
+        </p:nvSpPr>
+        <p:spPr>
+          <a:xfrm>
+            <a:off x="4480560" y="3931920"/>
+            <a:ext cx="5669280" cy="658368"/>
+          </a:xfrm>
+          <a:prstGeom prst="rect">
+            <a:avLst/>
+          </a:prstGeom>
+          <a:noFill/>
+          <a:ln/>
+        </p:spPr>
+        <p:txBody>
+          <a:bodyPr wrap="square" lIns="0" tIns="0" rIns="0" bIns="0" rtlCol="0" anchor="ctr"/>
+          <a:lstStyle/>
+          <a:p>
+            <a:pPr indent="0" marL="0">
+              <a:buNone/>
+            </a:pPr>
+            <a:r>
+              <a:rPr lang="en-US" sz="1550" b="1" dirty="0">
+                <a:solidFill>
+                  <a:srgbClr val="FFFFFF"/>
+                </a:solidFill>
+                <a:latin typeface="Manrope" pitchFamily="34" charset="0"/>
+                <a:ea typeface="Manrope" pitchFamily="34" charset="-122"/>
+                <a:cs typeface="Manrope" pitchFamily="34" charset="-120"/>
+              </a:rPr>
+              <a:t>“You have a showing then. You’re free at noon, or anytime Saturday.”</a:t>
+            </a:r>
+            <a:endParaRPr lang="en-US" sz="1550" dirty="0"/>
+          </a:p>
+        </p:txBody>
+      </p:sp>
+      <p:sp>
+        <p:nvSpPr>
+          <p:cNvPr id="19" name="Shape 16"/>
+          <p:cNvSpPr/>
+          <p:nvPr/>
+        </p:nvSpPr>
+        <p:spPr>
+          <a:xfrm>
+            <a:off x="4206240" y="4773168"/>
+            <a:ext cx="7269480" cy="804672"/>
+          </a:xfrm>
+          <a:prstGeom prst="roundRect">
+            <a:avLst>
+              <a:gd name="adj" fmla="val 25000"/>
+            </a:avLst>
+          </a:prstGeom>
+          <a:solidFill>
+            <a:srgbClr val="FFFFFF"/>
+          </a:solidFill>
+          <a:ln/>
+          <a:effectLst>
+            <a:outerShdw sx="100000" sy="100000" kx="0" ky="0" algn="bl" rotWithShape="0" blurRad="304800" dist="50800" dir="5400000">
+              <a:srgbClr val="0F5A4F">
+                <a:alpha val="10000"/>
+              </a:srgbClr>
+            </a:outerShdw>
+          </a:effectLst>
+        </p:spPr>
+      </p:sp>
+      <p:sp>
+        <p:nvSpPr>
+          <p:cNvPr id="20" name="Shape 17"/>
+          <p:cNvSpPr/>
+          <p:nvPr/>
+        </p:nvSpPr>
+        <p:spPr>
+          <a:xfrm>
+            <a:off x="4407408" y="4937760"/>
+            <a:ext cx="475488" cy="475488"/>
+          </a:xfrm>
+          <a:prstGeom prst="roundRect">
+            <a:avLst>
+              <a:gd name="adj" fmla="val 26923"/>
+            </a:avLst>
+          </a:prstGeom>
+          <a:solidFill>
+            <a:srgbClr val="E3F1EC"/>
+          </a:solidFill>
+          <a:ln/>
+        </p:spPr>
+      </p:sp>
+      <p:sp>
+        <p:nvSpPr>
+          <p:cNvPr id="21" name="Shape 18"/>
+          <p:cNvSpPr/>
+          <p:nvPr/>
+        </p:nvSpPr>
+        <p:spPr>
+          <a:xfrm>
+            <a:off x="4517136" y="5047488"/>
+            <a:ext cx="256032" cy="237744"/>
+          </a:xfrm>
+          <a:prstGeom prst="rect">
+            <a:avLst/>
+          </a:prstGeom>
+          <a:solidFill>
+            <a:srgbClr val="FFFFFF"/>
+          </a:solidFill>
+          <a:ln w="19050">
+            <a:solidFill>
+              <a:srgbClr val="0F5A4F"/>
+            </a:solidFill>
+            <a:prstDash val="solid"/>
+          </a:ln>
+        </p:spPr>
+      </p:sp>
+      <p:sp>
+        <p:nvSpPr>
+          <p:cNvPr id="22" name="Shape 19"/>
+          <p:cNvSpPr/>
+          <p:nvPr/>
+        </p:nvSpPr>
+        <p:spPr>
+          <a:xfrm>
+            <a:off x="4517136" y="5047488"/>
+            <a:ext cx="256032" cy="73152"/>
+          </a:xfrm>
+          <a:prstGeom prst="rect">
+            <a:avLst/>
+          </a:prstGeom>
+          <a:solidFill>
+            <a:srgbClr val="0F5A4F"/>
+          </a:solidFill>
+          <a:ln/>
+        </p:spPr>
+      </p:sp>
+      <p:sp>
+        <p:nvSpPr>
+          <p:cNvPr id="23" name="Text 20"/>
+          <p:cNvSpPr/>
+          <p:nvPr/>
+        </p:nvSpPr>
+        <p:spPr>
+          <a:xfrm>
+            <a:off x="5074920" y="4773168"/>
+            <a:ext cx="4023360" cy="804672"/>
+          </a:xfrm>
+          <a:prstGeom prst="rect">
+            <a:avLst/>
+          </a:prstGeom>
+          <a:noFill/>
+          <a:ln/>
+        </p:spPr>
+        <p:txBody>
+          <a:bodyPr wrap="square" lIns="0" tIns="0" rIns="0" bIns="0" rtlCol="0" anchor="ctr"/>
+          <a:lstStyle/>
+          <a:p>
+            <a:pPr indent="0" marL="0">
+              <a:buNone/>
+            </a:pPr>
+            <a:r>
+              <a:rPr lang="en-US" sz="1700" b="1" dirty="0">
+                <a:solidFill>
+                  <a:srgbClr val="10201C"/>
+                </a:solidFill>
+                <a:latin typeface="Manrope" pitchFamily="34" charset="0"/>
+                <a:ea typeface="Manrope" pitchFamily="34" charset="-122"/>
+                <a:cs typeface="Manrope" pitchFamily="34" charset="-120"/>
+              </a:rPr>
+              <a:t>Lunch with client · Fri 12:00 PM</a:t>
+            </a:r>
+            <a:endParaRPr lang="en-US" sz="1700" dirty="0"/>
+          </a:p>
+        </p:txBody>
+      </p:sp>
+      <p:sp>
+        <p:nvSpPr>
+          <p:cNvPr id="24" name="Shape 21"/>
+          <p:cNvSpPr/>
+          <p:nvPr/>
+        </p:nvSpPr>
+        <p:spPr>
+          <a:xfrm>
+            <a:off x="9235440" y="4937760"/>
+            <a:ext cx="2011680" cy="475488"/>
+          </a:xfrm>
+          <a:prstGeom prst="roundRect">
+            <a:avLst>
+              <a:gd name="adj" fmla="val 50000"/>
+            </a:avLst>
+          </a:prstGeom>
+          <a:solidFill>
+            <a:srgbClr val="0F5A4F"/>
+          </a:solidFill>
+          <a:ln w="12700">
+            <a:solidFill>
+              <a:srgbClr val="0F5A4F"/>
+            </a:solidFill>
+            <a:prstDash val="solid"/>
+          </a:ln>
+        </p:spPr>
+      </p:sp>
+      <p:sp>
+        <p:nvSpPr>
+          <p:cNvPr id="25" name="Text 22"/>
+          <p:cNvSpPr/>
+          <p:nvPr/>
+        </p:nvSpPr>
+        <p:spPr>
+          <a:xfrm>
+            <a:off x="9418320" y="4937760"/>
+            <a:ext cx="1645920" cy="475488"/>
+          </a:xfrm>
+          <a:prstGeom prst="rect">
+            <a:avLst/>
+          </a:prstGeom>
+          <a:noFill/>
+          <a:ln/>
+        </p:spPr>
+        <p:txBody>
+          <a:bodyPr wrap="square" lIns="0" tIns="0" rIns="0" bIns="0" rtlCol="0" anchor="ctr"/>
+          <a:lstStyle/>
+          <a:p>
+            <a:pPr algn="ctr" indent="0" marL="0">
+              <a:buNone/>
+            </a:pPr>
+            <a:r>
+              <a:rPr lang="en-US" sz="1400" b="1" dirty="0">
+                <a:solidFill>
+                  <a:srgbClr val="FFFFFF"/>
+                </a:solidFill>
+                <a:latin typeface="Manrope" pitchFamily="34" charset="0"/>
+                <a:ea typeface="Manrope" pitchFamily="34" charset="-122"/>
+                <a:cs typeface="Manrope" pitchFamily="34" charset="-120"/>
+              </a:rPr>
+              <a:t>Add to calendar</a:t>
+            </a:r>
+            <a:endParaRPr lang="en-US" sz="1400" dirty="0"/>
+          </a:p>
+        </p:txBody>
+      </p:sp>
+      <p:sp>
+        <p:nvSpPr>
           <p:cNvPr id="26" name="Text 23"/>
           <p:cNvSpPr/>
           <p:nvPr/>
         </p:nvSpPr>
         <p:spPr>
           <a:xfrm>
-            <a:off x="8915400" y="4434840"/>
-            <a:ext cx="2574036" cy="320040"/>
-          </a:xfrm>
-          <a:prstGeom prst="rect">
-            <a:avLst/>
-          </a:prstGeom>
-          <a:noFill/>
-          <a:ln/>
-        </p:spPr>
-        <p:txBody>
-          <a:bodyPr wrap="square" lIns="0" tIns="0" rIns="0" bIns="0" rtlCol="0" anchor="ctr"/>
-          <a:lstStyle/>
-          <a:p>
-            <a:pPr algn="ctr" indent="0" marL="0">
-              <a:buNone/>
-            </a:pPr>
-            <a:r>
-              <a:rPr lang="en-US" sz="1200" dirty="0">
-                <a:solidFill>
-                  <a:srgbClr val="6B7C77"/>
-                </a:solidFill>
-                <a:latin typeface="Manrope" pitchFamily="34" charset="0"/>
-                <a:ea typeface="Manrope" pitchFamily="34" charset="-122"/>
-                <a:cs typeface="Manrope" pitchFamily="34" charset="-120"/>
-              </a:rPr>
-              <a:t>Video plays here</a:t>
-            </a:r>
-            <a:endParaRPr lang="en-US" sz="1200" dirty="0"/>
+            <a:off x="4206240" y="5760720"/>
+            <a:ext cx="7269480" cy="411480"/>
+          </a:xfrm>
+          <a:prstGeom prst="rect">
+            <a:avLst/>
+          </a:prstGeom>
+          <a:noFill/>
+          <a:ln/>
+        </p:spPr>
+        <p:txBody>
+          <a:bodyPr wrap="square" lIns="0" tIns="0" rIns="0" bIns="0" rtlCol="0" anchor="t"/>
+          <a:lstStyle/>
+          <a:p>
+            <a:pPr indent="0" marL="0">
+              <a:lnSpc>
+                <a:spcPct val="130000"/>
+              </a:lnSpc>
+              <a:buNone/>
+            </a:pPr>
+            <a:r>
+              <a:rPr lang="en-US" sz="1600" dirty="0">
+                <a:solidFill>
+                  <a:srgbClr val="3E504B"/>
+                </a:solidFill>
+                <a:latin typeface="Manrope" pitchFamily="34" charset="0"/>
+                <a:ea typeface="Manrope" pitchFamily="34" charset="-122"/>
+                <a:cs typeface="Manrope" pitchFamily="34" charset="-120"/>
+              </a:rPr>
+              <a:t>It checks your calendar, then fills in the event for you to add.</a:t>
+            </a:r>
+            <a:endParaRPr lang="en-US" sz="1600" dirty="0"/>
           </a:p>
         </p:txBody>
       </p:sp>
@@ -5522,7 +6307,7 @@
                 <a:ea typeface="Manrope" pitchFamily="34" charset="-122"/>
                 <a:cs typeface="Manrope" pitchFamily="34" charset="-120"/>
               </a:rPr>
-              <a:t>05 / 10</a:t>
+              <a:t>05 / 11</a:t>
             </a:r>
             <a:endParaRPr lang="en-US" sz="1100" dirty="0"/>
           </a:p>
@@ -5530,13 +6315,533 @@
       </p:sp>
       <p:sp>
         <p:nvSpPr>
-          <p:cNvPr id="5" name="VIDEO_SLOT Demo 2"/>
-          <p:cNvSpPr/>
-          <p:nvPr/>
-        </p:nvSpPr>
-        <p:spPr>
-          <a:xfrm>
-            <a:off x="777240" y="868680"/>
+          <p:cNvPr id="5" name="Text 2"/>
+          <p:cNvSpPr/>
+          <p:nvPr/>
+        </p:nvSpPr>
+        <p:spPr>
+          <a:xfrm>
+            <a:off x="685800" y="1188720"/>
+            <a:ext cx="4572000" cy="274320"/>
+          </a:xfrm>
+          <a:prstGeom prst="rect">
+            <a:avLst/>
+          </a:prstGeom>
+          <a:noFill/>
+          <a:ln/>
+        </p:spPr>
+        <p:txBody>
+          <a:bodyPr wrap="square" lIns="0" tIns="0" rIns="0" bIns="0" rtlCol="0" anchor="t"/>
+          <a:lstStyle/>
+          <a:p>
+            <a:pPr indent="0" marL="0">
+              <a:buNone/>
+            </a:pPr>
+            <a:r>
+              <a:rPr lang="en-US" sz="1200" b="1" spc="250" kern="0" dirty="0">
+                <a:solidFill>
+                  <a:srgbClr val="1D9A84"/>
+                </a:solidFill>
+                <a:latin typeface="Manrope" pitchFamily="34" charset="0"/>
+                <a:ea typeface="Manrope" pitchFamily="34" charset="-122"/>
+                <a:cs typeface="Manrope" pitchFamily="34" charset="-120"/>
+              </a:rPr>
+              <a:t>TRUSTED FRIEND</a:t>
+            </a:r>
+            <a:endParaRPr lang="en-US" sz="1200" dirty="0"/>
+          </a:p>
+        </p:txBody>
+      </p:sp>
+      <p:sp>
+        <p:nvSpPr>
+          <p:cNvPr id="6" name="Text 3"/>
+          <p:cNvSpPr/>
+          <p:nvPr/>
+        </p:nvSpPr>
+        <p:spPr>
+          <a:xfrm>
+            <a:off x="685800" y="1554480"/>
+            <a:ext cx="6766560" cy="822960"/>
+          </a:xfrm>
+          <a:prstGeom prst="rect">
+            <a:avLst/>
+          </a:prstGeom>
+          <a:noFill/>
+          <a:ln/>
+        </p:spPr>
+        <p:txBody>
+          <a:bodyPr wrap="square" lIns="0" tIns="0" rIns="0" bIns="0" rtlCol="0" anchor="t"/>
+          <a:lstStyle/>
+          <a:p>
+            <a:pPr indent="0" marL="0">
+              <a:buNone/>
+            </a:pPr>
+            <a:r>
+              <a:rPr lang="en-US" sz="4400" b="1" dirty="0">
+                <a:solidFill>
+                  <a:srgbClr val="10201C"/>
+                </a:solidFill>
+                <a:latin typeface="Fraunces" pitchFamily="34" charset="0"/>
+                <a:ea typeface="Fraunces" pitchFamily="34" charset="-122"/>
+                <a:cs typeface="Fraunces" pitchFamily="34" charset="-120"/>
+              </a:rPr>
+              <a:t>Talk it through.</a:t>
+            </a:r>
+            <a:endParaRPr lang="en-US" sz="4400" dirty="0"/>
+          </a:p>
+        </p:txBody>
+      </p:sp>
+      <p:sp>
+        <p:nvSpPr>
+          <p:cNvPr id="7" name="Shape 4"/>
+          <p:cNvSpPr/>
+          <p:nvPr/>
+        </p:nvSpPr>
+        <p:spPr>
+          <a:xfrm>
+            <a:off x="548640" y="2697480"/>
+            <a:ext cx="7680960" cy="3429000"/>
+          </a:xfrm>
+          <a:prstGeom prst="roundRect">
+            <a:avLst>
+              <a:gd name="adj" fmla="val 8000"/>
+            </a:avLst>
+          </a:prstGeom>
+          <a:solidFill>
+            <a:srgbClr val="E3F1EC"/>
+          </a:solidFill>
+          <a:ln/>
+        </p:spPr>
+      </p:sp>
+      <p:sp>
+        <p:nvSpPr>
+          <p:cNvPr id="8" name="Shape 5"/>
+          <p:cNvSpPr/>
+          <p:nvPr/>
+        </p:nvSpPr>
+        <p:spPr>
+          <a:xfrm>
+            <a:off x="914400" y="3063240"/>
+            <a:ext cx="384048" cy="384048"/>
+          </a:xfrm>
+          <a:prstGeom prst="ellipse">
+            <a:avLst/>
+          </a:prstGeom>
+          <a:solidFill>
+            <a:srgbClr val="0F5A4F"/>
+          </a:solidFill>
+          <a:ln/>
+        </p:spPr>
+      </p:sp>
+      <p:sp>
+        <p:nvSpPr>
+          <p:cNvPr id="9" name="Text 6"/>
+          <p:cNvSpPr/>
+          <p:nvPr/>
+        </p:nvSpPr>
+        <p:spPr>
+          <a:xfrm>
+            <a:off x="914400" y="3063240"/>
+            <a:ext cx="384048" cy="384048"/>
+          </a:xfrm>
+          <a:prstGeom prst="rect">
+            <a:avLst/>
+          </a:prstGeom>
+          <a:noFill/>
+          <a:ln/>
+        </p:spPr>
+        <p:txBody>
+          <a:bodyPr wrap="square" lIns="0" tIns="0" rIns="0" bIns="0" rtlCol="0" anchor="ctr"/>
+          <a:lstStyle/>
+          <a:p>
+            <a:pPr algn="ctr" indent="0" marL="0">
+              <a:buNone/>
+            </a:pPr>
+            <a:r>
+              <a:rPr lang="en-US" sz="1700" b="1" dirty="0">
+                <a:solidFill>
+                  <a:srgbClr val="FFFFFF"/>
+                </a:solidFill>
+                <a:latin typeface="Manrope" pitchFamily="34" charset="0"/>
+                <a:ea typeface="Manrope" pitchFamily="34" charset="-122"/>
+                <a:cs typeface="Manrope" pitchFamily="34" charset="-120"/>
+              </a:rPr>
+              <a:t>✓</a:t>
+            </a:r>
+            <a:endParaRPr lang="en-US" sz="1700" dirty="0"/>
+          </a:p>
+        </p:txBody>
+      </p:sp>
+      <p:sp>
+        <p:nvSpPr>
+          <p:cNvPr id="10" name="Text 7"/>
+          <p:cNvSpPr/>
+          <p:nvPr/>
+        </p:nvSpPr>
+        <p:spPr>
+          <a:xfrm>
+            <a:off x="1508760" y="3017520"/>
+            <a:ext cx="6400800" cy="384048"/>
+          </a:xfrm>
+          <a:prstGeom prst="rect">
+            <a:avLst/>
+          </a:prstGeom>
+          <a:noFill/>
+          <a:ln/>
+        </p:spPr>
+        <p:txBody>
+          <a:bodyPr wrap="square" lIns="0" tIns="0" rIns="0" bIns="0" rtlCol="0" anchor="ctr"/>
+          <a:lstStyle/>
+          <a:p>
+            <a:pPr indent="0" marL="0">
+              <a:buNone/>
+            </a:pPr>
+            <a:r>
+              <a:rPr lang="en-US" sz="1900" b="1" dirty="0">
+                <a:solidFill>
+                  <a:srgbClr val="10201C"/>
+                </a:solidFill>
+                <a:latin typeface="Manrope" pitchFamily="34" charset="0"/>
+                <a:ea typeface="Manrope" pitchFamily="34" charset="-122"/>
+                <a:cs typeface="Manrope" pitchFamily="34" charset="-120"/>
+              </a:rPr>
+              <a:t>Voxa speaks first</a:t>
+            </a:r>
+            <a:endParaRPr lang="en-US" sz="1900" dirty="0"/>
+          </a:p>
+        </p:txBody>
+      </p:sp>
+      <p:sp>
+        <p:nvSpPr>
+          <p:cNvPr id="11" name="Text 8"/>
+          <p:cNvSpPr/>
+          <p:nvPr/>
+        </p:nvSpPr>
+        <p:spPr>
+          <a:xfrm>
+            <a:off x="1508760" y="3438144"/>
+            <a:ext cx="6400800" cy="411480"/>
+          </a:xfrm>
+          <a:prstGeom prst="rect">
+            <a:avLst/>
+          </a:prstGeom>
+          <a:noFill/>
+          <a:ln/>
+        </p:spPr>
+        <p:txBody>
+          <a:bodyPr wrap="square" lIns="0" tIns="0" rIns="0" bIns="0" rtlCol="0" anchor="t"/>
+          <a:lstStyle/>
+          <a:p>
+            <a:pPr indent="0" marL="0">
+              <a:lnSpc>
+                <a:spcPct val="130000"/>
+              </a:lnSpc>
+              <a:buNone/>
+            </a:pPr>
+            <a:r>
+              <a:rPr lang="en-US" sz="1600" dirty="0">
+                <a:solidFill>
+                  <a:srgbClr val="3E504B"/>
+                </a:solidFill>
+                <a:latin typeface="Manrope" pitchFamily="34" charset="0"/>
+                <a:ea typeface="Manrope" pitchFamily="34" charset="-122"/>
+                <a:cs typeface="Manrope" pitchFamily="34" charset="-120"/>
+              </a:rPr>
+              <a:t>It opens with 2–3 ideas for your day.</a:t>
+            </a:r>
+            <a:endParaRPr lang="en-US" sz="1600" dirty="0"/>
+          </a:p>
+        </p:txBody>
+      </p:sp>
+      <p:sp>
+        <p:nvSpPr>
+          <p:cNvPr id="12" name="Shape 9"/>
+          <p:cNvSpPr/>
+          <p:nvPr/>
+        </p:nvSpPr>
+        <p:spPr>
+          <a:xfrm>
+            <a:off x="914400" y="4069080"/>
+            <a:ext cx="384048" cy="384048"/>
+          </a:xfrm>
+          <a:prstGeom prst="ellipse">
+            <a:avLst/>
+          </a:prstGeom>
+          <a:solidFill>
+            <a:srgbClr val="0F5A4F"/>
+          </a:solidFill>
+          <a:ln/>
+        </p:spPr>
+      </p:sp>
+      <p:sp>
+        <p:nvSpPr>
+          <p:cNvPr id="13" name="Text 10"/>
+          <p:cNvSpPr/>
+          <p:nvPr/>
+        </p:nvSpPr>
+        <p:spPr>
+          <a:xfrm>
+            <a:off x="914400" y="4069080"/>
+            <a:ext cx="384048" cy="384048"/>
+          </a:xfrm>
+          <a:prstGeom prst="rect">
+            <a:avLst/>
+          </a:prstGeom>
+          <a:noFill/>
+          <a:ln/>
+        </p:spPr>
+        <p:txBody>
+          <a:bodyPr wrap="square" lIns="0" tIns="0" rIns="0" bIns="0" rtlCol="0" anchor="ctr"/>
+          <a:lstStyle/>
+          <a:p>
+            <a:pPr algn="ctr" indent="0" marL="0">
+              <a:buNone/>
+            </a:pPr>
+            <a:r>
+              <a:rPr lang="en-US" sz="1700" b="1" dirty="0">
+                <a:solidFill>
+                  <a:srgbClr val="FFFFFF"/>
+                </a:solidFill>
+                <a:latin typeface="Manrope" pitchFamily="34" charset="0"/>
+                <a:ea typeface="Manrope" pitchFamily="34" charset="-122"/>
+                <a:cs typeface="Manrope" pitchFamily="34" charset="-120"/>
+              </a:rPr>
+              <a:t>✓</a:t>
+            </a:r>
+            <a:endParaRPr lang="en-US" sz="1700" dirty="0"/>
+          </a:p>
+        </p:txBody>
+      </p:sp>
+      <p:sp>
+        <p:nvSpPr>
+          <p:cNvPr id="14" name="Text 11"/>
+          <p:cNvSpPr/>
+          <p:nvPr/>
+        </p:nvSpPr>
+        <p:spPr>
+          <a:xfrm>
+            <a:off x="1508760" y="4023360"/>
+            <a:ext cx="6400800" cy="384048"/>
+          </a:xfrm>
+          <a:prstGeom prst="rect">
+            <a:avLst/>
+          </a:prstGeom>
+          <a:noFill/>
+          <a:ln/>
+        </p:spPr>
+        <p:txBody>
+          <a:bodyPr wrap="square" lIns="0" tIns="0" rIns="0" bIns="0" rtlCol="0" anchor="ctr"/>
+          <a:lstStyle/>
+          <a:p>
+            <a:pPr indent="0" marL="0">
+              <a:buNone/>
+            </a:pPr>
+            <a:r>
+              <a:rPr lang="en-US" sz="1900" b="1" dirty="0">
+                <a:solidFill>
+                  <a:srgbClr val="10201C"/>
+                </a:solidFill>
+                <a:latin typeface="Manrope" pitchFamily="34" charset="0"/>
+                <a:ea typeface="Manrope" pitchFamily="34" charset="-122"/>
+                <a:cs typeface="Manrope" pitchFamily="34" charset="-120"/>
+              </a:rPr>
+              <a:t>It pushes back honestly</a:t>
+            </a:r>
+            <a:endParaRPr lang="en-US" sz="1900" dirty="0"/>
+          </a:p>
+        </p:txBody>
+      </p:sp>
+      <p:sp>
+        <p:nvSpPr>
+          <p:cNvPr id="15" name="Text 12"/>
+          <p:cNvSpPr/>
+          <p:nvPr/>
+        </p:nvSpPr>
+        <p:spPr>
+          <a:xfrm>
+            <a:off x="1508760" y="4443984"/>
+            <a:ext cx="6400800" cy="411480"/>
+          </a:xfrm>
+          <a:prstGeom prst="rect">
+            <a:avLst/>
+          </a:prstGeom>
+          <a:noFill/>
+          <a:ln/>
+        </p:spPr>
+        <p:txBody>
+          <a:bodyPr wrap="square" lIns="0" tIns="0" rIns="0" bIns="0" rtlCol="0" anchor="t"/>
+          <a:lstStyle/>
+          <a:p>
+            <a:pPr indent="0" marL="0">
+              <a:lnSpc>
+                <a:spcPct val="130000"/>
+              </a:lnSpc>
+              <a:buNone/>
+            </a:pPr>
+            <a:r>
+              <a:rPr lang="en-US" sz="1600" dirty="0">
+                <a:solidFill>
+                  <a:srgbClr val="3E504B"/>
+                </a:solidFill>
+                <a:latin typeface="Manrope" pitchFamily="34" charset="0"/>
+                <a:ea typeface="Manrope" pitchFamily="34" charset="-122"/>
+                <a:cs typeface="Manrope" pitchFamily="34" charset="-120"/>
+              </a:rPr>
+              <a:t>If a plan won’t work, it says so.</a:t>
+            </a:r>
+            <a:endParaRPr lang="en-US" sz="1600" dirty="0"/>
+          </a:p>
+        </p:txBody>
+      </p:sp>
+      <p:sp>
+        <p:nvSpPr>
+          <p:cNvPr id="16" name="Shape 13"/>
+          <p:cNvSpPr/>
+          <p:nvPr/>
+        </p:nvSpPr>
+        <p:spPr>
+          <a:xfrm>
+            <a:off x="914400" y="5074920"/>
+            <a:ext cx="384048" cy="384048"/>
+          </a:xfrm>
+          <a:prstGeom prst="ellipse">
+            <a:avLst/>
+          </a:prstGeom>
+          <a:solidFill>
+            <a:srgbClr val="0F5A4F"/>
+          </a:solidFill>
+          <a:ln/>
+        </p:spPr>
+      </p:sp>
+      <p:sp>
+        <p:nvSpPr>
+          <p:cNvPr id="17" name="Text 14"/>
+          <p:cNvSpPr/>
+          <p:nvPr/>
+        </p:nvSpPr>
+        <p:spPr>
+          <a:xfrm>
+            <a:off x="914400" y="5074920"/>
+            <a:ext cx="384048" cy="384048"/>
+          </a:xfrm>
+          <a:prstGeom prst="rect">
+            <a:avLst/>
+          </a:prstGeom>
+          <a:noFill/>
+          <a:ln/>
+        </p:spPr>
+        <p:txBody>
+          <a:bodyPr wrap="square" lIns="0" tIns="0" rIns="0" bIns="0" rtlCol="0" anchor="ctr"/>
+          <a:lstStyle/>
+          <a:p>
+            <a:pPr algn="ctr" indent="0" marL="0">
+              <a:buNone/>
+            </a:pPr>
+            <a:r>
+              <a:rPr lang="en-US" sz="1700" b="1" dirty="0">
+                <a:solidFill>
+                  <a:srgbClr val="FFFFFF"/>
+                </a:solidFill>
+                <a:latin typeface="Manrope" pitchFamily="34" charset="0"/>
+                <a:ea typeface="Manrope" pitchFamily="34" charset="-122"/>
+                <a:cs typeface="Manrope" pitchFamily="34" charset="-120"/>
+              </a:rPr>
+              <a:t>✓</a:t>
+            </a:r>
+            <a:endParaRPr lang="en-US" sz="1700" dirty="0"/>
+          </a:p>
+        </p:txBody>
+      </p:sp>
+      <p:sp>
+        <p:nvSpPr>
+          <p:cNvPr id="18" name="Text 15"/>
+          <p:cNvSpPr/>
+          <p:nvPr/>
+        </p:nvSpPr>
+        <p:spPr>
+          <a:xfrm>
+            <a:off x="1508760" y="5029200"/>
+            <a:ext cx="6400800" cy="384048"/>
+          </a:xfrm>
+          <a:prstGeom prst="rect">
+            <a:avLst/>
+          </a:prstGeom>
+          <a:noFill/>
+          <a:ln/>
+        </p:spPr>
+        <p:txBody>
+          <a:bodyPr wrap="square" lIns="0" tIns="0" rIns="0" bIns="0" rtlCol="0" anchor="ctr"/>
+          <a:lstStyle/>
+          <a:p>
+            <a:pPr indent="0" marL="0">
+              <a:buNone/>
+            </a:pPr>
+            <a:r>
+              <a:rPr lang="en-US" sz="1900" b="1" dirty="0">
+                <a:solidFill>
+                  <a:srgbClr val="10201C"/>
+                </a:solidFill>
+                <a:latin typeface="Manrope" pitchFamily="34" charset="0"/>
+                <a:ea typeface="Manrope" pitchFamily="34" charset="-122"/>
+                <a:cs typeface="Manrope" pitchFamily="34" charset="-120"/>
+              </a:rPr>
+              <a:t>It stages the details</a:t>
+            </a:r>
+            <a:endParaRPr lang="en-US" sz="1900" dirty="0"/>
+          </a:p>
+        </p:txBody>
+      </p:sp>
+      <p:sp>
+        <p:nvSpPr>
+          <p:cNvPr id="19" name="Text 16"/>
+          <p:cNvSpPr/>
+          <p:nvPr/>
+        </p:nvSpPr>
+        <p:spPr>
+          <a:xfrm>
+            <a:off x="1508760" y="5449824"/>
+            <a:ext cx="6400800" cy="411480"/>
+          </a:xfrm>
+          <a:prstGeom prst="rect">
+            <a:avLst/>
+          </a:prstGeom>
+          <a:noFill/>
+          <a:ln/>
+        </p:spPr>
+        <p:txBody>
+          <a:bodyPr wrap="square" lIns="0" tIns="0" rIns="0" bIns="0" rtlCol="0" anchor="t"/>
+          <a:lstStyle/>
+          <a:p>
+            <a:pPr indent="0" marL="0">
+              <a:lnSpc>
+                <a:spcPct val="130000"/>
+              </a:lnSpc>
+              <a:buNone/>
+            </a:pPr>
+            <a:r>
+              <a:rPr lang="en-US" sz="1600" dirty="0">
+                <a:solidFill>
+                  <a:srgbClr val="3E504B"/>
+                </a:solidFill>
+                <a:latin typeface="Manrope" pitchFamily="34" charset="0"/>
+                <a:ea typeface="Manrope" pitchFamily="34" charset="-122"/>
+                <a:cs typeface="Manrope" pitchFamily="34" charset="-120"/>
+              </a:rPr>
+              <a:t>Calendar events and reminders you add with one tap, with Undo.</a:t>
+            </a:r>
+            <a:endParaRPr lang="en-US" sz="1600" dirty="0"/>
+          </a:p>
+        </p:txBody>
+      </p:sp>
+      <p:sp>
+        <p:nvSpPr>
+          <p:cNvPr id="20" name="VIDEO_SLOT Demo 1"/>
+          <p:cNvSpPr/>
+          <p:nvPr/>
+        </p:nvSpPr>
+        <p:spPr>
+          <a:xfrm>
+            <a:off x="8915400" y="868680"/>
             <a:ext cx="2574036" cy="5577840"/>
           </a:xfrm>
           <a:prstGeom prst="roundRect">
@@ -5559,13 +6864,13 @@
       </p:sp>
       <p:sp>
         <p:nvSpPr>
-          <p:cNvPr id="6" name="Shape 3"/>
-          <p:cNvSpPr/>
-          <p:nvPr/>
-        </p:nvSpPr>
-        <p:spPr>
-          <a:xfrm>
-            <a:off x="868680" y="960120"/>
+          <p:cNvPr id="21" name="Shape 18"/>
+          <p:cNvSpPr/>
+          <p:nvPr/>
+        </p:nvSpPr>
+        <p:spPr>
+          <a:xfrm>
+            <a:off x="9006840" y="960120"/>
             <a:ext cx="2391156" cy="5394960"/>
           </a:xfrm>
           <a:prstGeom prst="roundRect">
@@ -5581,13 +6886,13 @@
       </p:sp>
       <p:sp>
         <p:nvSpPr>
-          <p:cNvPr id="7" name="Shape 4"/>
-          <p:cNvSpPr/>
-          <p:nvPr/>
-        </p:nvSpPr>
-        <p:spPr>
-          <a:xfrm>
-            <a:off x="1652778" y="1051560"/>
+          <p:cNvPr id="22" name="Shape 19"/>
+          <p:cNvSpPr/>
+          <p:nvPr/>
+        </p:nvSpPr>
+        <p:spPr>
+          <a:xfrm>
+            <a:off x="9790938" y="1051560"/>
             <a:ext cx="822960" cy="201168"/>
           </a:xfrm>
           <a:prstGeom prst="roundRect">
@@ -5603,13 +6908,13 @@
       </p:sp>
       <p:sp>
         <p:nvSpPr>
-          <p:cNvPr id="8" name="Shape 5"/>
-          <p:cNvSpPr/>
-          <p:nvPr/>
-        </p:nvSpPr>
-        <p:spPr>
-          <a:xfrm>
-            <a:off x="1652778" y="2971800"/>
+          <p:cNvPr id="23" name="Shape 20"/>
+          <p:cNvSpPr/>
+          <p:nvPr/>
+        </p:nvSpPr>
+        <p:spPr>
+          <a:xfrm>
+            <a:off x="9790938" y="2971800"/>
             <a:ext cx="822960" cy="822960"/>
           </a:xfrm>
           <a:prstGeom prst="ellipse">
@@ -5623,13 +6928,13 @@
       </p:sp>
       <p:sp>
         <p:nvSpPr>
-          <p:cNvPr id="9" name="Shape 6"/>
+          <p:cNvPr id="24" name="Shape 21"/>
           <p:cNvSpPr/>
           <p:nvPr/>
         </p:nvSpPr>
         <p:spPr>
           <a:xfrm rot="5400000">
-            <a:off x="1945386" y="3218688"/>
+            <a:off x="10083546" y="3218688"/>
             <a:ext cx="329184" cy="329184"/>
           </a:xfrm>
           <a:prstGeom prst="triangle">
@@ -5643,13 +6948,13 @@
       </p:sp>
       <p:sp>
         <p:nvSpPr>
-          <p:cNvPr id="10" name="Text 7"/>
-          <p:cNvSpPr/>
-          <p:nvPr/>
-        </p:nvSpPr>
-        <p:spPr>
-          <a:xfrm>
-            <a:off x="777240" y="3977640"/>
+          <p:cNvPr id="25" name="Text 22"/>
+          <p:cNvSpPr/>
+          <p:nvPr/>
+        </p:nvSpPr>
+        <p:spPr>
+          <a:xfrm>
+            <a:off x="8915400" y="3977640"/>
             <a:ext cx="2574036" cy="457200"/>
           </a:xfrm>
           <a:prstGeom prst="rect">
@@ -5674,7 +6979,7 @@
                 <a:ea typeface="Fraunces" pitchFamily="34" charset="-122"/>
                 <a:cs typeface="Fraunces" pitchFamily="34" charset="-120"/>
               </a:rPr>
-              <a:t>Demo 2</a:t>
+              <a:t>Demo 1</a:t>
             </a:r>
             <a:endParaRPr lang="en-US" sz="2400" dirty="0"/>
           </a:p>
@@ -5682,13 +6987,13 @@
       </p:sp>
       <p:sp>
         <p:nvSpPr>
-          <p:cNvPr id="11" name="Text 8"/>
-          <p:cNvSpPr/>
-          <p:nvPr/>
-        </p:nvSpPr>
-        <p:spPr>
-          <a:xfrm>
-            <a:off x="777240" y="4434840"/>
+          <p:cNvPr id="26" name="Text 23"/>
+          <p:cNvSpPr/>
+          <p:nvPr/>
+        </p:nvSpPr>
+        <p:spPr>
+          <a:xfrm>
+            <a:off x="8915400" y="4434840"/>
             <a:ext cx="2574036" cy="320040"/>
           </a:xfrm>
           <a:prstGeom prst="rect">
@@ -5716,800 +7021,6 @@
               <a:t>Video plays here</a:t>
             </a:r>
             <a:endParaRPr lang="en-US" sz="1200" dirty="0"/>
-          </a:p>
-        </p:txBody>
-      </p:sp>
-      <p:sp>
-        <p:nvSpPr>
-          <p:cNvPr id="12" name="Text 9"/>
-          <p:cNvSpPr/>
-          <p:nvPr/>
-        </p:nvSpPr>
-        <p:spPr>
-          <a:xfrm>
-            <a:off x="4206240" y="1051560"/>
-            <a:ext cx="4572000" cy="274320"/>
-          </a:xfrm>
-          <a:prstGeom prst="rect">
-            <a:avLst/>
-          </a:prstGeom>
-          <a:noFill/>
-          <a:ln/>
-        </p:spPr>
-        <p:txBody>
-          <a:bodyPr wrap="square" lIns="0" tIns="0" rIns="0" bIns="0" rtlCol="0" anchor="t"/>
-          <a:lstStyle/>
-          <a:p>
-            <a:pPr indent="0" marL="0">
-              <a:buNone/>
-            </a:pPr>
-            <a:r>
-              <a:rPr lang="en-US" sz="1200" b="1" spc="250" kern="0" dirty="0">
-                <a:solidFill>
-                  <a:srgbClr val="1D9A84"/>
-                </a:solidFill>
-                <a:latin typeface="Manrope" pitchFamily="34" charset="0"/>
-                <a:ea typeface="Manrope" pitchFamily="34" charset="-122"/>
-                <a:cs typeface="Manrope" pitchFamily="34" charset="-120"/>
-              </a:rPr>
-              <a:t>MARKETING</a:t>
-            </a:r>
-            <a:endParaRPr lang="en-US" sz="1200" dirty="0"/>
-          </a:p>
-        </p:txBody>
-      </p:sp>
-      <p:sp>
-        <p:nvSpPr>
-          <p:cNvPr id="13" name="Text 10"/>
-          <p:cNvSpPr/>
-          <p:nvPr/>
-        </p:nvSpPr>
-        <p:spPr>
-          <a:xfrm>
-            <a:off x="4206240" y="1371600"/>
-            <a:ext cx="7406640" cy="1280160"/>
-          </a:xfrm>
-          <a:prstGeom prst="rect">
-            <a:avLst/>
-          </a:prstGeom>
-          <a:noFill/>
-          <a:ln/>
-        </p:spPr>
-        <p:txBody>
-          <a:bodyPr wrap="square" lIns="0" tIns="0" rIns="0" bIns="0" rtlCol="0" anchor="t"/>
-          <a:lstStyle/>
-          <a:p>
-            <a:pPr indent="0" marL="0">
-              <a:buNone/>
-            </a:pPr>
-            <a:r>
-              <a:rPr lang="en-US" sz="3600" b="1" dirty="0">
-                <a:solidFill>
-                  <a:srgbClr val="10201C"/>
-                </a:solidFill>
-                <a:latin typeface="Fraunces" pitchFamily="34" charset="0"/>
-                <a:ea typeface="Fraunces" pitchFamily="34" charset="-122"/>
-                <a:cs typeface="Fraunces" pitchFamily="34" charset="-120"/>
-              </a:rPr>
-              <a:t>A 90-day marketing plan, and posts in your voice.</a:t>
-            </a:r>
-            <a:endParaRPr lang="en-US" sz="3600" dirty="0"/>
-          </a:p>
-        </p:txBody>
-      </p:sp>
-      <p:sp>
-        <p:nvSpPr>
-          <p:cNvPr id="14" name="Shape 11"/>
-          <p:cNvSpPr/>
-          <p:nvPr/>
-        </p:nvSpPr>
-        <p:spPr>
-          <a:xfrm>
-            <a:off x="4462272" y="2926080"/>
-            <a:ext cx="0" cy="2240280"/>
-          </a:xfrm>
-          <a:prstGeom prst="line">
-            <a:avLst/>
-          </a:prstGeom>
-          <a:noFill/>
-          <a:ln w="25400">
-            <a:solidFill>
-              <a:srgbClr val="DBE6E2"/>
-            </a:solidFill>
-            <a:prstDash val="solid"/>
-          </a:ln>
-        </p:spPr>
-      </p:sp>
-      <p:sp>
-        <p:nvSpPr>
-          <p:cNvPr id="15" name="Shape 12"/>
-          <p:cNvSpPr/>
-          <p:nvPr/>
-        </p:nvSpPr>
-        <p:spPr>
-          <a:xfrm>
-            <a:off x="4206240" y="2697480"/>
-            <a:ext cx="512064" cy="512064"/>
-          </a:xfrm>
-          <a:prstGeom prst="ellipse">
-            <a:avLst/>
-          </a:prstGeom>
-          <a:solidFill>
-            <a:srgbClr val="0F5A4F"/>
-          </a:solidFill>
-          <a:ln w="38100">
-            <a:solidFill>
-              <a:srgbClr val="F6F8F7"/>
-            </a:solidFill>
-            <a:prstDash val="solid"/>
-          </a:ln>
-        </p:spPr>
-      </p:sp>
-      <p:sp>
-        <p:nvSpPr>
-          <p:cNvPr id="16" name="Text 13"/>
-          <p:cNvSpPr/>
-          <p:nvPr/>
-        </p:nvSpPr>
-        <p:spPr>
-          <a:xfrm>
-            <a:off x="4206240" y="2697480"/>
-            <a:ext cx="512064" cy="512064"/>
-          </a:xfrm>
-          <a:prstGeom prst="rect">
-            <a:avLst/>
-          </a:prstGeom>
-          <a:noFill/>
-          <a:ln/>
-        </p:spPr>
-        <p:txBody>
-          <a:bodyPr wrap="square" lIns="0" tIns="0" rIns="0" bIns="0" rtlCol="0" anchor="ctr"/>
-          <a:lstStyle/>
-          <a:p>
-            <a:pPr algn="ctr" indent="0" marL="0">
-              <a:buNone/>
-            </a:pPr>
-            <a:r>
-              <a:rPr lang="en-US" sz="1700" b="1" dirty="0">
-                <a:solidFill>
-                  <a:srgbClr val="FFFFFF"/>
-                </a:solidFill>
-                <a:latin typeface="Fraunces" pitchFamily="34" charset="0"/>
-                <a:ea typeface="Fraunces" pitchFamily="34" charset="-122"/>
-                <a:cs typeface="Fraunces" pitchFamily="34" charset="-120"/>
-              </a:rPr>
-              <a:t>1</a:t>
-            </a:r>
-            <a:endParaRPr lang="en-US" sz="1700" dirty="0"/>
-          </a:p>
-        </p:txBody>
-      </p:sp>
-      <p:sp>
-        <p:nvSpPr>
-          <p:cNvPr id="17" name="Text 14"/>
-          <p:cNvSpPr/>
-          <p:nvPr/>
-        </p:nvSpPr>
-        <p:spPr>
-          <a:xfrm>
-            <a:off x="4983480" y="2679192"/>
-            <a:ext cx="2743200" cy="548640"/>
-          </a:xfrm>
-          <a:prstGeom prst="rect">
-            <a:avLst/>
-          </a:prstGeom>
-          <a:noFill/>
-          <a:ln/>
-        </p:spPr>
-        <p:txBody>
-          <a:bodyPr wrap="square" lIns="0" tIns="0" rIns="0" bIns="0" rtlCol="0" anchor="ctr"/>
-          <a:lstStyle/>
-          <a:p>
-            <a:pPr indent="0" marL="0">
-              <a:buNone/>
-            </a:pPr>
-            <a:r>
-              <a:rPr lang="en-US" sz="1800" b="1" dirty="0">
-                <a:solidFill>
-                  <a:srgbClr val="10201C"/>
-                </a:solidFill>
-                <a:latin typeface="Manrope" pitchFamily="34" charset="0"/>
-                <a:ea typeface="Manrope" pitchFamily="34" charset="-122"/>
-                <a:cs typeface="Manrope" pitchFamily="34" charset="-120"/>
-              </a:rPr>
-              <a:t>Goals interview</a:t>
-            </a:r>
-            <a:endParaRPr lang="en-US" sz="1800" dirty="0"/>
-          </a:p>
-        </p:txBody>
-      </p:sp>
-      <p:sp>
-        <p:nvSpPr>
-          <p:cNvPr id="18" name="Text 15"/>
-          <p:cNvSpPr/>
-          <p:nvPr/>
-        </p:nvSpPr>
-        <p:spPr>
-          <a:xfrm>
-            <a:off x="7726680" y="2679192"/>
-            <a:ext cx="3931920" cy="548640"/>
-          </a:xfrm>
-          <a:prstGeom prst="rect">
-            <a:avLst/>
-          </a:prstGeom>
-          <a:noFill/>
-          <a:ln/>
-        </p:spPr>
-        <p:txBody>
-          <a:bodyPr wrap="square" lIns="0" tIns="0" rIns="0" bIns="0" rtlCol="0" anchor="ctr"/>
-          <a:lstStyle/>
-          <a:p>
-            <a:pPr indent="0" marL="0">
-              <a:buNone/>
-            </a:pPr>
-            <a:r>
-              <a:rPr lang="en-US" sz="1500" dirty="0">
-                <a:solidFill>
-                  <a:srgbClr val="3E504B"/>
-                </a:solidFill>
-                <a:latin typeface="Manrope" pitchFamily="34" charset="0"/>
-                <a:ea typeface="Manrope" pitchFamily="34" charset="-122"/>
-                <a:cs typeface="Manrope" pitchFamily="34" charset="-120"/>
-              </a:rPr>
-              <a:t>A short conversation about what you want.</a:t>
-            </a:r>
-            <a:endParaRPr lang="en-US" sz="1500" dirty="0"/>
-          </a:p>
-        </p:txBody>
-      </p:sp>
-      <p:sp>
-        <p:nvSpPr>
-          <p:cNvPr id="19" name="Shape 16"/>
-          <p:cNvSpPr/>
-          <p:nvPr/>
-        </p:nvSpPr>
-        <p:spPr>
-          <a:xfrm>
-            <a:off x="4206240" y="3447288"/>
-            <a:ext cx="512064" cy="512064"/>
-          </a:xfrm>
-          <a:prstGeom prst="ellipse">
-            <a:avLst/>
-          </a:prstGeom>
-          <a:solidFill>
-            <a:srgbClr val="0F5A4F"/>
-          </a:solidFill>
-          <a:ln w="38100">
-            <a:solidFill>
-              <a:srgbClr val="F6F8F7"/>
-            </a:solidFill>
-            <a:prstDash val="solid"/>
-          </a:ln>
-        </p:spPr>
-      </p:sp>
-      <p:sp>
-        <p:nvSpPr>
-          <p:cNvPr id="20" name="Text 17"/>
-          <p:cNvSpPr/>
-          <p:nvPr/>
-        </p:nvSpPr>
-        <p:spPr>
-          <a:xfrm>
-            <a:off x="4206240" y="3447288"/>
-            <a:ext cx="512064" cy="512064"/>
-          </a:xfrm>
-          <a:prstGeom prst="rect">
-            <a:avLst/>
-          </a:prstGeom>
-          <a:noFill/>
-          <a:ln/>
-        </p:spPr>
-        <p:txBody>
-          <a:bodyPr wrap="square" lIns="0" tIns="0" rIns="0" bIns="0" rtlCol="0" anchor="ctr"/>
-          <a:lstStyle/>
-          <a:p>
-            <a:pPr algn="ctr" indent="0" marL="0">
-              <a:buNone/>
-            </a:pPr>
-            <a:r>
-              <a:rPr lang="en-US" sz="1700" b="1" dirty="0">
-                <a:solidFill>
-                  <a:srgbClr val="FFFFFF"/>
-                </a:solidFill>
-                <a:latin typeface="Fraunces" pitchFamily="34" charset="0"/>
-                <a:ea typeface="Fraunces" pitchFamily="34" charset="-122"/>
-                <a:cs typeface="Fraunces" pitchFamily="34" charset="-120"/>
-              </a:rPr>
-              <a:t>2</a:t>
-            </a:r>
-            <a:endParaRPr lang="en-US" sz="1700" dirty="0"/>
-          </a:p>
-        </p:txBody>
-      </p:sp>
-      <p:sp>
-        <p:nvSpPr>
-          <p:cNvPr id="21" name="Text 18"/>
-          <p:cNvSpPr/>
-          <p:nvPr/>
-        </p:nvSpPr>
-        <p:spPr>
-          <a:xfrm>
-            <a:off x="4983480" y="3429000"/>
-            <a:ext cx="2743200" cy="548640"/>
-          </a:xfrm>
-          <a:prstGeom prst="rect">
-            <a:avLst/>
-          </a:prstGeom>
-          <a:noFill/>
-          <a:ln/>
-        </p:spPr>
-        <p:txBody>
-          <a:bodyPr wrap="square" lIns="0" tIns="0" rIns="0" bIns="0" rtlCol="0" anchor="ctr"/>
-          <a:lstStyle/>
-          <a:p>
-            <a:pPr indent="0" marL="0">
-              <a:buNone/>
-            </a:pPr>
-            <a:r>
-              <a:rPr lang="en-US" sz="1800" b="1" dirty="0">
-                <a:solidFill>
-                  <a:srgbClr val="10201C"/>
-                </a:solidFill>
-                <a:latin typeface="Manrope" pitchFamily="34" charset="0"/>
-                <a:ea typeface="Manrope" pitchFamily="34" charset="-122"/>
-                <a:cs typeface="Manrope" pitchFamily="34" charset="-120"/>
-              </a:rPr>
-              <a:t>Your 90-day plan</a:t>
-            </a:r>
-            <a:endParaRPr lang="en-US" sz="1800" dirty="0"/>
-          </a:p>
-        </p:txBody>
-      </p:sp>
-      <p:sp>
-        <p:nvSpPr>
-          <p:cNvPr id="22" name="Text 19"/>
-          <p:cNvSpPr/>
-          <p:nvPr/>
-        </p:nvSpPr>
-        <p:spPr>
-          <a:xfrm>
-            <a:off x="7726680" y="3429000"/>
-            <a:ext cx="3931920" cy="548640"/>
-          </a:xfrm>
-          <a:prstGeom prst="rect">
-            <a:avLst/>
-          </a:prstGeom>
-          <a:noFill/>
-          <a:ln/>
-        </p:spPr>
-        <p:txBody>
-          <a:bodyPr wrap="square" lIns="0" tIns="0" rIns="0" bIns="0" rtlCol="0" anchor="ctr"/>
-          <a:lstStyle/>
-          <a:p>
-            <a:pPr indent="0" marL="0">
-              <a:buNone/>
-            </a:pPr>
-            <a:r>
-              <a:rPr lang="en-US" sz="1500" dirty="0">
-                <a:solidFill>
-                  <a:srgbClr val="3E504B"/>
-                </a:solidFill>
-                <a:latin typeface="Manrope" pitchFamily="34" charset="0"/>
-                <a:ea typeface="Manrope" pitchFamily="34" charset="-122"/>
-                <a:cs typeface="Manrope" pitchFamily="34" charset="-120"/>
-              </a:rPr>
-              <a:t>Voxa builds the plan from your answers.</a:t>
-            </a:r>
-            <a:endParaRPr lang="en-US" sz="1500" dirty="0"/>
-          </a:p>
-        </p:txBody>
-      </p:sp>
-      <p:sp>
-        <p:nvSpPr>
-          <p:cNvPr id="23" name="Shape 20"/>
-          <p:cNvSpPr/>
-          <p:nvPr/>
-        </p:nvSpPr>
-        <p:spPr>
-          <a:xfrm>
-            <a:off x="4206240" y="4197096"/>
-            <a:ext cx="512064" cy="512064"/>
-          </a:xfrm>
-          <a:prstGeom prst="ellipse">
-            <a:avLst/>
-          </a:prstGeom>
-          <a:solidFill>
-            <a:srgbClr val="0F5A4F"/>
-          </a:solidFill>
-          <a:ln w="38100">
-            <a:solidFill>
-              <a:srgbClr val="F6F8F7"/>
-            </a:solidFill>
-            <a:prstDash val="solid"/>
-          </a:ln>
-        </p:spPr>
-      </p:sp>
-      <p:sp>
-        <p:nvSpPr>
-          <p:cNvPr id="24" name="Text 21"/>
-          <p:cNvSpPr/>
-          <p:nvPr/>
-        </p:nvSpPr>
-        <p:spPr>
-          <a:xfrm>
-            <a:off x="4206240" y="4197096"/>
-            <a:ext cx="512064" cy="512064"/>
-          </a:xfrm>
-          <a:prstGeom prst="rect">
-            <a:avLst/>
-          </a:prstGeom>
-          <a:noFill/>
-          <a:ln/>
-        </p:spPr>
-        <p:txBody>
-          <a:bodyPr wrap="square" lIns="0" tIns="0" rIns="0" bIns="0" rtlCol="0" anchor="ctr"/>
-          <a:lstStyle/>
-          <a:p>
-            <a:pPr algn="ctr" indent="0" marL="0">
-              <a:buNone/>
-            </a:pPr>
-            <a:r>
-              <a:rPr lang="en-US" sz="1700" b="1" dirty="0">
-                <a:solidFill>
-                  <a:srgbClr val="FFFFFF"/>
-                </a:solidFill>
-                <a:latin typeface="Fraunces" pitchFamily="34" charset="0"/>
-                <a:ea typeface="Fraunces" pitchFamily="34" charset="-122"/>
-                <a:cs typeface="Fraunces" pitchFamily="34" charset="-120"/>
-              </a:rPr>
-              <a:t>3</a:t>
-            </a:r>
-            <a:endParaRPr lang="en-US" sz="1700" dirty="0"/>
-          </a:p>
-        </p:txBody>
-      </p:sp>
-      <p:sp>
-        <p:nvSpPr>
-          <p:cNvPr id="25" name="Text 22"/>
-          <p:cNvSpPr/>
-          <p:nvPr/>
-        </p:nvSpPr>
-        <p:spPr>
-          <a:xfrm>
-            <a:off x="4983480" y="4178808"/>
-            <a:ext cx="2743200" cy="548640"/>
-          </a:xfrm>
-          <a:prstGeom prst="rect">
-            <a:avLst/>
-          </a:prstGeom>
-          <a:noFill/>
-          <a:ln/>
-        </p:spPr>
-        <p:txBody>
-          <a:bodyPr wrap="square" lIns="0" tIns="0" rIns="0" bIns="0" rtlCol="0" anchor="ctr"/>
-          <a:lstStyle/>
-          <a:p>
-            <a:pPr indent="0" marL="0">
-              <a:buNone/>
-            </a:pPr>
-            <a:r>
-              <a:rPr lang="en-US" sz="1800" b="1" dirty="0">
-                <a:solidFill>
-                  <a:srgbClr val="10201C"/>
-                </a:solidFill>
-                <a:latin typeface="Manrope" pitchFamily="34" charset="0"/>
-                <a:ea typeface="Manrope" pitchFamily="34" charset="-122"/>
-                <a:cs typeface="Manrope" pitchFamily="34" charset="-120"/>
-              </a:rPr>
-              <a:t>Learns your voice</a:t>
-            </a:r>
-            <a:endParaRPr lang="en-US" sz="1800" dirty="0"/>
-          </a:p>
-        </p:txBody>
-      </p:sp>
-      <p:sp>
-        <p:nvSpPr>
-          <p:cNvPr id="26" name="Text 23"/>
-          <p:cNvSpPr/>
-          <p:nvPr/>
-        </p:nvSpPr>
-        <p:spPr>
-          <a:xfrm>
-            <a:off x="7726680" y="4178808"/>
-            <a:ext cx="3931920" cy="548640"/>
-          </a:xfrm>
-          <a:prstGeom prst="rect">
-            <a:avLst/>
-          </a:prstGeom>
-          <a:noFill/>
-          <a:ln/>
-        </p:spPr>
-        <p:txBody>
-          <a:bodyPr wrap="square" lIns="0" tIns="0" rIns="0" bIns="0" rtlCol="0" anchor="ctr"/>
-          <a:lstStyle/>
-          <a:p>
-            <a:pPr indent="0" marL="0">
-              <a:buNone/>
-            </a:pPr>
-            <a:r>
-              <a:rPr lang="en-US" sz="1500" dirty="0">
-                <a:solidFill>
-                  <a:srgbClr val="3E504B"/>
-                </a:solidFill>
-                <a:latin typeface="Manrope" pitchFamily="34" charset="0"/>
-                <a:ea typeface="Manrope" pitchFamily="34" charset="-122"/>
-                <a:cs typeface="Manrope" pitchFamily="34" charset="-120"/>
-              </a:rPr>
-              <a:t>It reads your past posts to sound like you.</a:t>
-            </a:r>
-            <a:endParaRPr lang="en-US" sz="1500" dirty="0"/>
-          </a:p>
-        </p:txBody>
-      </p:sp>
-      <p:sp>
-        <p:nvSpPr>
-          <p:cNvPr id="27" name="Shape 24"/>
-          <p:cNvSpPr/>
-          <p:nvPr/>
-        </p:nvSpPr>
-        <p:spPr>
-          <a:xfrm>
-            <a:off x="4206240" y="4946904"/>
-            <a:ext cx="512064" cy="512064"/>
-          </a:xfrm>
-          <a:prstGeom prst="ellipse">
-            <a:avLst/>
-          </a:prstGeom>
-          <a:solidFill>
-            <a:srgbClr val="0F5A4F"/>
-          </a:solidFill>
-          <a:ln w="38100">
-            <a:solidFill>
-              <a:srgbClr val="F6F8F7"/>
-            </a:solidFill>
-            <a:prstDash val="solid"/>
-          </a:ln>
-        </p:spPr>
-      </p:sp>
-      <p:sp>
-        <p:nvSpPr>
-          <p:cNvPr id="28" name="Text 25"/>
-          <p:cNvSpPr/>
-          <p:nvPr/>
-        </p:nvSpPr>
-        <p:spPr>
-          <a:xfrm>
-            <a:off x="4206240" y="4946904"/>
-            <a:ext cx="512064" cy="512064"/>
-          </a:xfrm>
-          <a:prstGeom prst="rect">
-            <a:avLst/>
-          </a:prstGeom>
-          <a:noFill/>
-          <a:ln/>
-        </p:spPr>
-        <p:txBody>
-          <a:bodyPr wrap="square" lIns="0" tIns="0" rIns="0" bIns="0" rtlCol="0" anchor="ctr"/>
-          <a:lstStyle/>
-          <a:p>
-            <a:pPr algn="ctr" indent="0" marL="0">
-              <a:buNone/>
-            </a:pPr>
-            <a:r>
-              <a:rPr lang="en-US" sz="1700" b="1" dirty="0">
-                <a:solidFill>
-                  <a:srgbClr val="FFFFFF"/>
-                </a:solidFill>
-                <a:latin typeface="Fraunces" pitchFamily="34" charset="0"/>
-                <a:ea typeface="Fraunces" pitchFamily="34" charset="-122"/>
-                <a:cs typeface="Fraunces" pitchFamily="34" charset="-120"/>
-              </a:rPr>
-              <a:t>4</a:t>
-            </a:r>
-            <a:endParaRPr lang="en-US" sz="1700" dirty="0"/>
-          </a:p>
-        </p:txBody>
-      </p:sp>
-      <p:sp>
-        <p:nvSpPr>
-          <p:cNvPr id="29" name="Text 26"/>
-          <p:cNvSpPr/>
-          <p:nvPr/>
-        </p:nvSpPr>
-        <p:spPr>
-          <a:xfrm>
-            <a:off x="4983480" y="4928616"/>
-            <a:ext cx="2743200" cy="548640"/>
-          </a:xfrm>
-          <a:prstGeom prst="rect">
-            <a:avLst/>
-          </a:prstGeom>
-          <a:noFill/>
-          <a:ln/>
-        </p:spPr>
-        <p:txBody>
-          <a:bodyPr wrap="square" lIns="0" tIns="0" rIns="0" bIns="0" rtlCol="0" anchor="ctr"/>
-          <a:lstStyle/>
-          <a:p>
-            <a:pPr indent="0" marL="0">
-              <a:buNone/>
-            </a:pPr>
-            <a:r>
-              <a:rPr lang="en-US" sz="1800" b="1" dirty="0">
-                <a:solidFill>
-                  <a:srgbClr val="10201C"/>
-                </a:solidFill>
-                <a:latin typeface="Manrope" pitchFamily="34" charset="0"/>
-                <a:ea typeface="Manrope" pitchFamily="34" charset="-122"/>
-                <a:cs typeface="Manrope" pitchFamily="34" charset="-120"/>
-              </a:rPr>
-              <a:t>Drafts with sources</a:t>
-            </a:r>
-            <a:endParaRPr lang="en-US" sz="1800" dirty="0"/>
-          </a:p>
-        </p:txBody>
-      </p:sp>
-      <p:sp>
-        <p:nvSpPr>
-          <p:cNvPr id="30" name="Text 27"/>
-          <p:cNvSpPr/>
-          <p:nvPr/>
-        </p:nvSpPr>
-        <p:spPr>
-          <a:xfrm>
-            <a:off x="7726680" y="4928616"/>
-            <a:ext cx="3931920" cy="548640"/>
-          </a:xfrm>
-          <a:prstGeom prst="rect">
-            <a:avLst/>
-          </a:prstGeom>
-          <a:noFill/>
-          <a:ln/>
-        </p:spPr>
-        <p:txBody>
-          <a:bodyPr wrap="square" lIns="0" tIns="0" rIns="0" bIns="0" rtlCol="0" anchor="ctr"/>
-          <a:lstStyle/>
-          <a:p>
-            <a:pPr indent="0" marL="0">
-              <a:buNone/>
-            </a:pPr>
-            <a:r>
-              <a:rPr lang="en-US" sz="1500" dirty="0">
-                <a:solidFill>
-                  <a:srgbClr val="3E504B"/>
-                </a:solidFill>
-                <a:latin typeface="Manrope" pitchFamily="34" charset="0"/>
-                <a:ea typeface="Manrope" pitchFamily="34" charset="-122"/>
-                <a:cs typeface="Manrope" pitchFamily="34" charset="-120"/>
-              </a:rPr>
-              <a:t>Your photos, plus live research sources.</a:t>
-            </a:r>
-            <a:endParaRPr lang="en-US" sz="1500" dirty="0"/>
-          </a:p>
-        </p:txBody>
-      </p:sp>
-      <p:sp>
-        <p:nvSpPr>
-          <p:cNvPr id="31" name="Shape 28"/>
-          <p:cNvSpPr/>
-          <p:nvPr/>
-        </p:nvSpPr>
-        <p:spPr>
-          <a:xfrm>
-            <a:off x="4206240" y="5852160"/>
-            <a:ext cx="3566160" cy="502920"/>
-          </a:xfrm>
-          <a:prstGeom prst="roundRect">
-            <a:avLst>
-              <a:gd name="adj" fmla="val 50000"/>
-            </a:avLst>
-          </a:prstGeom>
-          <a:solidFill>
-            <a:srgbClr val="0F5A4F"/>
-          </a:solidFill>
-          <a:ln w="12700">
-            <a:solidFill>
-              <a:srgbClr val="0F5A4F"/>
-            </a:solidFill>
-            <a:prstDash val="solid"/>
-          </a:ln>
-        </p:spPr>
-      </p:sp>
-      <p:sp>
-        <p:nvSpPr>
-          <p:cNvPr id="32" name="Shape 29"/>
-          <p:cNvSpPr/>
-          <p:nvPr/>
-        </p:nvSpPr>
-        <p:spPr>
-          <a:xfrm>
-            <a:off x="4297680" y="5966460"/>
-            <a:ext cx="274320" cy="274320"/>
-          </a:xfrm>
-          <a:prstGeom prst="ellipse">
-            <a:avLst/>
-          </a:prstGeom>
-          <a:solidFill>
-            <a:srgbClr val="1D9A84"/>
-          </a:solidFill>
-          <a:ln/>
-        </p:spPr>
-      </p:sp>
-      <p:sp>
-        <p:nvSpPr>
-          <p:cNvPr id="33" name="Text 30"/>
-          <p:cNvSpPr/>
-          <p:nvPr/>
-        </p:nvSpPr>
-        <p:spPr>
-          <a:xfrm>
-            <a:off x="4297680" y="5966460"/>
-            <a:ext cx="274320" cy="274320"/>
-          </a:xfrm>
-          <a:prstGeom prst="rect">
-            <a:avLst/>
-          </a:prstGeom>
-          <a:noFill/>
-          <a:ln/>
-        </p:spPr>
-        <p:txBody>
-          <a:bodyPr wrap="square" lIns="0" tIns="0" rIns="0" bIns="0" rtlCol="0" anchor="ctr"/>
-          <a:lstStyle/>
-          <a:p>
-            <a:pPr algn="ctr" indent="0" marL="0">
-              <a:buNone/>
-            </a:pPr>
-            <a:r>
-              <a:rPr lang="en-US" sz="1200" b="1" dirty="0">
-                <a:solidFill>
-                  <a:srgbClr val="FFFFFF"/>
-                </a:solidFill>
-                <a:latin typeface="Manrope" pitchFamily="34" charset="0"/>
-                <a:ea typeface="Manrope" pitchFamily="34" charset="-122"/>
-                <a:cs typeface="Manrope" pitchFamily="34" charset="-120"/>
-              </a:rPr>
-              <a:t>✓</a:t>
-            </a:r>
-            <a:endParaRPr lang="en-US" sz="1200" dirty="0"/>
-          </a:p>
-        </p:txBody>
-      </p:sp>
-      <p:sp>
-        <p:nvSpPr>
-          <p:cNvPr id="34" name="Text 31"/>
-          <p:cNvSpPr/>
-          <p:nvPr/>
-        </p:nvSpPr>
-        <p:spPr>
-          <a:xfrm>
-            <a:off x="4663440" y="5852160"/>
-            <a:ext cx="3017520" cy="502920"/>
-          </a:xfrm>
-          <a:prstGeom prst="rect">
-            <a:avLst/>
-          </a:prstGeom>
-          <a:noFill/>
-          <a:ln/>
-        </p:spPr>
-        <p:txBody>
-          <a:bodyPr wrap="square" lIns="0" tIns="0" rIns="0" bIns="0" rtlCol="0" anchor="ctr"/>
-          <a:lstStyle/>
-          <a:p>
-            <a:pPr algn="l" indent="0" marL="0">
-              <a:buNone/>
-            </a:pPr>
-            <a:r>
-              <a:rPr lang="en-US" sz="1500" b="1" dirty="0">
-                <a:solidFill>
-                  <a:srgbClr val="FFFFFF"/>
-                </a:solidFill>
-                <a:latin typeface="Manrope" pitchFamily="34" charset="0"/>
-                <a:ea typeface="Manrope" pitchFamily="34" charset="-122"/>
-                <a:cs typeface="Manrope" pitchFamily="34" charset="-120"/>
-              </a:rPr>
-              <a:t>Posting is always your tap.</a:t>
-            </a:r>
-            <a:endParaRPr lang="en-US" sz="1500" dirty="0"/>
           </a:p>
         </p:txBody>
       </p:sp>
@@ -6641,7 +7152,7 @@
                 <a:ea typeface="Manrope" pitchFamily="34" charset="-122"/>
                 <a:cs typeface="Manrope" pitchFamily="34" charset="-120"/>
               </a:rPr>
-              <a:t>06 / 10</a:t>
+              <a:t>06 / 11</a:t>
             </a:r>
             <a:endParaRPr lang="en-US" sz="1100" dirty="0"/>
           </a:p>
@@ -6649,142 +7160,22 @@
       </p:sp>
       <p:sp>
         <p:nvSpPr>
-          <p:cNvPr id="5" name="Text 2"/>
-          <p:cNvSpPr/>
-          <p:nvPr/>
-        </p:nvSpPr>
-        <p:spPr>
-          <a:xfrm>
-            <a:off x="685800" y="1188720"/>
-            <a:ext cx="4572000" cy="274320"/>
-          </a:xfrm>
-          <a:prstGeom prst="rect">
-            <a:avLst/>
-          </a:prstGeom>
-          <a:noFill/>
-          <a:ln/>
-        </p:spPr>
-        <p:txBody>
-          <a:bodyPr wrap="square" lIns="0" tIns="0" rIns="0" bIns="0" rtlCol="0" anchor="t"/>
-          <a:lstStyle/>
-          <a:p>
-            <a:pPr indent="0" marL="0">
-              <a:buNone/>
-            </a:pPr>
-            <a:r>
-              <a:rPr lang="en-US" sz="1200" b="1" spc="250" kern="0" dirty="0">
-                <a:solidFill>
-                  <a:srgbClr val="1D9A84"/>
-                </a:solidFill>
-                <a:latin typeface="Manrope" pitchFamily="34" charset="0"/>
-                <a:ea typeface="Manrope" pitchFamily="34" charset="-122"/>
-                <a:cs typeface="Manrope" pitchFamily="34" charset="-120"/>
-              </a:rPr>
-              <a:t>EMAIL</a:t>
-            </a:r>
-            <a:endParaRPr lang="en-US" sz="1200" dirty="0"/>
-          </a:p>
-        </p:txBody>
-      </p:sp>
-      <p:sp>
-        <p:nvSpPr>
-          <p:cNvPr id="6" name="Text 3"/>
-          <p:cNvSpPr/>
-          <p:nvPr/>
-        </p:nvSpPr>
-        <p:spPr>
-          <a:xfrm>
-            <a:off x="685800" y="1554480"/>
-            <a:ext cx="7315200" cy="822960"/>
-          </a:xfrm>
-          <a:prstGeom prst="rect">
-            <a:avLst/>
-          </a:prstGeom>
-          <a:noFill/>
-          <a:ln/>
-        </p:spPr>
-        <p:txBody>
-          <a:bodyPr wrap="square" lIns="0" tIns="0" rIns="0" bIns="0" rtlCol="0" anchor="t"/>
-          <a:lstStyle/>
-          <a:p>
-            <a:pPr indent="0" marL="0">
-              <a:buNone/>
-            </a:pPr>
-            <a:r>
-              <a:rPr lang="en-US" sz="4400" b="1" dirty="0">
-                <a:solidFill>
-                  <a:srgbClr val="10201C"/>
-                </a:solidFill>
-                <a:latin typeface="Fraunces" pitchFamily="34" charset="0"/>
-                <a:ea typeface="Fraunces" pitchFamily="34" charset="-122"/>
-                <a:cs typeface="Fraunces" pitchFamily="34" charset="-120"/>
-              </a:rPr>
-              <a:t>Your inbox, by voice.</a:t>
-            </a:r>
-            <a:endParaRPr lang="en-US" sz="4400" dirty="0"/>
-          </a:p>
-        </p:txBody>
-      </p:sp>
-      <p:sp>
-        <p:nvSpPr>
-          <p:cNvPr id="7" name="Text 4"/>
-          <p:cNvSpPr/>
-          <p:nvPr/>
-        </p:nvSpPr>
-        <p:spPr>
-          <a:xfrm>
-            <a:off x="685800" y="2423160"/>
-            <a:ext cx="7315200" cy="457200"/>
-          </a:xfrm>
-          <a:prstGeom prst="rect">
-            <a:avLst/>
-          </a:prstGeom>
-          <a:noFill/>
-          <a:ln/>
-        </p:spPr>
-        <p:txBody>
-          <a:bodyPr wrap="square" lIns="0" tIns="0" rIns="0" bIns="0" rtlCol="0" anchor="t"/>
-          <a:lstStyle/>
-          <a:p>
-            <a:pPr indent="0" marL="0">
-              <a:lnSpc>
-                <a:spcPct val="130000"/>
-              </a:lnSpc>
-              <a:buNone/>
-            </a:pPr>
-            <a:r>
-              <a:rPr lang="en-US" sz="1900" dirty="0">
-                <a:solidFill>
-                  <a:srgbClr val="3E504B"/>
-                </a:solidFill>
-                <a:latin typeface="Manrope" pitchFamily="34" charset="0"/>
-                <a:ea typeface="Manrope" pitchFamily="34" charset="-122"/>
-                <a:cs typeface="Manrope" pitchFamily="34" charset="-120"/>
-              </a:rPr>
-              <a:t>Ask what came in. Voxa sorts it out.</a:t>
-            </a:r>
-            <a:endParaRPr lang="en-US" sz="1900" dirty="0"/>
-          </a:p>
-        </p:txBody>
-      </p:sp>
-      <p:sp>
-        <p:nvSpPr>
-          <p:cNvPr id="8" name="Shape 5"/>
-          <p:cNvSpPr/>
-          <p:nvPr/>
-        </p:nvSpPr>
-        <p:spPr>
-          <a:xfrm>
-            <a:off x="685800" y="3246120"/>
-            <a:ext cx="3657600" cy="2331720"/>
+          <p:cNvPr id="5" name="VIDEO_SLOT Demo 2"/>
+          <p:cNvSpPr/>
+          <p:nvPr/>
+        </p:nvSpPr>
+        <p:spPr>
+          <a:xfrm>
+            <a:off x="777240" y="868680"/>
+            <a:ext cx="2574036" cy="5577840"/>
           </a:xfrm>
           <a:prstGeom prst="roundRect">
             <a:avLst>
-              <a:gd name="adj" fmla="val 9804"/>
+              <a:gd name="adj" fmla="val 14920"/>
             </a:avLst>
           </a:prstGeom>
           <a:solidFill>
-            <a:srgbClr val="FFFFFF"/>
+            <a:srgbClr val="10201C"/>
           </a:solidFill>
           <a:ln/>
           <a:effectLst>
@@ -6798,394 +7189,13 @@
       </p:sp>
       <p:sp>
         <p:nvSpPr>
-          <p:cNvPr id="9" name="Shape 6"/>
-          <p:cNvSpPr/>
-          <p:nvPr/>
-        </p:nvSpPr>
-        <p:spPr>
-          <a:xfrm>
-            <a:off x="1005840" y="3566160"/>
-            <a:ext cx="502920" cy="502920"/>
-          </a:xfrm>
-          <a:prstGeom prst="roundRect">
-            <a:avLst>
-              <a:gd name="adj" fmla="val 27273"/>
-            </a:avLst>
-          </a:prstGeom>
-          <a:solidFill>
-            <a:srgbClr val="E3F1EC"/>
-          </a:solidFill>
-          <a:ln/>
-        </p:spPr>
-      </p:sp>
-      <p:sp>
-        <p:nvSpPr>
-          <p:cNvPr id="10" name="Text 7"/>
-          <p:cNvSpPr/>
-          <p:nvPr/>
-        </p:nvSpPr>
-        <p:spPr>
-          <a:xfrm>
-            <a:off x="1005840" y="3566160"/>
-            <a:ext cx="502920" cy="502920"/>
-          </a:xfrm>
-          <a:prstGeom prst="rect">
-            <a:avLst/>
-          </a:prstGeom>
-          <a:noFill/>
-          <a:ln/>
-        </p:spPr>
-        <p:txBody>
-          <a:bodyPr wrap="square" lIns="0" tIns="0" rIns="0" bIns="0" rtlCol="0" anchor="ctr"/>
-          <a:lstStyle/>
-          <a:p>
-            <a:pPr algn="ctr" indent="0" marL="0">
-              <a:buNone/>
-            </a:pPr>
-            <a:r>
-              <a:rPr lang="en-US" sz="2000" b="1" dirty="0">
-                <a:solidFill>
-                  <a:srgbClr val="0F5A4F"/>
-                </a:solidFill>
-                <a:latin typeface="Manrope" pitchFamily="34" charset="0"/>
-                <a:ea typeface="Manrope" pitchFamily="34" charset="-122"/>
-                <a:cs typeface="Manrope" pitchFamily="34" charset="-120"/>
-              </a:rPr>
-              <a:t>#</a:t>
-            </a:r>
-            <a:endParaRPr lang="en-US" sz="2000" dirty="0"/>
-          </a:p>
-        </p:txBody>
-      </p:sp>
-      <p:sp>
-        <p:nvSpPr>
-          <p:cNvPr id="11" name="Text 8"/>
-          <p:cNvSpPr/>
-          <p:nvPr/>
-        </p:nvSpPr>
-        <p:spPr>
-          <a:xfrm>
-            <a:off x="1005840" y="4206240"/>
-            <a:ext cx="3108960" cy="411480"/>
-          </a:xfrm>
-          <a:prstGeom prst="rect">
-            <a:avLst/>
-          </a:prstGeom>
-          <a:noFill/>
-          <a:ln/>
-        </p:spPr>
-        <p:txBody>
-          <a:bodyPr wrap="square" lIns="0" tIns="0" rIns="0" bIns="0" rtlCol="0" anchor="ctr"/>
-          <a:lstStyle/>
-          <a:p>
-            <a:pPr indent="0" marL="0">
-              <a:buNone/>
-            </a:pPr>
-            <a:r>
-              <a:rPr lang="en-US" sz="1800" b="1" dirty="0">
-                <a:solidFill>
-                  <a:srgbClr val="10201C"/>
-                </a:solidFill>
-                <a:latin typeface="Manrope" pitchFamily="34" charset="0"/>
-                <a:ea typeface="Manrope" pitchFamily="34" charset="-122"/>
-                <a:cs typeface="Manrope" pitchFamily="34" charset="-120"/>
-              </a:rPr>
-              <a:t>Tagged to the listing</a:t>
-            </a:r>
-            <a:endParaRPr lang="en-US" sz="1800" dirty="0"/>
-          </a:p>
-        </p:txBody>
-      </p:sp>
-      <p:sp>
-        <p:nvSpPr>
-          <p:cNvPr id="12" name="Text 9"/>
-          <p:cNvSpPr/>
-          <p:nvPr/>
-        </p:nvSpPr>
-        <p:spPr>
-          <a:xfrm>
-            <a:off x="1005840" y="4645152"/>
-            <a:ext cx="3063240" cy="777240"/>
-          </a:xfrm>
-          <a:prstGeom prst="rect">
-            <a:avLst/>
-          </a:prstGeom>
-          <a:noFill/>
-          <a:ln/>
-        </p:spPr>
-        <p:txBody>
-          <a:bodyPr wrap="square" lIns="0" tIns="0" rIns="0" bIns="0" rtlCol="0" anchor="t"/>
-          <a:lstStyle/>
-          <a:p>
-            <a:pPr indent="0" marL="0">
-              <a:lnSpc>
-                <a:spcPct val="130000"/>
-              </a:lnSpc>
-              <a:buNone/>
-            </a:pPr>
-            <a:r>
-              <a:rPr lang="en-US" sz="1500" dirty="0">
-                <a:solidFill>
-                  <a:srgbClr val="3E504B"/>
-                </a:solidFill>
-                <a:latin typeface="Manrope" pitchFamily="34" charset="0"/>
-                <a:ea typeface="Manrope" pitchFamily="34" charset="-122"/>
-                <a:cs typeface="Manrope" pitchFamily="34" charset="-120"/>
-              </a:rPr>
-              <a:t>Voxa tags each email to the listing it belongs to.</a:t>
-            </a:r>
-            <a:endParaRPr lang="en-US" sz="1500" dirty="0"/>
-          </a:p>
-        </p:txBody>
-      </p:sp>
-      <p:sp>
-        <p:nvSpPr>
-          <p:cNvPr id="13" name="Shape 10"/>
-          <p:cNvSpPr/>
-          <p:nvPr/>
-        </p:nvSpPr>
-        <p:spPr>
-          <a:xfrm>
-            <a:off x="4572000" y="3246120"/>
-            <a:ext cx="3657600" cy="2331720"/>
-          </a:xfrm>
-          <a:prstGeom prst="roundRect">
-            <a:avLst>
-              <a:gd name="adj" fmla="val 9804"/>
-            </a:avLst>
-          </a:prstGeom>
-          <a:solidFill>
-            <a:srgbClr val="FFFFFF"/>
-          </a:solidFill>
-          <a:ln/>
-          <a:effectLst>
-            <a:outerShdw sx="100000" sy="100000" kx="0" ky="0" algn="bl" rotWithShape="0" blurRad="304800" dist="50800" dir="5400000">
-              <a:srgbClr val="0F5A4F">
-                <a:alpha val="10000"/>
-              </a:srgbClr>
-            </a:outerShdw>
-          </a:effectLst>
-        </p:spPr>
-      </p:sp>
-      <p:sp>
-        <p:nvSpPr>
-          <p:cNvPr id="14" name="Shape 11"/>
-          <p:cNvSpPr/>
-          <p:nvPr/>
-        </p:nvSpPr>
-        <p:spPr>
-          <a:xfrm>
-            <a:off x="4892040" y="3566160"/>
-            <a:ext cx="502920" cy="502920"/>
-          </a:xfrm>
-          <a:prstGeom prst="roundRect">
-            <a:avLst>
-              <a:gd name="adj" fmla="val 27273"/>
-            </a:avLst>
-          </a:prstGeom>
-          <a:solidFill>
-            <a:srgbClr val="E3F1EC"/>
-          </a:solidFill>
-          <a:ln/>
-        </p:spPr>
-      </p:sp>
-      <p:sp>
-        <p:nvSpPr>
-          <p:cNvPr id="15" name="Text 12"/>
-          <p:cNvSpPr/>
-          <p:nvPr/>
-        </p:nvSpPr>
-        <p:spPr>
-          <a:xfrm>
-            <a:off x="4892040" y="3566160"/>
-            <a:ext cx="502920" cy="502920"/>
-          </a:xfrm>
-          <a:prstGeom prst="rect">
-            <a:avLst/>
-          </a:prstGeom>
-          <a:noFill/>
-          <a:ln/>
-        </p:spPr>
-        <p:txBody>
-          <a:bodyPr wrap="square" lIns="0" tIns="0" rIns="0" bIns="0" rtlCol="0" anchor="ctr"/>
-          <a:lstStyle/>
-          <a:p>
-            <a:pPr algn="ctr" indent="0" marL="0">
-              <a:buNone/>
-            </a:pPr>
-            <a:r>
-              <a:rPr lang="en-US" sz="2000" b="1" dirty="0">
-                <a:solidFill>
-                  <a:srgbClr val="0F5A4F"/>
-                </a:solidFill>
-                <a:latin typeface="Manrope" pitchFamily="34" charset="0"/>
-                <a:ea typeface="Manrope" pitchFamily="34" charset="-122"/>
-                <a:cs typeface="Manrope" pitchFamily="34" charset="-120"/>
-              </a:rPr>
-              <a:t>§</a:t>
-            </a:r>
-            <a:endParaRPr lang="en-US" sz="2000" dirty="0"/>
-          </a:p>
-        </p:txBody>
-      </p:sp>
-      <p:sp>
-        <p:nvSpPr>
-          <p:cNvPr id="16" name="Text 13"/>
-          <p:cNvSpPr/>
-          <p:nvPr/>
-        </p:nvSpPr>
-        <p:spPr>
-          <a:xfrm>
-            <a:off x="4892040" y="4206240"/>
-            <a:ext cx="3108960" cy="411480"/>
-          </a:xfrm>
-          <a:prstGeom prst="rect">
-            <a:avLst/>
-          </a:prstGeom>
-          <a:noFill/>
-          <a:ln/>
-        </p:spPr>
-        <p:txBody>
-          <a:bodyPr wrap="square" lIns="0" tIns="0" rIns="0" bIns="0" rtlCol="0" anchor="ctr"/>
-          <a:lstStyle/>
-          <a:p>
-            <a:pPr indent="0" marL="0">
-              <a:buNone/>
-            </a:pPr>
-            <a:r>
-              <a:rPr lang="en-US" sz="1800" b="1" dirty="0">
-                <a:solidFill>
-                  <a:srgbClr val="10201C"/>
-                </a:solidFill>
-                <a:latin typeface="Manrope" pitchFamily="34" charset="0"/>
-                <a:ea typeface="Manrope" pitchFamily="34" charset="-122"/>
-                <a:cs typeface="Manrope" pitchFamily="34" charset="-120"/>
-              </a:rPr>
-              <a:t>Documents, summarized</a:t>
-            </a:r>
-            <a:endParaRPr lang="en-US" sz="1800" dirty="0"/>
-          </a:p>
-        </p:txBody>
-      </p:sp>
-      <p:sp>
-        <p:nvSpPr>
-          <p:cNvPr id="17" name="Text 14"/>
-          <p:cNvSpPr/>
-          <p:nvPr/>
-        </p:nvSpPr>
-        <p:spPr>
-          <a:xfrm>
-            <a:off x="4892040" y="4645152"/>
-            <a:ext cx="3063240" cy="777240"/>
-          </a:xfrm>
-          <a:prstGeom prst="rect">
-            <a:avLst/>
-          </a:prstGeom>
-          <a:noFill/>
-          <a:ln/>
-        </p:spPr>
-        <p:txBody>
-          <a:bodyPr wrap="square" lIns="0" tIns="0" rIns="0" bIns="0" rtlCol="0" anchor="t"/>
-          <a:lstStyle/>
-          <a:p>
-            <a:pPr indent="0" marL="0">
-              <a:lnSpc>
-                <a:spcPct val="130000"/>
-              </a:lnSpc>
-              <a:buNone/>
-            </a:pPr>
-            <a:r>
-              <a:rPr lang="en-US" sz="1500" dirty="0">
-                <a:solidFill>
-                  <a:srgbClr val="3E504B"/>
-                </a:solidFill>
-                <a:latin typeface="Manrope" pitchFamily="34" charset="0"/>
-                <a:ea typeface="Manrope" pitchFamily="34" charset="-122"/>
-                <a:cs typeface="Manrope" pitchFamily="34" charset="-120"/>
-              </a:rPr>
-              <a:t>Quick summaries of attachments, like contract highlights.</a:t>
-            </a:r>
-            <a:endParaRPr lang="en-US" sz="1500" dirty="0"/>
-          </a:p>
-        </p:txBody>
-      </p:sp>
-      <p:sp>
-        <p:nvSpPr>
-          <p:cNvPr id="18" name="Text 15"/>
-          <p:cNvSpPr/>
-          <p:nvPr/>
-        </p:nvSpPr>
-        <p:spPr>
-          <a:xfrm>
-            <a:off x="685800" y="5852160"/>
-            <a:ext cx="7498080" cy="365760"/>
-          </a:xfrm>
-          <a:prstGeom prst="rect">
-            <a:avLst/>
-          </a:prstGeom>
-          <a:noFill/>
-          <a:ln/>
-        </p:spPr>
-        <p:txBody>
-          <a:bodyPr wrap="square" lIns="0" tIns="0" rIns="0" bIns="0" rtlCol="0" anchor="ctr"/>
-          <a:lstStyle/>
-          <a:p>
-            <a:pPr indent="0" marL="0">
-              <a:buNone/>
-            </a:pPr>
-            <a:r>
-              <a:rPr lang="en-US" sz="1300" i="1" dirty="0">
-                <a:solidFill>
-                  <a:srgbClr val="6B7C77"/>
-                </a:solidFill>
-                <a:latin typeface="Manrope" pitchFamily="34" charset="0"/>
-                <a:ea typeface="Manrope" pitchFamily="34" charset="-122"/>
-                <a:cs typeface="Manrope" pitchFamily="34" charset="-120"/>
-              </a:rPr>
-              <a:t>Summaries help you read faster. They are not legal advice.</a:t>
-            </a:r>
-            <a:endParaRPr lang="en-US" sz="1300" dirty="0"/>
-          </a:p>
-        </p:txBody>
-      </p:sp>
-      <p:sp>
-        <p:nvSpPr>
-          <p:cNvPr id="19" name="VIDEO_SLOT Demo 3"/>
-          <p:cNvSpPr/>
-          <p:nvPr/>
-        </p:nvSpPr>
-        <p:spPr>
-          <a:xfrm>
-            <a:off x="8915400" y="868680"/>
-            <a:ext cx="2574036" cy="5577840"/>
-          </a:xfrm>
-          <a:prstGeom prst="roundRect">
-            <a:avLst>
-              <a:gd name="adj" fmla="val 14920"/>
-            </a:avLst>
-          </a:prstGeom>
-          <a:solidFill>
-            <a:srgbClr val="10201C"/>
-          </a:solidFill>
-          <a:ln/>
-          <a:effectLst>
-            <a:outerShdw sx="100000" sy="100000" kx="0" ky="0" algn="bl" rotWithShape="0" blurRad="304800" dist="50800" dir="5400000">
-              <a:srgbClr val="0F5A4F">
-                <a:alpha val="10000"/>
-              </a:srgbClr>
-            </a:outerShdw>
-          </a:effectLst>
-        </p:spPr>
-      </p:sp>
-      <p:sp>
-        <p:nvSpPr>
-          <p:cNvPr id="20" name="Shape 17"/>
-          <p:cNvSpPr/>
-          <p:nvPr/>
-        </p:nvSpPr>
-        <p:spPr>
-          <a:xfrm>
-            <a:off x="9006840" y="960120"/>
+          <p:cNvPr id="6" name="Shape 3"/>
+          <p:cNvSpPr/>
+          <p:nvPr/>
+        </p:nvSpPr>
+        <p:spPr>
+          <a:xfrm>
+            <a:off x="868680" y="960120"/>
             <a:ext cx="2391156" cy="5394960"/>
           </a:xfrm>
           <a:prstGeom prst="roundRect">
@@ -7201,13 +7211,13 @@
       </p:sp>
       <p:sp>
         <p:nvSpPr>
-          <p:cNvPr id="21" name="Shape 18"/>
-          <p:cNvSpPr/>
-          <p:nvPr/>
-        </p:nvSpPr>
-        <p:spPr>
-          <a:xfrm>
-            <a:off x="9790938" y="1051560"/>
+          <p:cNvPr id="7" name="Shape 4"/>
+          <p:cNvSpPr/>
+          <p:nvPr/>
+        </p:nvSpPr>
+        <p:spPr>
+          <a:xfrm>
+            <a:off x="1652778" y="1051560"/>
             <a:ext cx="822960" cy="201168"/>
           </a:xfrm>
           <a:prstGeom prst="roundRect">
@@ -7223,13 +7233,13 @@
       </p:sp>
       <p:sp>
         <p:nvSpPr>
-          <p:cNvPr id="22" name="Shape 19"/>
-          <p:cNvSpPr/>
-          <p:nvPr/>
-        </p:nvSpPr>
-        <p:spPr>
-          <a:xfrm>
-            <a:off x="9790938" y="2971800"/>
+          <p:cNvPr id="8" name="Shape 5"/>
+          <p:cNvSpPr/>
+          <p:nvPr/>
+        </p:nvSpPr>
+        <p:spPr>
+          <a:xfrm>
+            <a:off x="1652778" y="2971800"/>
             <a:ext cx="822960" cy="822960"/>
           </a:xfrm>
           <a:prstGeom prst="ellipse">
@@ -7243,13 +7253,13 @@
       </p:sp>
       <p:sp>
         <p:nvSpPr>
-          <p:cNvPr id="23" name="Shape 20"/>
+          <p:cNvPr id="9" name="Shape 6"/>
           <p:cNvSpPr/>
           <p:nvPr/>
         </p:nvSpPr>
         <p:spPr>
           <a:xfrm rot="5400000">
-            <a:off x="10083546" y="3218688"/>
+            <a:off x="1945386" y="3218688"/>
             <a:ext cx="329184" cy="329184"/>
           </a:xfrm>
           <a:prstGeom prst="triangle">
@@ -7263,13 +7273,13 @@
       </p:sp>
       <p:sp>
         <p:nvSpPr>
-          <p:cNvPr id="24" name="Text 21"/>
-          <p:cNvSpPr/>
-          <p:nvPr/>
-        </p:nvSpPr>
-        <p:spPr>
-          <a:xfrm>
-            <a:off x="8915400" y="3977640"/>
+          <p:cNvPr id="10" name="Text 7"/>
+          <p:cNvSpPr/>
+          <p:nvPr/>
+        </p:nvSpPr>
+        <p:spPr>
+          <a:xfrm>
+            <a:off x="777240" y="3977640"/>
             <a:ext cx="2574036" cy="457200"/>
           </a:xfrm>
           <a:prstGeom prst="rect">
@@ -7294,7 +7304,7 @@
                 <a:ea typeface="Fraunces" pitchFamily="34" charset="-122"/>
                 <a:cs typeface="Fraunces" pitchFamily="34" charset="-120"/>
               </a:rPr>
-              <a:t>Demo 3</a:t>
+              <a:t>Demo 2</a:t>
             </a:r>
             <a:endParaRPr lang="en-US" sz="2400" dirty="0"/>
           </a:p>
@@ -7302,14 +7312,605 @@
       </p:sp>
       <p:sp>
         <p:nvSpPr>
+          <p:cNvPr id="11" name="Text 8"/>
+          <p:cNvSpPr/>
+          <p:nvPr/>
+        </p:nvSpPr>
+        <p:spPr>
+          <a:xfrm>
+            <a:off x="777240" y="4434840"/>
+            <a:ext cx="2574036" cy="320040"/>
+          </a:xfrm>
+          <a:prstGeom prst="rect">
+            <a:avLst/>
+          </a:prstGeom>
+          <a:noFill/>
+          <a:ln/>
+        </p:spPr>
+        <p:txBody>
+          <a:bodyPr wrap="square" lIns="0" tIns="0" rIns="0" bIns="0" rtlCol="0" anchor="ctr"/>
+          <a:lstStyle/>
+          <a:p>
+            <a:pPr algn="ctr" indent="0" marL="0">
+              <a:buNone/>
+            </a:pPr>
+            <a:r>
+              <a:rPr lang="en-US" sz="1200" dirty="0">
+                <a:solidFill>
+                  <a:srgbClr val="6B7C77"/>
+                </a:solidFill>
+                <a:latin typeface="Manrope" pitchFamily="34" charset="0"/>
+                <a:ea typeface="Manrope" pitchFamily="34" charset="-122"/>
+                <a:cs typeface="Manrope" pitchFamily="34" charset="-120"/>
+              </a:rPr>
+              <a:t>Video plays here</a:t>
+            </a:r>
+            <a:endParaRPr lang="en-US" sz="1200" dirty="0"/>
+          </a:p>
+        </p:txBody>
+      </p:sp>
+      <p:sp>
+        <p:nvSpPr>
+          <p:cNvPr id="12" name="Text 9"/>
+          <p:cNvSpPr/>
+          <p:nvPr/>
+        </p:nvSpPr>
+        <p:spPr>
+          <a:xfrm>
+            <a:off x="4206240" y="1051560"/>
+            <a:ext cx="4572000" cy="274320"/>
+          </a:xfrm>
+          <a:prstGeom prst="rect">
+            <a:avLst/>
+          </a:prstGeom>
+          <a:noFill/>
+          <a:ln/>
+        </p:spPr>
+        <p:txBody>
+          <a:bodyPr wrap="square" lIns="0" tIns="0" rIns="0" bIns="0" rtlCol="0" anchor="t"/>
+          <a:lstStyle/>
+          <a:p>
+            <a:pPr indent="0" marL="0">
+              <a:buNone/>
+            </a:pPr>
+            <a:r>
+              <a:rPr lang="en-US" sz="1200" b="1" spc="250" kern="0" dirty="0">
+                <a:solidFill>
+                  <a:srgbClr val="1D9A84"/>
+                </a:solidFill>
+                <a:latin typeface="Manrope" pitchFamily="34" charset="0"/>
+                <a:ea typeface="Manrope" pitchFamily="34" charset="-122"/>
+                <a:cs typeface="Manrope" pitchFamily="34" charset="-120"/>
+              </a:rPr>
+              <a:t>MARKETING</a:t>
+            </a:r>
+            <a:endParaRPr lang="en-US" sz="1200" dirty="0"/>
+          </a:p>
+        </p:txBody>
+      </p:sp>
+      <p:sp>
+        <p:nvSpPr>
+          <p:cNvPr id="13" name="Text 10"/>
+          <p:cNvSpPr/>
+          <p:nvPr/>
+        </p:nvSpPr>
+        <p:spPr>
+          <a:xfrm>
+            <a:off x="4206240" y="1371600"/>
+            <a:ext cx="7406640" cy="1280160"/>
+          </a:xfrm>
+          <a:prstGeom prst="rect">
+            <a:avLst/>
+          </a:prstGeom>
+          <a:noFill/>
+          <a:ln/>
+        </p:spPr>
+        <p:txBody>
+          <a:bodyPr wrap="square" lIns="0" tIns="0" rIns="0" bIns="0" rtlCol="0" anchor="t"/>
+          <a:lstStyle/>
+          <a:p>
+            <a:pPr indent="0" marL="0">
+              <a:buNone/>
+            </a:pPr>
+            <a:r>
+              <a:rPr lang="en-US" sz="3600" b="1" dirty="0">
+                <a:solidFill>
+                  <a:srgbClr val="10201C"/>
+                </a:solidFill>
+                <a:latin typeface="Fraunces" pitchFamily="34" charset="0"/>
+                <a:ea typeface="Fraunces" pitchFamily="34" charset="-122"/>
+                <a:cs typeface="Fraunces" pitchFamily="34" charset="-120"/>
+              </a:rPr>
+              <a:t>A 90-day marketing plan, and posts in your voice.</a:t>
+            </a:r>
+            <a:endParaRPr lang="en-US" sz="3600" dirty="0"/>
+          </a:p>
+        </p:txBody>
+      </p:sp>
+      <p:sp>
+        <p:nvSpPr>
+          <p:cNvPr id="14" name="Shape 11"/>
+          <p:cNvSpPr/>
+          <p:nvPr/>
+        </p:nvSpPr>
+        <p:spPr>
+          <a:xfrm>
+            <a:off x="4462272" y="2926080"/>
+            <a:ext cx="0" cy="2240280"/>
+          </a:xfrm>
+          <a:prstGeom prst="line">
+            <a:avLst/>
+          </a:prstGeom>
+          <a:noFill/>
+          <a:ln w="25400">
+            <a:solidFill>
+              <a:srgbClr val="DBE6E2"/>
+            </a:solidFill>
+            <a:prstDash val="solid"/>
+          </a:ln>
+        </p:spPr>
+      </p:sp>
+      <p:sp>
+        <p:nvSpPr>
+          <p:cNvPr id="15" name="Shape 12"/>
+          <p:cNvSpPr/>
+          <p:nvPr/>
+        </p:nvSpPr>
+        <p:spPr>
+          <a:xfrm>
+            <a:off x="4206240" y="2697480"/>
+            <a:ext cx="512064" cy="512064"/>
+          </a:xfrm>
+          <a:prstGeom prst="ellipse">
+            <a:avLst/>
+          </a:prstGeom>
+          <a:solidFill>
+            <a:srgbClr val="0F5A4F"/>
+          </a:solidFill>
+          <a:ln w="38100">
+            <a:solidFill>
+              <a:srgbClr val="F6F8F7"/>
+            </a:solidFill>
+            <a:prstDash val="solid"/>
+          </a:ln>
+        </p:spPr>
+      </p:sp>
+      <p:sp>
+        <p:nvSpPr>
+          <p:cNvPr id="16" name="Text 13"/>
+          <p:cNvSpPr/>
+          <p:nvPr/>
+        </p:nvSpPr>
+        <p:spPr>
+          <a:xfrm>
+            <a:off x="4206240" y="2697480"/>
+            <a:ext cx="512064" cy="512064"/>
+          </a:xfrm>
+          <a:prstGeom prst="rect">
+            <a:avLst/>
+          </a:prstGeom>
+          <a:noFill/>
+          <a:ln/>
+        </p:spPr>
+        <p:txBody>
+          <a:bodyPr wrap="square" lIns="0" tIns="0" rIns="0" bIns="0" rtlCol="0" anchor="ctr"/>
+          <a:lstStyle/>
+          <a:p>
+            <a:pPr algn="ctr" indent="0" marL="0">
+              <a:buNone/>
+            </a:pPr>
+            <a:r>
+              <a:rPr lang="en-US" sz="1700" b="1" dirty="0">
+                <a:solidFill>
+                  <a:srgbClr val="FFFFFF"/>
+                </a:solidFill>
+                <a:latin typeface="Fraunces" pitchFamily="34" charset="0"/>
+                <a:ea typeface="Fraunces" pitchFamily="34" charset="-122"/>
+                <a:cs typeface="Fraunces" pitchFamily="34" charset="-120"/>
+              </a:rPr>
+              <a:t>1</a:t>
+            </a:r>
+            <a:endParaRPr lang="en-US" sz="1700" dirty="0"/>
+          </a:p>
+        </p:txBody>
+      </p:sp>
+      <p:sp>
+        <p:nvSpPr>
+          <p:cNvPr id="17" name="Text 14"/>
+          <p:cNvSpPr/>
+          <p:nvPr/>
+        </p:nvSpPr>
+        <p:spPr>
+          <a:xfrm>
+            <a:off x="4983480" y="2679192"/>
+            <a:ext cx="2743200" cy="548640"/>
+          </a:xfrm>
+          <a:prstGeom prst="rect">
+            <a:avLst/>
+          </a:prstGeom>
+          <a:noFill/>
+          <a:ln/>
+        </p:spPr>
+        <p:txBody>
+          <a:bodyPr wrap="square" lIns="0" tIns="0" rIns="0" bIns="0" rtlCol="0" anchor="ctr"/>
+          <a:lstStyle/>
+          <a:p>
+            <a:pPr indent="0" marL="0">
+              <a:buNone/>
+            </a:pPr>
+            <a:r>
+              <a:rPr lang="en-US" sz="1800" b="1" dirty="0">
+                <a:solidFill>
+                  <a:srgbClr val="10201C"/>
+                </a:solidFill>
+                <a:latin typeface="Manrope" pitchFamily="34" charset="0"/>
+                <a:ea typeface="Manrope" pitchFamily="34" charset="-122"/>
+                <a:cs typeface="Manrope" pitchFamily="34" charset="-120"/>
+              </a:rPr>
+              <a:t>Goals interview</a:t>
+            </a:r>
+            <a:endParaRPr lang="en-US" sz="1800" dirty="0"/>
+          </a:p>
+        </p:txBody>
+      </p:sp>
+      <p:sp>
+        <p:nvSpPr>
+          <p:cNvPr id="18" name="Text 15"/>
+          <p:cNvSpPr/>
+          <p:nvPr/>
+        </p:nvSpPr>
+        <p:spPr>
+          <a:xfrm>
+            <a:off x="7726680" y="2679192"/>
+            <a:ext cx="3931920" cy="548640"/>
+          </a:xfrm>
+          <a:prstGeom prst="rect">
+            <a:avLst/>
+          </a:prstGeom>
+          <a:noFill/>
+          <a:ln/>
+        </p:spPr>
+        <p:txBody>
+          <a:bodyPr wrap="square" lIns="0" tIns="0" rIns="0" bIns="0" rtlCol="0" anchor="ctr"/>
+          <a:lstStyle/>
+          <a:p>
+            <a:pPr indent="0" marL="0">
+              <a:buNone/>
+            </a:pPr>
+            <a:r>
+              <a:rPr lang="en-US" sz="1500" dirty="0">
+                <a:solidFill>
+                  <a:srgbClr val="3E504B"/>
+                </a:solidFill>
+                <a:latin typeface="Manrope" pitchFamily="34" charset="0"/>
+                <a:ea typeface="Manrope" pitchFamily="34" charset="-122"/>
+                <a:cs typeface="Manrope" pitchFamily="34" charset="-120"/>
+              </a:rPr>
+              <a:t>A short conversation about what you want.</a:t>
+            </a:r>
+            <a:endParaRPr lang="en-US" sz="1500" dirty="0"/>
+          </a:p>
+        </p:txBody>
+      </p:sp>
+      <p:sp>
+        <p:nvSpPr>
+          <p:cNvPr id="19" name="Shape 16"/>
+          <p:cNvSpPr/>
+          <p:nvPr/>
+        </p:nvSpPr>
+        <p:spPr>
+          <a:xfrm>
+            <a:off x="4206240" y="3447288"/>
+            <a:ext cx="512064" cy="512064"/>
+          </a:xfrm>
+          <a:prstGeom prst="ellipse">
+            <a:avLst/>
+          </a:prstGeom>
+          <a:solidFill>
+            <a:srgbClr val="0F5A4F"/>
+          </a:solidFill>
+          <a:ln w="38100">
+            <a:solidFill>
+              <a:srgbClr val="F6F8F7"/>
+            </a:solidFill>
+            <a:prstDash val="solid"/>
+          </a:ln>
+        </p:spPr>
+      </p:sp>
+      <p:sp>
+        <p:nvSpPr>
+          <p:cNvPr id="20" name="Text 17"/>
+          <p:cNvSpPr/>
+          <p:nvPr/>
+        </p:nvSpPr>
+        <p:spPr>
+          <a:xfrm>
+            <a:off x="4206240" y="3447288"/>
+            <a:ext cx="512064" cy="512064"/>
+          </a:xfrm>
+          <a:prstGeom prst="rect">
+            <a:avLst/>
+          </a:prstGeom>
+          <a:noFill/>
+          <a:ln/>
+        </p:spPr>
+        <p:txBody>
+          <a:bodyPr wrap="square" lIns="0" tIns="0" rIns="0" bIns="0" rtlCol="0" anchor="ctr"/>
+          <a:lstStyle/>
+          <a:p>
+            <a:pPr algn="ctr" indent="0" marL="0">
+              <a:buNone/>
+            </a:pPr>
+            <a:r>
+              <a:rPr lang="en-US" sz="1700" b="1" dirty="0">
+                <a:solidFill>
+                  <a:srgbClr val="FFFFFF"/>
+                </a:solidFill>
+                <a:latin typeface="Fraunces" pitchFamily="34" charset="0"/>
+                <a:ea typeface="Fraunces" pitchFamily="34" charset="-122"/>
+                <a:cs typeface="Fraunces" pitchFamily="34" charset="-120"/>
+              </a:rPr>
+              <a:t>2</a:t>
+            </a:r>
+            <a:endParaRPr lang="en-US" sz="1700" dirty="0"/>
+          </a:p>
+        </p:txBody>
+      </p:sp>
+      <p:sp>
+        <p:nvSpPr>
+          <p:cNvPr id="21" name="Text 18"/>
+          <p:cNvSpPr/>
+          <p:nvPr/>
+        </p:nvSpPr>
+        <p:spPr>
+          <a:xfrm>
+            <a:off x="4983480" y="3429000"/>
+            <a:ext cx="2743200" cy="548640"/>
+          </a:xfrm>
+          <a:prstGeom prst="rect">
+            <a:avLst/>
+          </a:prstGeom>
+          <a:noFill/>
+          <a:ln/>
+        </p:spPr>
+        <p:txBody>
+          <a:bodyPr wrap="square" lIns="0" tIns="0" rIns="0" bIns="0" rtlCol="0" anchor="ctr"/>
+          <a:lstStyle/>
+          <a:p>
+            <a:pPr indent="0" marL="0">
+              <a:buNone/>
+            </a:pPr>
+            <a:r>
+              <a:rPr lang="en-US" sz="1800" b="1" dirty="0">
+                <a:solidFill>
+                  <a:srgbClr val="10201C"/>
+                </a:solidFill>
+                <a:latin typeface="Manrope" pitchFamily="34" charset="0"/>
+                <a:ea typeface="Manrope" pitchFamily="34" charset="-122"/>
+                <a:cs typeface="Manrope" pitchFamily="34" charset="-120"/>
+              </a:rPr>
+              <a:t>Your 90-day plan</a:t>
+            </a:r>
+            <a:endParaRPr lang="en-US" sz="1800" dirty="0"/>
+          </a:p>
+        </p:txBody>
+      </p:sp>
+      <p:sp>
+        <p:nvSpPr>
+          <p:cNvPr id="22" name="Text 19"/>
+          <p:cNvSpPr/>
+          <p:nvPr/>
+        </p:nvSpPr>
+        <p:spPr>
+          <a:xfrm>
+            <a:off x="7726680" y="3429000"/>
+            <a:ext cx="3931920" cy="548640"/>
+          </a:xfrm>
+          <a:prstGeom prst="rect">
+            <a:avLst/>
+          </a:prstGeom>
+          <a:noFill/>
+          <a:ln/>
+        </p:spPr>
+        <p:txBody>
+          <a:bodyPr wrap="square" lIns="0" tIns="0" rIns="0" bIns="0" rtlCol="0" anchor="ctr"/>
+          <a:lstStyle/>
+          <a:p>
+            <a:pPr indent="0" marL="0">
+              <a:buNone/>
+            </a:pPr>
+            <a:r>
+              <a:rPr lang="en-US" sz="1500" dirty="0">
+                <a:solidFill>
+                  <a:srgbClr val="3E504B"/>
+                </a:solidFill>
+                <a:latin typeface="Manrope" pitchFamily="34" charset="0"/>
+                <a:ea typeface="Manrope" pitchFamily="34" charset="-122"/>
+                <a:cs typeface="Manrope" pitchFamily="34" charset="-120"/>
+              </a:rPr>
+              <a:t>Voxa builds the plan from your answers.</a:t>
+            </a:r>
+            <a:endParaRPr lang="en-US" sz="1500" dirty="0"/>
+          </a:p>
+        </p:txBody>
+      </p:sp>
+      <p:sp>
+        <p:nvSpPr>
+          <p:cNvPr id="23" name="Shape 20"/>
+          <p:cNvSpPr/>
+          <p:nvPr/>
+        </p:nvSpPr>
+        <p:spPr>
+          <a:xfrm>
+            <a:off x="4206240" y="4197096"/>
+            <a:ext cx="512064" cy="512064"/>
+          </a:xfrm>
+          <a:prstGeom prst="ellipse">
+            <a:avLst/>
+          </a:prstGeom>
+          <a:solidFill>
+            <a:srgbClr val="0F5A4F"/>
+          </a:solidFill>
+          <a:ln w="38100">
+            <a:solidFill>
+              <a:srgbClr val="F6F8F7"/>
+            </a:solidFill>
+            <a:prstDash val="solid"/>
+          </a:ln>
+        </p:spPr>
+      </p:sp>
+      <p:sp>
+        <p:nvSpPr>
+          <p:cNvPr id="24" name="Text 21"/>
+          <p:cNvSpPr/>
+          <p:nvPr/>
+        </p:nvSpPr>
+        <p:spPr>
+          <a:xfrm>
+            <a:off x="4206240" y="4197096"/>
+            <a:ext cx="512064" cy="512064"/>
+          </a:xfrm>
+          <a:prstGeom prst="rect">
+            <a:avLst/>
+          </a:prstGeom>
+          <a:noFill/>
+          <a:ln/>
+        </p:spPr>
+        <p:txBody>
+          <a:bodyPr wrap="square" lIns="0" tIns="0" rIns="0" bIns="0" rtlCol="0" anchor="ctr"/>
+          <a:lstStyle/>
+          <a:p>
+            <a:pPr algn="ctr" indent="0" marL="0">
+              <a:buNone/>
+            </a:pPr>
+            <a:r>
+              <a:rPr lang="en-US" sz="1700" b="1" dirty="0">
+                <a:solidFill>
+                  <a:srgbClr val="FFFFFF"/>
+                </a:solidFill>
+                <a:latin typeface="Fraunces" pitchFamily="34" charset="0"/>
+                <a:ea typeface="Fraunces" pitchFamily="34" charset="-122"/>
+                <a:cs typeface="Fraunces" pitchFamily="34" charset="-120"/>
+              </a:rPr>
+              <a:t>3</a:t>
+            </a:r>
+            <a:endParaRPr lang="en-US" sz="1700" dirty="0"/>
+          </a:p>
+        </p:txBody>
+      </p:sp>
+      <p:sp>
+        <p:nvSpPr>
           <p:cNvPr id="25" name="Text 22"/>
           <p:cNvSpPr/>
           <p:nvPr/>
         </p:nvSpPr>
         <p:spPr>
           <a:xfrm>
-            <a:off x="8915400" y="4434840"/>
-            <a:ext cx="2574036" cy="320040"/>
+            <a:off x="4983480" y="4178808"/>
+            <a:ext cx="2743200" cy="548640"/>
+          </a:xfrm>
+          <a:prstGeom prst="rect">
+            <a:avLst/>
+          </a:prstGeom>
+          <a:noFill/>
+          <a:ln/>
+        </p:spPr>
+        <p:txBody>
+          <a:bodyPr wrap="square" lIns="0" tIns="0" rIns="0" bIns="0" rtlCol="0" anchor="ctr"/>
+          <a:lstStyle/>
+          <a:p>
+            <a:pPr indent="0" marL="0">
+              <a:buNone/>
+            </a:pPr>
+            <a:r>
+              <a:rPr lang="en-US" sz="1800" b="1" dirty="0">
+                <a:solidFill>
+                  <a:srgbClr val="10201C"/>
+                </a:solidFill>
+                <a:latin typeface="Manrope" pitchFamily="34" charset="0"/>
+                <a:ea typeface="Manrope" pitchFamily="34" charset="-122"/>
+                <a:cs typeface="Manrope" pitchFamily="34" charset="-120"/>
+              </a:rPr>
+              <a:t>Learns your voice</a:t>
+            </a:r>
+            <a:endParaRPr lang="en-US" sz="1800" dirty="0"/>
+          </a:p>
+        </p:txBody>
+      </p:sp>
+      <p:sp>
+        <p:nvSpPr>
+          <p:cNvPr id="26" name="Text 23"/>
+          <p:cNvSpPr/>
+          <p:nvPr/>
+        </p:nvSpPr>
+        <p:spPr>
+          <a:xfrm>
+            <a:off x="7726680" y="4178808"/>
+            <a:ext cx="3931920" cy="548640"/>
+          </a:xfrm>
+          <a:prstGeom prst="rect">
+            <a:avLst/>
+          </a:prstGeom>
+          <a:noFill/>
+          <a:ln/>
+        </p:spPr>
+        <p:txBody>
+          <a:bodyPr wrap="square" lIns="0" tIns="0" rIns="0" bIns="0" rtlCol="0" anchor="ctr"/>
+          <a:lstStyle/>
+          <a:p>
+            <a:pPr indent="0" marL="0">
+              <a:buNone/>
+            </a:pPr>
+            <a:r>
+              <a:rPr lang="en-US" sz="1500" dirty="0">
+                <a:solidFill>
+                  <a:srgbClr val="3E504B"/>
+                </a:solidFill>
+                <a:latin typeface="Manrope" pitchFamily="34" charset="0"/>
+                <a:ea typeface="Manrope" pitchFamily="34" charset="-122"/>
+                <a:cs typeface="Manrope" pitchFamily="34" charset="-120"/>
+              </a:rPr>
+              <a:t>It reads your past posts to sound like you.</a:t>
+            </a:r>
+            <a:endParaRPr lang="en-US" sz="1500" dirty="0"/>
+          </a:p>
+        </p:txBody>
+      </p:sp>
+      <p:sp>
+        <p:nvSpPr>
+          <p:cNvPr id="27" name="Shape 24"/>
+          <p:cNvSpPr/>
+          <p:nvPr/>
+        </p:nvSpPr>
+        <p:spPr>
+          <a:xfrm>
+            <a:off x="4206240" y="4946904"/>
+            <a:ext cx="512064" cy="512064"/>
+          </a:xfrm>
+          <a:prstGeom prst="ellipse">
+            <a:avLst/>
+          </a:prstGeom>
+          <a:solidFill>
+            <a:srgbClr val="0F5A4F"/>
+          </a:solidFill>
+          <a:ln w="38100">
+            <a:solidFill>
+              <a:srgbClr val="F6F8F7"/>
+            </a:solidFill>
+            <a:prstDash val="solid"/>
+          </a:ln>
+        </p:spPr>
+      </p:sp>
+      <p:sp>
+        <p:nvSpPr>
+          <p:cNvPr id="28" name="Text 25"/>
+          <p:cNvSpPr/>
+          <p:nvPr/>
+        </p:nvSpPr>
+        <p:spPr>
+          <a:xfrm>
+            <a:off x="4206240" y="4946904"/>
+            <a:ext cx="512064" cy="512064"/>
           </a:xfrm>
           <a:prstGeom prst="rect">
             <a:avLst/>
@@ -7325,17 +7926,220 @@
               <a:buNone/>
             </a:pPr>
             <a:r>
-              <a:rPr lang="en-US" sz="1200" dirty="0">
-                <a:solidFill>
-                  <a:srgbClr val="6B7C77"/>
-                </a:solidFill>
-                <a:latin typeface="Manrope" pitchFamily="34" charset="0"/>
-                <a:ea typeface="Manrope" pitchFamily="34" charset="-122"/>
-                <a:cs typeface="Manrope" pitchFamily="34" charset="-120"/>
-              </a:rPr>
-              <a:t>Video plays here</a:t>
+              <a:rPr lang="en-US" sz="1700" b="1" dirty="0">
+                <a:solidFill>
+                  <a:srgbClr val="FFFFFF"/>
+                </a:solidFill>
+                <a:latin typeface="Fraunces" pitchFamily="34" charset="0"/>
+                <a:ea typeface="Fraunces" pitchFamily="34" charset="-122"/>
+                <a:cs typeface="Fraunces" pitchFamily="34" charset="-120"/>
+              </a:rPr>
+              <a:t>4</a:t>
+            </a:r>
+            <a:endParaRPr lang="en-US" sz="1700" dirty="0"/>
+          </a:p>
+        </p:txBody>
+      </p:sp>
+      <p:sp>
+        <p:nvSpPr>
+          <p:cNvPr id="29" name="Text 26"/>
+          <p:cNvSpPr/>
+          <p:nvPr/>
+        </p:nvSpPr>
+        <p:spPr>
+          <a:xfrm>
+            <a:off x="4983480" y="4928616"/>
+            <a:ext cx="2743200" cy="548640"/>
+          </a:xfrm>
+          <a:prstGeom prst="rect">
+            <a:avLst/>
+          </a:prstGeom>
+          <a:noFill/>
+          <a:ln/>
+        </p:spPr>
+        <p:txBody>
+          <a:bodyPr wrap="square" lIns="0" tIns="0" rIns="0" bIns="0" rtlCol="0" anchor="ctr"/>
+          <a:lstStyle/>
+          <a:p>
+            <a:pPr indent="0" marL="0">
+              <a:buNone/>
+            </a:pPr>
+            <a:r>
+              <a:rPr lang="en-US" sz="1800" b="1" dirty="0">
+                <a:solidFill>
+                  <a:srgbClr val="10201C"/>
+                </a:solidFill>
+                <a:latin typeface="Manrope" pitchFamily="34" charset="0"/>
+                <a:ea typeface="Manrope" pitchFamily="34" charset="-122"/>
+                <a:cs typeface="Manrope" pitchFamily="34" charset="-120"/>
+              </a:rPr>
+              <a:t>Drafts with sources</a:t>
+            </a:r>
+            <a:endParaRPr lang="en-US" sz="1800" dirty="0"/>
+          </a:p>
+        </p:txBody>
+      </p:sp>
+      <p:sp>
+        <p:nvSpPr>
+          <p:cNvPr id="30" name="Text 27"/>
+          <p:cNvSpPr/>
+          <p:nvPr/>
+        </p:nvSpPr>
+        <p:spPr>
+          <a:xfrm>
+            <a:off x="7726680" y="4928616"/>
+            <a:ext cx="3931920" cy="548640"/>
+          </a:xfrm>
+          <a:prstGeom prst="rect">
+            <a:avLst/>
+          </a:prstGeom>
+          <a:noFill/>
+          <a:ln/>
+        </p:spPr>
+        <p:txBody>
+          <a:bodyPr wrap="square" lIns="0" tIns="0" rIns="0" bIns="0" rtlCol="0" anchor="ctr"/>
+          <a:lstStyle/>
+          <a:p>
+            <a:pPr indent="0" marL="0">
+              <a:buNone/>
+            </a:pPr>
+            <a:r>
+              <a:rPr lang="en-US" sz="1500" dirty="0">
+                <a:solidFill>
+                  <a:srgbClr val="3E504B"/>
+                </a:solidFill>
+                <a:latin typeface="Manrope" pitchFamily="34" charset="0"/>
+                <a:ea typeface="Manrope" pitchFamily="34" charset="-122"/>
+                <a:cs typeface="Manrope" pitchFamily="34" charset="-120"/>
+              </a:rPr>
+              <a:t>Your photos, plus live research sources.</a:t>
+            </a:r>
+            <a:endParaRPr lang="en-US" sz="1500" dirty="0"/>
+          </a:p>
+        </p:txBody>
+      </p:sp>
+      <p:sp>
+        <p:nvSpPr>
+          <p:cNvPr id="31" name="Shape 28"/>
+          <p:cNvSpPr/>
+          <p:nvPr/>
+        </p:nvSpPr>
+        <p:spPr>
+          <a:xfrm>
+            <a:off x="4206240" y="5852160"/>
+            <a:ext cx="3566160" cy="502920"/>
+          </a:xfrm>
+          <a:prstGeom prst="roundRect">
+            <a:avLst>
+              <a:gd name="adj" fmla="val 50000"/>
+            </a:avLst>
+          </a:prstGeom>
+          <a:solidFill>
+            <a:srgbClr val="0F5A4F"/>
+          </a:solidFill>
+          <a:ln w="12700">
+            <a:solidFill>
+              <a:srgbClr val="0F5A4F"/>
+            </a:solidFill>
+            <a:prstDash val="solid"/>
+          </a:ln>
+        </p:spPr>
+      </p:sp>
+      <p:sp>
+        <p:nvSpPr>
+          <p:cNvPr id="32" name="Shape 29"/>
+          <p:cNvSpPr/>
+          <p:nvPr/>
+        </p:nvSpPr>
+        <p:spPr>
+          <a:xfrm>
+            <a:off x="4297680" y="5966460"/>
+            <a:ext cx="274320" cy="274320"/>
+          </a:xfrm>
+          <a:prstGeom prst="ellipse">
+            <a:avLst/>
+          </a:prstGeom>
+          <a:solidFill>
+            <a:srgbClr val="1D9A84"/>
+          </a:solidFill>
+          <a:ln/>
+        </p:spPr>
+      </p:sp>
+      <p:sp>
+        <p:nvSpPr>
+          <p:cNvPr id="33" name="Text 30"/>
+          <p:cNvSpPr/>
+          <p:nvPr/>
+        </p:nvSpPr>
+        <p:spPr>
+          <a:xfrm>
+            <a:off x="4297680" y="5966460"/>
+            <a:ext cx="274320" cy="274320"/>
+          </a:xfrm>
+          <a:prstGeom prst="rect">
+            <a:avLst/>
+          </a:prstGeom>
+          <a:noFill/>
+          <a:ln/>
+        </p:spPr>
+        <p:txBody>
+          <a:bodyPr wrap="square" lIns="0" tIns="0" rIns="0" bIns="0" rtlCol="0" anchor="ctr"/>
+          <a:lstStyle/>
+          <a:p>
+            <a:pPr algn="ctr" indent="0" marL="0">
+              <a:buNone/>
+            </a:pPr>
+            <a:r>
+              <a:rPr lang="en-US" sz="1200" b="1" dirty="0">
+                <a:solidFill>
+                  <a:srgbClr val="FFFFFF"/>
+                </a:solidFill>
+                <a:latin typeface="Manrope" pitchFamily="34" charset="0"/>
+                <a:ea typeface="Manrope" pitchFamily="34" charset="-122"/>
+                <a:cs typeface="Manrope" pitchFamily="34" charset="-120"/>
+              </a:rPr>
+              <a:t>✓</a:t>
             </a:r>
             <a:endParaRPr lang="en-US" sz="1200" dirty="0"/>
+          </a:p>
+        </p:txBody>
+      </p:sp>
+      <p:sp>
+        <p:nvSpPr>
+          <p:cNvPr id="34" name="Text 31"/>
+          <p:cNvSpPr/>
+          <p:nvPr/>
+        </p:nvSpPr>
+        <p:spPr>
+          <a:xfrm>
+            <a:off x="4663440" y="5852160"/>
+            <a:ext cx="3017520" cy="502920"/>
+          </a:xfrm>
+          <a:prstGeom prst="rect">
+            <a:avLst/>
+          </a:prstGeom>
+          <a:noFill/>
+          <a:ln/>
+        </p:spPr>
+        <p:txBody>
+          <a:bodyPr wrap="square" lIns="0" tIns="0" rIns="0" bIns="0" rtlCol="0" anchor="ctr"/>
+          <a:lstStyle/>
+          <a:p>
+            <a:pPr algn="l" indent="0" marL="0">
+              <a:buNone/>
+            </a:pPr>
+            <a:r>
+              <a:rPr lang="en-US" sz="1500" b="1" dirty="0">
+                <a:solidFill>
+                  <a:srgbClr val="FFFFFF"/>
+                </a:solidFill>
+                <a:latin typeface="Manrope" pitchFamily="34" charset="0"/>
+                <a:ea typeface="Manrope" pitchFamily="34" charset="-122"/>
+                <a:cs typeface="Manrope" pitchFamily="34" charset="-120"/>
+              </a:rPr>
+              <a:t>Posting is always your tap.</a:t>
+            </a:r>
+            <a:endParaRPr lang="en-US" sz="1500" dirty="0"/>
           </a:p>
         </p:txBody>
       </p:sp>
@@ -7467,7 +8271,7 @@
                 <a:ea typeface="Manrope" pitchFamily="34" charset="-122"/>
                 <a:cs typeface="Manrope" pitchFamily="34" charset="-120"/>
               </a:rPr>
-              <a:t>07 / 10</a:t>
+              <a:t>07 / 11</a:t>
             </a:r>
             <a:endParaRPr lang="en-US" sz="1100" dirty="0"/>
           </a:p>
@@ -7475,22 +8279,142 @@
       </p:sp>
       <p:sp>
         <p:nvSpPr>
-          <p:cNvPr id="5" name="VIDEO_SLOT Demo 4"/>
-          <p:cNvSpPr/>
-          <p:nvPr/>
-        </p:nvSpPr>
-        <p:spPr>
-          <a:xfrm>
-            <a:off x="777240" y="868680"/>
-            <a:ext cx="2574036" cy="5577840"/>
+          <p:cNvPr id="5" name="Text 2"/>
+          <p:cNvSpPr/>
+          <p:nvPr/>
+        </p:nvSpPr>
+        <p:spPr>
+          <a:xfrm>
+            <a:off x="685800" y="1188720"/>
+            <a:ext cx="4572000" cy="274320"/>
+          </a:xfrm>
+          <a:prstGeom prst="rect">
+            <a:avLst/>
+          </a:prstGeom>
+          <a:noFill/>
+          <a:ln/>
+        </p:spPr>
+        <p:txBody>
+          <a:bodyPr wrap="square" lIns="0" tIns="0" rIns="0" bIns="0" rtlCol="0" anchor="t"/>
+          <a:lstStyle/>
+          <a:p>
+            <a:pPr indent="0" marL="0">
+              <a:buNone/>
+            </a:pPr>
+            <a:r>
+              <a:rPr lang="en-US" sz="1200" b="1" spc="250" kern="0" dirty="0">
+                <a:solidFill>
+                  <a:srgbClr val="1D9A84"/>
+                </a:solidFill>
+                <a:latin typeface="Manrope" pitchFamily="34" charset="0"/>
+                <a:ea typeface="Manrope" pitchFamily="34" charset="-122"/>
+                <a:cs typeface="Manrope" pitchFamily="34" charset="-120"/>
+              </a:rPr>
+              <a:t>EMAIL</a:t>
+            </a:r>
+            <a:endParaRPr lang="en-US" sz="1200" dirty="0"/>
+          </a:p>
+        </p:txBody>
+      </p:sp>
+      <p:sp>
+        <p:nvSpPr>
+          <p:cNvPr id="6" name="Text 3"/>
+          <p:cNvSpPr/>
+          <p:nvPr/>
+        </p:nvSpPr>
+        <p:spPr>
+          <a:xfrm>
+            <a:off x="685800" y="1554480"/>
+            <a:ext cx="7315200" cy="822960"/>
+          </a:xfrm>
+          <a:prstGeom prst="rect">
+            <a:avLst/>
+          </a:prstGeom>
+          <a:noFill/>
+          <a:ln/>
+        </p:spPr>
+        <p:txBody>
+          <a:bodyPr wrap="square" lIns="0" tIns="0" rIns="0" bIns="0" rtlCol="0" anchor="t"/>
+          <a:lstStyle/>
+          <a:p>
+            <a:pPr indent="0" marL="0">
+              <a:buNone/>
+            </a:pPr>
+            <a:r>
+              <a:rPr lang="en-US" sz="4400" b="1" dirty="0">
+                <a:solidFill>
+                  <a:srgbClr val="10201C"/>
+                </a:solidFill>
+                <a:latin typeface="Fraunces" pitchFamily="34" charset="0"/>
+                <a:ea typeface="Fraunces" pitchFamily="34" charset="-122"/>
+                <a:cs typeface="Fraunces" pitchFamily="34" charset="-120"/>
+              </a:rPr>
+              <a:t>Your inbox, by voice.</a:t>
+            </a:r>
+            <a:endParaRPr lang="en-US" sz="4400" dirty="0"/>
+          </a:p>
+        </p:txBody>
+      </p:sp>
+      <p:sp>
+        <p:nvSpPr>
+          <p:cNvPr id="7" name="Text 4"/>
+          <p:cNvSpPr/>
+          <p:nvPr/>
+        </p:nvSpPr>
+        <p:spPr>
+          <a:xfrm>
+            <a:off x="685800" y="2423160"/>
+            <a:ext cx="7315200" cy="457200"/>
+          </a:xfrm>
+          <a:prstGeom prst="rect">
+            <a:avLst/>
+          </a:prstGeom>
+          <a:noFill/>
+          <a:ln/>
+        </p:spPr>
+        <p:txBody>
+          <a:bodyPr wrap="square" lIns="0" tIns="0" rIns="0" bIns="0" rtlCol="0" anchor="t"/>
+          <a:lstStyle/>
+          <a:p>
+            <a:pPr indent="0" marL="0">
+              <a:lnSpc>
+                <a:spcPct val="130000"/>
+              </a:lnSpc>
+              <a:buNone/>
+            </a:pPr>
+            <a:r>
+              <a:rPr lang="en-US" sz="1900" dirty="0">
+                <a:solidFill>
+                  <a:srgbClr val="3E504B"/>
+                </a:solidFill>
+                <a:latin typeface="Manrope" pitchFamily="34" charset="0"/>
+                <a:ea typeface="Manrope" pitchFamily="34" charset="-122"/>
+                <a:cs typeface="Manrope" pitchFamily="34" charset="-120"/>
+              </a:rPr>
+              <a:t>Ask what came in. Voxa sorts it out.</a:t>
+            </a:r>
+            <a:endParaRPr lang="en-US" sz="1900" dirty="0"/>
+          </a:p>
+        </p:txBody>
+      </p:sp>
+      <p:sp>
+        <p:nvSpPr>
+          <p:cNvPr id="8" name="Shape 5"/>
+          <p:cNvSpPr/>
+          <p:nvPr/>
+        </p:nvSpPr>
+        <p:spPr>
+          <a:xfrm>
+            <a:off x="685800" y="3246120"/>
+            <a:ext cx="3657600" cy="2331720"/>
           </a:xfrm>
           <a:prstGeom prst="roundRect">
             <a:avLst>
-              <a:gd name="adj" fmla="val 14920"/>
+              <a:gd name="adj" fmla="val 9804"/>
             </a:avLst>
           </a:prstGeom>
           <a:solidFill>
-            <a:srgbClr val="10201C"/>
+            <a:srgbClr val="FFFFFF"/>
           </a:solidFill>
           <a:ln/>
           <a:effectLst>
@@ -7504,13 +8428,394 @@
       </p:sp>
       <p:sp>
         <p:nvSpPr>
-          <p:cNvPr id="6" name="Shape 3"/>
-          <p:cNvSpPr/>
-          <p:nvPr/>
-        </p:nvSpPr>
-        <p:spPr>
-          <a:xfrm>
-            <a:off x="868680" y="960120"/>
+          <p:cNvPr id="9" name="Shape 6"/>
+          <p:cNvSpPr/>
+          <p:nvPr/>
+        </p:nvSpPr>
+        <p:spPr>
+          <a:xfrm>
+            <a:off x="1005840" y="3566160"/>
+            <a:ext cx="502920" cy="502920"/>
+          </a:xfrm>
+          <a:prstGeom prst="roundRect">
+            <a:avLst>
+              <a:gd name="adj" fmla="val 27273"/>
+            </a:avLst>
+          </a:prstGeom>
+          <a:solidFill>
+            <a:srgbClr val="E3F1EC"/>
+          </a:solidFill>
+          <a:ln/>
+        </p:spPr>
+      </p:sp>
+      <p:sp>
+        <p:nvSpPr>
+          <p:cNvPr id="10" name="Text 7"/>
+          <p:cNvSpPr/>
+          <p:nvPr/>
+        </p:nvSpPr>
+        <p:spPr>
+          <a:xfrm>
+            <a:off x="1005840" y="3566160"/>
+            <a:ext cx="502920" cy="502920"/>
+          </a:xfrm>
+          <a:prstGeom prst="rect">
+            <a:avLst/>
+          </a:prstGeom>
+          <a:noFill/>
+          <a:ln/>
+        </p:spPr>
+        <p:txBody>
+          <a:bodyPr wrap="square" lIns="0" tIns="0" rIns="0" bIns="0" rtlCol="0" anchor="ctr"/>
+          <a:lstStyle/>
+          <a:p>
+            <a:pPr algn="ctr" indent="0" marL="0">
+              <a:buNone/>
+            </a:pPr>
+            <a:r>
+              <a:rPr lang="en-US" sz="2000" b="1" dirty="0">
+                <a:solidFill>
+                  <a:srgbClr val="0F5A4F"/>
+                </a:solidFill>
+                <a:latin typeface="Manrope" pitchFamily="34" charset="0"/>
+                <a:ea typeface="Manrope" pitchFamily="34" charset="-122"/>
+                <a:cs typeface="Manrope" pitchFamily="34" charset="-120"/>
+              </a:rPr>
+              <a:t>#</a:t>
+            </a:r>
+            <a:endParaRPr lang="en-US" sz="2000" dirty="0"/>
+          </a:p>
+        </p:txBody>
+      </p:sp>
+      <p:sp>
+        <p:nvSpPr>
+          <p:cNvPr id="11" name="Text 8"/>
+          <p:cNvSpPr/>
+          <p:nvPr/>
+        </p:nvSpPr>
+        <p:spPr>
+          <a:xfrm>
+            <a:off x="1005840" y="4206240"/>
+            <a:ext cx="3108960" cy="411480"/>
+          </a:xfrm>
+          <a:prstGeom prst="rect">
+            <a:avLst/>
+          </a:prstGeom>
+          <a:noFill/>
+          <a:ln/>
+        </p:spPr>
+        <p:txBody>
+          <a:bodyPr wrap="square" lIns="0" tIns="0" rIns="0" bIns="0" rtlCol="0" anchor="ctr"/>
+          <a:lstStyle/>
+          <a:p>
+            <a:pPr indent="0" marL="0">
+              <a:buNone/>
+            </a:pPr>
+            <a:r>
+              <a:rPr lang="en-US" sz="1800" b="1" dirty="0">
+                <a:solidFill>
+                  <a:srgbClr val="10201C"/>
+                </a:solidFill>
+                <a:latin typeface="Manrope" pitchFamily="34" charset="0"/>
+                <a:ea typeface="Manrope" pitchFamily="34" charset="-122"/>
+                <a:cs typeface="Manrope" pitchFamily="34" charset="-120"/>
+              </a:rPr>
+              <a:t>Tagged to the listing</a:t>
+            </a:r>
+            <a:endParaRPr lang="en-US" sz="1800" dirty="0"/>
+          </a:p>
+        </p:txBody>
+      </p:sp>
+      <p:sp>
+        <p:nvSpPr>
+          <p:cNvPr id="12" name="Text 9"/>
+          <p:cNvSpPr/>
+          <p:nvPr/>
+        </p:nvSpPr>
+        <p:spPr>
+          <a:xfrm>
+            <a:off x="1005840" y="4645152"/>
+            <a:ext cx="3063240" cy="777240"/>
+          </a:xfrm>
+          <a:prstGeom prst="rect">
+            <a:avLst/>
+          </a:prstGeom>
+          <a:noFill/>
+          <a:ln/>
+        </p:spPr>
+        <p:txBody>
+          <a:bodyPr wrap="square" lIns="0" tIns="0" rIns="0" bIns="0" rtlCol="0" anchor="t"/>
+          <a:lstStyle/>
+          <a:p>
+            <a:pPr indent="0" marL="0">
+              <a:lnSpc>
+                <a:spcPct val="130000"/>
+              </a:lnSpc>
+              <a:buNone/>
+            </a:pPr>
+            <a:r>
+              <a:rPr lang="en-US" sz="1500" dirty="0">
+                <a:solidFill>
+                  <a:srgbClr val="3E504B"/>
+                </a:solidFill>
+                <a:latin typeface="Manrope" pitchFamily="34" charset="0"/>
+                <a:ea typeface="Manrope" pitchFamily="34" charset="-122"/>
+                <a:cs typeface="Manrope" pitchFamily="34" charset="-120"/>
+              </a:rPr>
+              <a:t>Voxa tags each email to the listing it belongs to.</a:t>
+            </a:r>
+            <a:endParaRPr lang="en-US" sz="1500" dirty="0"/>
+          </a:p>
+        </p:txBody>
+      </p:sp>
+      <p:sp>
+        <p:nvSpPr>
+          <p:cNvPr id="13" name="Shape 10"/>
+          <p:cNvSpPr/>
+          <p:nvPr/>
+        </p:nvSpPr>
+        <p:spPr>
+          <a:xfrm>
+            <a:off x="4572000" y="3246120"/>
+            <a:ext cx="3657600" cy="2331720"/>
+          </a:xfrm>
+          <a:prstGeom prst="roundRect">
+            <a:avLst>
+              <a:gd name="adj" fmla="val 9804"/>
+            </a:avLst>
+          </a:prstGeom>
+          <a:solidFill>
+            <a:srgbClr val="FFFFFF"/>
+          </a:solidFill>
+          <a:ln/>
+          <a:effectLst>
+            <a:outerShdw sx="100000" sy="100000" kx="0" ky="0" algn="bl" rotWithShape="0" blurRad="304800" dist="50800" dir="5400000">
+              <a:srgbClr val="0F5A4F">
+                <a:alpha val="10000"/>
+              </a:srgbClr>
+            </a:outerShdw>
+          </a:effectLst>
+        </p:spPr>
+      </p:sp>
+      <p:sp>
+        <p:nvSpPr>
+          <p:cNvPr id="14" name="Shape 11"/>
+          <p:cNvSpPr/>
+          <p:nvPr/>
+        </p:nvSpPr>
+        <p:spPr>
+          <a:xfrm>
+            <a:off x="4892040" y="3566160"/>
+            <a:ext cx="502920" cy="502920"/>
+          </a:xfrm>
+          <a:prstGeom prst="roundRect">
+            <a:avLst>
+              <a:gd name="adj" fmla="val 27273"/>
+            </a:avLst>
+          </a:prstGeom>
+          <a:solidFill>
+            <a:srgbClr val="E3F1EC"/>
+          </a:solidFill>
+          <a:ln/>
+        </p:spPr>
+      </p:sp>
+      <p:sp>
+        <p:nvSpPr>
+          <p:cNvPr id="15" name="Text 12"/>
+          <p:cNvSpPr/>
+          <p:nvPr/>
+        </p:nvSpPr>
+        <p:spPr>
+          <a:xfrm>
+            <a:off x="4892040" y="3566160"/>
+            <a:ext cx="502920" cy="502920"/>
+          </a:xfrm>
+          <a:prstGeom prst="rect">
+            <a:avLst/>
+          </a:prstGeom>
+          <a:noFill/>
+          <a:ln/>
+        </p:spPr>
+        <p:txBody>
+          <a:bodyPr wrap="square" lIns="0" tIns="0" rIns="0" bIns="0" rtlCol="0" anchor="ctr"/>
+          <a:lstStyle/>
+          <a:p>
+            <a:pPr algn="ctr" indent="0" marL="0">
+              <a:buNone/>
+            </a:pPr>
+            <a:r>
+              <a:rPr lang="en-US" sz="2000" b="1" dirty="0">
+                <a:solidFill>
+                  <a:srgbClr val="0F5A4F"/>
+                </a:solidFill>
+                <a:latin typeface="Manrope" pitchFamily="34" charset="0"/>
+                <a:ea typeface="Manrope" pitchFamily="34" charset="-122"/>
+                <a:cs typeface="Manrope" pitchFamily="34" charset="-120"/>
+              </a:rPr>
+              <a:t>§</a:t>
+            </a:r>
+            <a:endParaRPr lang="en-US" sz="2000" dirty="0"/>
+          </a:p>
+        </p:txBody>
+      </p:sp>
+      <p:sp>
+        <p:nvSpPr>
+          <p:cNvPr id="16" name="Text 13"/>
+          <p:cNvSpPr/>
+          <p:nvPr/>
+        </p:nvSpPr>
+        <p:spPr>
+          <a:xfrm>
+            <a:off x="4892040" y="4206240"/>
+            <a:ext cx="3108960" cy="411480"/>
+          </a:xfrm>
+          <a:prstGeom prst="rect">
+            <a:avLst/>
+          </a:prstGeom>
+          <a:noFill/>
+          <a:ln/>
+        </p:spPr>
+        <p:txBody>
+          <a:bodyPr wrap="square" lIns="0" tIns="0" rIns="0" bIns="0" rtlCol="0" anchor="ctr"/>
+          <a:lstStyle/>
+          <a:p>
+            <a:pPr indent="0" marL="0">
+              <a:buNone/>
+            </a:pPr>
+            <a:r>
+              <a:rPr lang="en-US" sz="1800" b="1" dirty="0">
+                <a:solidFill>
+                  <a:srgbClr val="10201C"/>
+                </a:solidFill>
+                <a:latin typeface="Manrope" pitchFamily="34" charset="0"/>
+                <a:ea typeface="Manrope" pitchFamily="34" charset="-122"/>
+                <a:cs typeface="Manrope" pitchFamily="34" charset="-120"/>
+              </a:rPr>
+              <a:t>Documents, summarized</a:t>
+            </a:r>
+            <a:endParaRPr lang="en-US" sz="1800" dirty="0"/>
+          </a:p>
+        </p:txBody>
+      </p:sp>
+      <p:sp>
+        <p:nvSpPr>
+          <p:cNvPr id="17" name="Text 14"/>
+          <p:cNvSpPr/>
+          <p:nvPr/>
+        </p:nvSpPr>
+        <p:spPr>
+          <a:xfrm>
+            <a:off x="4892040" y="4645152"/>
+            <a:ext cx="3063240" cy="777240"/>
+          </a:xfrm>
+          <a:prstGeom prst="rect">
+            <a:avLst/>
+          </a:prstGeom>
+          <a:noFill/>
+          <a:ln/>
+        </p:spPr>
+        <p:txBody>
+          <a:bodyPr wrap="square" lIns="0" tIns="0" rIns="0" bIns="0" rtlCol="0" anchor="t"/>
+          <a:lstStyle/>
+          <a:p>
+            <a:pPr indent="0" marL="0">
+              <a:lnSpc>
+                <a:spcPct val="130000"/>
+              </a:lnSpc>
+              <a:buNone/>
+            </a:pPr>
+            <a:r>
+              <a:rPr lang="en-US" sz="1500" dirty="0">
+                <a:solidFill>
+                  <a:srgbClr val="3E504B"/>
+                </a:solidFill>
+                <a:latin typeface="Manrope" pitchFamily="34" charset="0"/>
+                <a:ea typeface="Manrope" pitchFamily="34" charset="-122"/>
+                <a:cs typeface="Manrope" pitchFamily="34" charset="-120"/>
+              </a:rPr>
+              <a:t>Quick summaries of attachments, like contract highlights.</a:t>
+            </a:r>
+            <a:endParaRPr lang="en-US" sz="1500" dirty="0"/>
+          </a:p>
+        </p:txBody>
+      </p:sp>
+      <p:sp>
+        <p:nvSpPr>
+          <p:cNvPr id="18" name="Text 15"/>
+          <p:cNvSpPr/>
+          <p:nvPr/>
+        </p:nvSpPr>
+        <p:spPr>
+          <a:xfrm>
+            <a:off x="685800" y="5852160"/>
+            <a:ext cx="7498080" cy="365760"/>
+          </a:xfrm>
+          <a:prstGeom prst="rect">
+            <a:avLst/>
+          </a:prstGeom>
+          <a:noFill/>
+          <a:ln/>
+        </p:spPr>
+        <p:txBody>
+          <a:bodyPr wrap="square" lIns="0" tIns="0" rIns="0" bIns="0" rtlCol="0" anchor="ctr"/>
+          <a:lstStyle/>
+          <a:p>
+            <a:pPr indent="0" marL="0">
+              <a:buNone/>
+            </a:pPr>
+            <a:r>
+              <a:rPr lang="en-US" sz="1300" i="1" dirty="0">
+                <a:solidFill>
+                  <a:srgbClr val="6B7C77"/>
+                </a:solidFill>
+                <a:latin typeface="Manrope" pitchFamily="34" charset="0"/>
+                <a:ea typeface="Manrope" pitchFamily="34" charset="-122"/>
+                <a:cs typeface="Manrope" pitchFamily="34" charset="-120"/>
+              </a:rPr>
+              <a:t>Summaries help you read faster. They are not legal advice.</a:t>
+            </a:r>
+            <a:endParaRPr lang="en-US" sz="1300" dirty="0"/>
+          </a:p>
+        </p:txBody>
+      </p:sp>
+      <p:sp>
+        <p:nvSpPr>
+          <p:cNvPr id="19" name="VIDEO_SLOT Demo 3"/>
+          <p:cNvSpPr/>
+          <p:nvPr/>
+        </p:nvSpPr>
+        <p:spPr>
+          <a:xfrm>
+            <a:off x="8915400" y="868680"/>
+            <a:ext cx="2574036" cy="5577840"/>
+          </a:xfrm>
+          <a:prstGeom prst="roundRect">
+            <a:avLst>
+              <a:gd name="adj" fmla="val 14920"/>
+            </a:avLst>
+          </a:prstGeom>
+          <a:solidFill>
+            <a:srgbClr val="10201C"/>
+          </a:solidFill>
+          <a:ln/>
+          <a:effectLst>
+            <a:outerShdw sx="100000" sy="100000" kx="0" ky="0" algn="bl" rotWithShape="0" blurRad="304800" dist="50800" dir="5400000">
+              <a:srgbClr val="0F5A4F">
+                <a:alpha val="10000"/>
+              </a:srgbClr>
+            </a:outerShdw>
+          </a:effectLst>
+        </p:spPr>
+      </p:sp>
+      <p:sp>
+        <p:nvSpPr>
+          <p:cNvPr id="20" name="Shape 17"/>
+          <p:cNvSpPr/>
+          <p:nvPr/>
+        </p:nvSpPr>
+        <p:spPr>
+          <a:xfrm>
+            <a:off x="9006840" y="960120"/>
             <a:ext cx="2391156" cy="5394960"/>
           </a:xfrm>
           <a:prstGeom prst="roundRect">
@@ -7526,13 +8831,13 @@
       </p:sp>
       <p:sp>
         <p:nvSpPr>
-          <p:cNvPr id="7" name="Shape 4"/>
-          <p:cNvSpPr/>
-          <p:nvPr/>
-        </p:nvSpPr>
-        <p:spPr>
-          <a:xfrm>
-            <a:off x="1652778" y="1051560"/>
+          <p:cNvPr id="21" name="Shape 18"/>
+          <p:cNvSpPr/>
+          <p:nvPr/>
+        </p:nvSpPr>
+        <p:spPr>
+          <a:xfrm>
+            <a:off x="9790938" y="1051560"/>
             <a:ext cx="822960" cy="201168"/>
           </a:xfrm>
           <a:prstGeom prst="roundRect">
@@ -7548,13 +8853,13 @@
       </p:sp>
       <p:sp>
         <p:nvSpPr>
-          <p:cNvPr id="8" name="Shape 5"/>
-          <p:cNvSpPr/>
-          <p:nvPr/>
-        </p:nvSpPr>
-        <p:spPr>
-          <a:xfrm>
-            <a:off x="1652778" y="2971800"/>
+          <p:cNvPr id="22" name="Shape 19"/>
+          <p:cNvSpPr/>
+          <p:nvPr/>
+        </p:nvSpPr>
+        <p:spPr>
+          <a:xfrm>
+            <a:off x="9790938" y="2971800"/>
             <a:ext cx="822960" cy="822960"/>
           </a:xfrm>
           <a:prstGeom prst="ellipse">
@@ -7568,13 +8873,13 @@
       </p:sp>
       <p:sp>
         <p:nvSpPr>
-          <p:cNvPr id="9" name="Shape 6"/>
+          <p:cNvPr id="23" name="Shape 20"/>
           <p:cNvSpPr/>
           <p:nvPr/>
         </p:nvSpPr>
         <p:spPr>
           <a:xfrm rot="5400000">
-            <a:off x="1945386" y="3218688"/>
+            <a:off x="10083546" y="3218688"/>
             <a:ext cx="329184" cy="329184"/>
           </a:xfrm>
           <a:prstGeom prst="triangle">
@@ -7588,13 +8893,13 @@
       </p:sp>
       <p:sp>
         <p:nvSpPr>
-          <p:cNvPr id="10" name="Text 7"/>
-          <p:cNvSpPr/>
-          <p:nvPr/>
-        </p:nvSpPr>
-        <p:spPr>
-          <a:xfrm>
-            <a:off x="777240" y="3977640"/>
+          <p:cNvPr id="24" name="Text 21"/>
+          <p:cNvSpPr/>
+          <p:nvPr/>
+        </p:nvSpPr>
+        <p:spPr>
+          <a:xfrm>
+            <a:off x="8915400" y="3977640"/>
             <a:ext cx="2574036" cy="457200"/>
           </a:xfrm>
           <a:prstGeom prst="rect">
@@ -7619,7 +8924,7 @@
                 <a:ea typeface="Fraunces" pitchFamily="34" charset="-122"/>
                 <a:cs typeface="Fraunces" pitchFamily="34" charset="-120"/>
               </a:rPr>
-              <a:t>Demo 4</a:t>
+              <a:t>Demo 3</a:t>
             </a:r>
             <a:endParaRPr lang="en-US" sz="2400" dirty="0"/>
           </a:p>
@@ -7627,13 +8932,13 @@
       </p:sp>
       <p:sp>
         <p:nvSpPr>
-          <p:cNvPr id="11" name="Text 8"/>
-          <p:cNvSpPr/>
-          <p:nvPr/>
-        </p:nvSpPr>
-        <p:spPr>
-          <a:xfrm>
-            <a:off x="777240" y="4434840"/>
+          <p:cNvPr id="25" name="Text 22"/>
+          <p:cNvSpPr/>
+          <p:nvPr/>
+        </p:nvSpPr>
+        <p:spPr>
+          <a:xfrm>
+            <a:off x="8915400" y="4434840"/>
             <a:ext cx="2574036" cy="320040"/>
           </a:xfrm>
           <a:prstGeom prst="rect">
@@ -7661,522 +8966,6 @@
               <a:t>Video plays here</a:t>
             </a:r>
             <a:endParaRPr lang="en-US" sz="1200" dirty="0"/>
-          </a:p>
-        </p:txBody>
-      </p:sp>
-      <p:sp>
-        <p:nvSpPr>
-          <p:cNvPr id="12" name="Text 9"/>
-          <p:cNvSpPr/>
-          <p:nvPr/>
-        </p:nvSpPr>
-        <p:spPr>
-          <a:xfrm>
-            <a:off x="4206240" y="1188720"/>
-            <a:ext cx="4572000" cy="274320"/>
-          </a:xfrm>
-          <a:prstGeom prst="rect">
-            <a:avLst/>
-          </a:prstGeom>
-          <a:noFill/>
-          <a:ln/>
-        </p:spPr>
-        <p:txBody>
-          <a:bodyPr wrap="square" lIns="0" tIns="0" rIns="0" bIns="0" rtlCol="0" anchor="t"/>
-          <a:lstStyle/>
-          <a:p>
-            <a:pPr indent="0" marL="0">
-              <a:buNone/>
-            </a:pPr>
-            <a:r>
-              <a:rPr lang="en-US" sz="1200" b="1" spc="250" kern="0" dirty="0">
-                <a:solidFill>
-                  <a:srgbClr val="1D9A84"/>
-                </a:solidFill>
-                <a:latin typeface="Manrope" pitchFamily="34" charset="0"/>
-                <a:ea typeface="Manrope" pitchFamily="34" charset="-122"/>
-                <a:cs typeface="Manrope" pitchFamily="34" charset="-120"/>
-              </a:rPr>
-              <a:t>MEMORY</a:t>
-            </a:r>
-            <a:endParaRPr lang="en-US" sz="1200" dirty="0"/>
-          </a:p>
-        </p:txBody>
-      </p:sp>
-      <p:sp>
-        <p:nvSpPr>
-          <p:cNvPr id="13" name="Text 10"/>
-          <p:cNvSpPr/>
-          <p:nvPr/>
-        </p:nvSpPr>
-        <p:spPr>
-          <a:xfrm>
-            <a:off x="4206240" y="1554480"/>
-            <a:ext cx="7315200" cy="822960"/>
-          </a:xfrm>
-          <a:prstGeom prst="rect">
-            <a:avLst/>
-          </a:prstGeom>
-          <a:noFill/>
-          <a:ln/>
-        </p:spPr>
-        <p:txBody>
-          <a:bodyPr wrap="square" lIns="0" tIns="0" rIns="0" bIns="0" rtlCol="0" anchor="t"/>
-          <a:lstStyle/>
-          <a:p>
-            <a:pPr indent="0" marL="0">
-              <a:buNone/>
-            </a:pPr>
-            <a:r>
-              <a:rPr lang="en-US" sz="4400" b="1" dirty="0">
-                <a:solidFill>
-                  <a:srgbClr val="10201C"/>
-                </a:solidFill>
-                <a:latin typeface="Fraunces" pitchFamily="34" charset="0"/>
-                <a:ea typeface="Fraunces" pitchFamily="34" charset="-122"/>
-                <a:cs typeface="Fraunces" pitchFamily="34" charset="-120"/>
-              </a:rPr>
-              <a:t>What Voxa remembers.</a:t>
-            </a:r>
-            <a:endParaRPr lang="en-US" sz="4400" dirty="0"/>
-          </a:p>
-        </p:txBody>
-      </p:sp>
-      <p:sp>
-        <p:nvSpPr>
-          <p:cNvPr id="14" name="Text 11"/>
-          <p:cNvSpPr/>
-          <p:nvPr/>
-        </p:nvSpPr>
-        <p:spPr>
-          <a:xfrm>
-            <a:off x="4206240" y="2423160"/>
-            <a:ext cx="7223760" cy="822960"/>
-          </a:xfrm>
-          <a:prstGeom prst="rect">
-            <a:avLst/>
-          </a:prstGeom>
-          <a:noFill/>
-          <a:ln/>
-        </p:spPr>
-        <p:txBody>
-          <a:bodyPr wrap="square" lIns="0" tIns="0" rIns="0" bIns="0" rtlCol="0" anchor="t"/>
-          <a:lstStyle/>
-          <a:p>
-            <a:pPr indent="0" marL="0">
-              <a:lnSpc>
-                <a:spcPct val="130000"/>
-              </a:lnSpc>
-              <a:buNone/>
-            </a:pPr>
-            <a:r>
-              <a:rPr lang="en-US" sz="1800" dirty="0">
-                <a:solidFill>
-                  <a:srgbClr val="3E504B"/>
-                </a:solidFill>
-                <a:latin typeface="Manrope" pitchFamily="34" charset="0"/>
-                <a:ea typeface="Manrope" pitchFamily="34" charset="-122"/>
-                <a:cs typeface="Manrope" pitchFamily="34" charset="-120"/>
-              </a:rPr>
-              <a:t>It learns your preferences, like how you like your captions or when you take showings.</a:t>
-            </a:r>
-            <a:endParaRPr lang="en-US" sz="1800" dirty="0"/>
-          </a:p>
-        </p:txBody>
-      </p:sp>
-      <p:sp>
-        <p:nvSpPr>
-          <p:cNvPr id="15" name="Shape 12"/>
-          <p:cNvSpPr/>
-          <p:nvPr/>
-        </p:nvSpPr>
-        <p:spPr>
-          <a:xfrm>
-            <a:off x="4206240" y="3429000"/>
-            <a:ext cx="2286000" cy="1508760"/>
-          </a:xfrm>
-          <a:prstGeom prst="roundRect">
-            <a:avLst>
-              <a:gd name="adj" fmla="val 12121"/>
-            </a:avLst>
-          </a:prstGeom>
-          <a:solidFill>
-            <a:srgbClr val="FFFFFF"/>
-          </a:solidFill>
-          <a:ln w="9525">
-            <a:solidFill>
-              <a:srgbClr val="DBE6E2"/>
-            </a:solidFill>
-            <a:prstDash val="solid"/>
-          </a:ln>
-        </p:spPr>
-      </p:sp>
-      <p:sp>
-        <p:nvSpPr>
-          <p:cNvPr id="16" name="Text 13"/>
-          <p:cNvSpPr/>
-          <p:nvPr/>
-        </p:nvSpPr>
-        <p:spPr>
-          <a:xfrm>
-            <a:off x="4480560" y="3611880"/>
-            <a:ext cx="1828800" cy="548640"/>
-          </a:xfrm>
-          <a:prstGeom prst="rect">
-            <a:avLst/>
-          </a:prstGeom>
-          <a:noFill/>
-          <a:ln/>
-        </p:spPr>
-        <p:txBody>
-          <a:bodyPr wrap="square" lIns="0" tIns="0" rIns="0" bIns="0" rtlCol="0" anchor="ctr"/>
-          <a:lstStyle/>
-          <a:p>
-            <a:pPr indent="0" marL="0">
-              <a:buNone/>
-            </a:pPr>
-            <a:r>
-              <a:rPr lang="en-US" sz="2800" b="1" dirty="0">
-                <a:solidFill>
-                  <a:srgbClr val="0F5A4F"/>
-                </a:solidFill>
-                <a:latin typeface="Fraunces" pitchFamily="34" charset="0"/>
-                <a:ea typeface="Fraunces" pitchFamily="34" charset="-122"/>
-                <a:cs typeface="Fraunces" pitchFamily="34" charset="-120"/>
-              </a:rPr>
-              <a:t>See</a:t>
-            </a:r>
-            <a:endParaRPr lang="en-US" sz="2800" dirty="0"/>
-          </a:p>
-        </p:txBody>
-      </p:sp>
-      <p:sp>
-        <p:nvSpPr>
-          <p:cNvPr id="17" name="Text 14"/>
-          <p:cNvSpPr/>
-          <p:nvPr/>
-        </p:nvSpPr>
-        <p:spPr>
-          <a:xfrm>
-            <a:off x="4480560" y="4206240"/>
-            <a:ext cx="1828800" cy="640080"/>
-          </a:xfrm>
-          <a:prstGeom prst="rect">
-            <a:avLst/>
-          </a:prstGeom>
-          <a:noFill/>
-          <a:ln/>
-        </p:spPr>
-        <p:txBody>
-          <a:bodyPr wrap="square" lIns="0" tIns="0" rIns="0" bIns="0" rtlCol="0" anchor="t"/>
-          <a:lstStyle/>
-          <a:p>
-            <a:pPr indent="0" marL="0">
-              <a:lnSpc>
-                <a:spcPct val="130000"/>
-              </a:lnSpc>
-              <a:buNone/>
-            </a:pPr>
-            <a:r>
-              <a:rPr lang="en-US" sz="1400" dirty="0">
-                <a:solidFill>
-                  <a:srgbClr val="3E504B"/>
-                </a:solidFill>
-                <a:latin typeface="Manrope" pitchFamily="34" charset="0"/>
-                <a:ea typeface="Manrope" pitchFamily="34" charset="-122"/>
-                <a:cs typeface="Manrope" pitchFamily="34" charset="-120"/>
-              </a:rPr>
-              <a:t>Every preference, in one list.</a:t>
-            </a:r>
-            <a:endParaRPr lang="en-US" sz="1400" dirty="0"/>
-          </a:p>
-        </p:txBody>
-      </p:sp>
-      <p:sp>
-        <p:nvSpPr>
-          <p:cNvPr id="18" name="Shape 15"/>
-          <p:cNvSpPr/>
-          <p:nvPr/>
-        </p:nvSpPr>
-        <p:spPr>
-          <a:xfrm>
-            <a:off x="6693408" y="3429000"/>
-            <a:ext cx="2286000" cy="1508760"/>
-          </a:xfrm>
-          <a:prstGeom prst="roundRect">
-            <a:avLst>
-              <a:gd name="adj" fmla="val 12121"/>
-            </a:avLst>
-          </a:prstGeom>
-          <a:solidFill>
-            <a:srgbClr val="FFFFFF"/>
-          </a:solidFill>
-          <a:ln w="9525">
-            <a:solidFill>
-              <a:srgbClr val="DBE6E2"/>
-            </a:solidFill>
-            <a:prstDash val="solid"/>
-          </a:ln>
-        </p:spPr>
-      </p:sp>
-      <p:sp>
-        <p:nvSpPr>
-          <p:cNvPr id="19" name="Text 16"/>
-          <p:cNvSpPr/>
-          <p:nvPr/>
-        </p:nvSpPr>
-        <p:spPr>
-          <a:xfrm>
-            <a:off x="6967728" y="3611880"/>
-            <a:ext cx="1828800" cy="548640"/>
-          </a:xfrm>
-          <a:prstGeom prst="rect">
-            <a:avLst/>
-          </a:prstGeom>
-          <a:noFill/>
-          <a:ln/>
-        </p:spPr>
-        <p:txBody>
-          <a:bodyPr wrap="square" lIns="0" tIns="0" rIns="0" bIns="0" rtlCol="0" anchor="ctr"/>
-          <a:lstStyle/>
-          <a:p>
-            <a:pPr indent="0" marL="0">
-              <a:buNone/>
-            </a:pPr>
-            <a:r>
-              <a:rPr lang="en-US" sz="2800" b="1" dirty="0">
-                <a:solidFill>
-                  <a:srgbClr val="0F5A4F"/>
-                </a:solidFill>
-                <a:latin typeface="Fraunces" pitchFamily="34" charset="0"/>
-                <a:ea typeface="Fraunces" pitchFamily="34" charset="-122"/>
-                <a:cs typeface="Fraunces" pitchFamily="34" charset="-120"/>
-              </a:rPr>
-              <a:t>Edit</a:t>
-            </a:r>
-            <a:endParaRPr lang="en-US" sz="2800" dirty="0"/>
-          </a:p>
-        </p:txBody>
-      </p:sp>
-      <p:sp>
-        <p:nvSpPr>
-          <p:cNvPr id="20" name="Text 17"/>
-          <p:cNvSpPr/>
-          <p:nvPr/>
-        </p:nvSpPr>
-        <p:spPr>
-          <a:xfrm>
-            <a:off x="6967728" y="4206240"/>
-            <a:ext cx="1828800" cy="640080"/>
-          </a:xfrm>
-          <a:prstGeom prst="rect">
-            <a:avLst/>
-          </a:prstGeom>
-          <a:noFill/>
-          <a:ln/>
-        </p:spPr>
-        <p:txBody>
-          <a:bodyPr wrap="square" lIns="0" tIns="0" rIns="0" bIns="0" rtlCol="0" anchor="t"/>
-          <a:lstStyle/>
-          <a:p>
-            <a:pPr indent="0" marL="0">
-              <a:lnSpc>
-                <a:spcPct val="130000"/>
-              </a:lnSpc>
-              <a:buNone/>
-            </a:pPr>
-            <a:r>
-              <a:rPr lang="en-US" sz="1400" dirty="0">
-                <a:solidFill>
-                  <a:srgbClr val="3E504B"/>
-                </a:solidFill>
-                <a:latin typeface="Manrope" pitchFamily="34" charset="0"/>
-                <a:ea typeface="Manrope" pitchFamily="34" charset="-122"/>
-                <a:cs typeface="Manrope" pitchFamily="34" charset="-120"/>
-              </a:rPr>
-              <a:t>Change any of them.</a:t>
-            </a:r>
-            <a:endParaRPr lang="en-US" sz="1400" dirty="0"/>
-          </a:p>
-        </p:txBody>
-      </p:sp>
-      <p:sp>
-        <p:nvSpPr>
-          <p:cNvPr id="21" name="Shape 18"/>
-          <p:cNvSpPr/>
-          <p:nvPr/>
-        </p:nvSpPr>
-        <p:spPr>
-          <a:xfrm>
-            <a:off x="9180576" y="3429000"/>
-            <a:ext cx="2286000" cy="1508760"/>
-          </a:xfrm>
-          <a:prstGeom prst="roundRect">
-            <a:avLst>
-              <a:gd name="adj" fmla="val 12121"/>
-            </a:avLst>
-          </a:prstGeom>
-          <a:solidFill>
-            <a:srgbClr val="FFFFFF"/>
-          </a:solidFill>
-          <a:ln w="9525">
-            <a:solidFill>
-              <a:srgbClr val="DBE6E2"/>
-            </a:solidFill>
-            <a:prstDash val="solid"/>
-          </a:ln>
-        </p:spPr>
-      </p:sp>
-      <p:sp>
-        <p:nvSpPr>
-          <p:cNvPr id="22" name="Text 19"/>
-          <p:cNvSpPr/>
-          <p:nvPr/>
-        </p:nvSpPr>
-        <p:spPr>
-          <a:xfrm>
-            <a:off x="9454896" y="3611880"/>
-            <a:ext cx="1828800" cy="548640"/>
-          </a:xfrm>
-          <a:prstGeom prst="rect">
-            <a:avLst/>
-          </a:prstGeom>
-          <a:noFill/>
-          <a:ln/>
-        </p:spPr>
-        <p:txBody>
-          <a:bodyPr wrap="square" lIns="0" tIns="0" rIns="0" bIns="0" rtlCol="0" anchor="ctr"/>
-          <a:lstStyle/>
-          <a:p>
-            <a:pPr indent="0" marL="0">
-              <a:buNone/>
-            </a:pPr>
-            <a:r>
-              <a:rPr lang="en-US" sz="2800" b="1" dirty="0">
-                <a:solidFill>
-                  <a:srgbClr val="0F5A4F"/>
-                </a:solidFill>
-                <a:latin typeface="Fraunces" pitchFamily="34" charset="0"/>
-                <a:ea typeface="Fraunces" pitchFamily="34" charset="-122"/>
-                <a:cs typeface="Fraunces" pitchFamily="34" charset="-120"/>
-              </a:rPr>
-              <a:t>Forget</a:t>
-            </a:r>
-            <a:endParaRPr lang="en-US" sz="2800" dirty="0"/>
-          </a:p>
-        </p:txBody>
-      </p:sp>
-      <p:sp>
-        <p:nvSpPr>
-          <p:cNvPr id="23" name="Text 20"/>
-          <p:cNvSpPr/>
-          <p:nvPr/>
-        </p:nvSpPr>
-        <p:spPr>
-          <a:xfrm>
-            <a:off x="9454896" y="4206240"/>
-            <a:ext cx="1828800" cy="640080"/>
-          </a:xfrm>
-          <a:prstGeom prst="rect">
-            <a:avLst/>
-          </a:prstGeom>
-          <a:noFill/>
-          <a:ln/>
-        </p:spPr>
-        <p:txBody>
-          <a:bodyPr wrap="square" lIns="0" tIns="0" rIns="0" bIns="0" rtlCol="0" anchor="t"/>
-          <a:lstStyle/>
-          <a:p>
-            <a:pPr indent="0" marL="0">
-              <a:lnSpc>
-                <a:spcPct val="130000"/>
-              </a:lnSpc>
-              <a:buNone/>
-            </a:pPr>
-            <a:r>
-              <a:rPr lang="en-US" sz="1400" dirty="0">
-                <a:solidFill>
-                  <a:srgbClr val="3E504B"/>
-                </a:solidFill>
-                <a:latin typeface="Manrope" pitchFamily="34" charset="0"/>
-                <a:ea typeface="Manrope" pitchFamily="34" charset="-122"/>
-                <a:cs typeface="Manrope" pitchFamily="34" charset="-120"/>
-              </a:rPr>
-              <a:t>Remove one, or all.</a:t>
-            </a:r>
-            <a:endParaRPr lang="en-US" sz="1400" dirty="0"/>
-          </a:p>
-        </p:txBody>
-      </p:sp>
-      <p:sp>
-        <p:nvSpPr>
-          <p:cNvPr id="24" name="Shape 21"/>
-          <p:cNvSpPr/>
-          <p:nvPr/>
-        </p:nvSpPr>
-        <p:spPr>
-          <a:xfrm>
-            <a:off x="4206240" y="5212080"/>
-            <a:ext cx="7269480" cy="868680"/>
-          </a:xfrm>
-          <a:prstGeom prst="roundRect">
-            <a:avLst>
-              <a:gd name="adj" fmla="val 26316"/>
-            </a:avLst>
-          </a:prstGeom>
-          <a:solidFill>
-            <a:srgbClr val="0F5A4F"/>
-          </a:solidFill>
-          <a:ln/>
-        </p:spPr>
-      </p:sp>
-      <p:sp>
-        <p:nvSpPr>
-          <p:cNvPr id="25" name="Text 22"/>
-          <p:cNvSpPr/>
-          <p:nvPr/>
-        </p:nvSpPr>
-        <p:spPr>
-          <a:xfrm>
-            <a:off x="4572000" y="5212080"/>
-            <a:ext cx="6675120" cy="868680"/>
-          </a:xfrm>
-          <a:prstGeom prst="rect">
-            <a:avLst/>
-          </a:prstGeom>
-          <a:noFill/>
-          <a:ln/>
-        </p:spPr>
-        <p:txBody>
-          <a:bodyPr wrap="square" lIns="0" tIns="0" rIns="0" bIns="0" rtlCol="0" anchor="ctr"/>
-          <a:lstStyle/>
-          <a:p>
-            <a:pPr indent="0" marL="0">
-              <a:buNone/>
-            </a:pPr>
-            <a:r>
-              <a:rPr lang="en-US" sz="1800" b="1" dirty="0">
-                <a:solidFill>
-                  <a:srgbClr val="FFFFFF"/>
-                </a:solidFill>
-                <a:latin typeface="Manrope" pitchFamily="34" charset="0"/>
-                <a:ea typeface="Manrope" pitchFamily="34" charset="-122"/>
-                <a:cs typeface="Manrope" pitchFamily="34" charset="-120"/>
-              </a:rPr>
-              <a:t>Memory storage is off by default.  </a:t>
-            </a:r>
-            <a:r>
-              <a:rPr lang="en-US" sz="1800" dirty="0">
-                <a:solidFill>
-                  <a:srgbClr val="CFE8E0"/>
-                </a:solidFill>
-                <a:latin typeface="Manrope" pitchFamily="34" charset="0"/>
-                <a:ea typeface="Manrope" pitchFamily="34" charset="-122"/>
-                <a:cs typeface="Manrope" pitchFamily="34" charset="-120"/>
-              </a:rPr>
-              <a:t>You turn it on.</a:t>
-            </a:r>
-            <a:endParaRPr lang="en-US" sz="1800" dirty="0"/>
           </a:p>
         </p:txBody>
       </p:sp>
@@ -8191,6 +8980,850 @@
 <file path=ppt/slides/slide8.xml><?xml version="1.0" encoding="utf-8"?>
 <p:sld xmlns:a="http://schemas.openxmlformats.org/drawingml/2006/main" xmlns:r="http://schemas.openxmlformats.org/officeDocument/2006/relationships" xmlns:p="http://schemas.openxmlformats.org/presentationml/2006/main">
   <p:cSld name="Slide 8">
+    <p:bg>
+      <p:bgPr>
+        <a:solidFill>
+          <a:srgbClr val="F6F8F7"/>
+        </a:solidFill>
+      </p:bgPr>
+    </p:bg>
+    <p:spTree>
+      <p:nvGrpSpPr>
+        <p:cNvPr id="1" name=""/>
+        <p:cNvGrpSpPr/>
+        <p:nvPr/>
+      </p:nvGrpSpPr>
+      <p:grpSpPr>
+        <a:xfrm>
+          <a:off x="0" y="0"/>
+          <a:ext cx="0" cy="0"/>
+          <a:chOff x="0" y="0"/>
+          <a:chExt cx="0" cy="0"/>
+        </a:xfrm>
+      </p:grpSpPr>
+      <p:pic>
+        <p:nvPicPr>
+          <p:cNvPr id="2" name="Image 0" descr="/workspace/slides/voxa-pitch-CTbDK0/assets/voxa-mark.png">    </p:cNvPr>
+          <p:cNvPicPr>
+            <a:picLocks noChangeAspect="1"/>
+          </p:cNvPicPr>
+          <p:nvPr/>
+        </p:nvPicPr>
+        <p:blipFill>
+          <a:blip r:embed="rId1"/>
+          <a:stretch>
+            <a:fillRect/>
+          </a:stretch>
+        </p:blipFill>
+        <p:spPr>
+          <a:xfrm>
+            <a:off x="548640" y="384048"/>
+            <a:ext cx="329184" cy="329184"/>
+          </a:xfrm>
+          <a:prstGeom prst="rect">
+            <a:avLst/>
+          </a:prstGeom>
+        </p:spPr>
+      </p:pic>
+      <p:sp>
+        <p:nvSpPr>
+          <p:cNvPr id="3" name="Text 0"/>
+          <p:cNvSpPr/>
+          <p:nvPr/>
+        </p:nvSpPr>
+        <p:spPr>
+          <a:xfrm>
+            <a:off x="969264" y="365760"/>
+            <a:ext cx="1371600" cy="365760"/>
+          </a:xfrm>
+          <a:prstGeom prst="rect">
+            <a:avLst/>
+          </a:prstGeom>
+          <a:noFill/>
+          <a:ln/>
+        </p:spPr>
+        <p:txBody>
+          <a:bodyPr wrap="square" lIns="0" tIns="0" rIns="0" bIns="0" rtlCol="0" anchor="ctr"/>
+          <a:lstStyle/>
+          <a:p>
+            <a:pPr indent="0" marL="0">
+              <a:buNone/>
+            </a:pPr>
+            <a:r>
+              <a:rPr lang="en-US" sz="1700" b="1" dirty="0">
+                <a:solidFill>
+                  <a:srgbClr val="10201C"/>
+                </a:solidFill>
+                <a:latin typeface="Fraunces" pitchFamily="34" charset="0"/>
+                <a:ea typeface="Fraunces" pitchFamily="34" charset="-122"/>
+                <a:cs typeface="Fraunces" pitchFamily="34" charset="-120"/>
+              </a:rPr>
+              <a:t>Voxa</a:t>
+            </a:r>
+            <a:endParaRPr lang="en-US" sz="1700" dirty="0"/>
+          </a:p>
+        </p:txBody>
+      </p:sp>
+      <p:sp>
+        <p:nvSpPr>
+          <p:cNvPr id="4" name="Text 1"/>
+          <p:cNvSpPr/>
+          <p:nvPr/>
+        </p:nvSpPr>
+        <p:spPr>
+          <a:xfrm>
+            <a:off x="10241280" y="365760"/>
+            <a:ext cx="1399032" cy="365760"/>
+          </a:xfrm>
+          <a:prstGeom prst="rect">
+            <a:avLst/>
+          </a:prstGeom>
+          <a:noFill/>
+          <a:ln/>
+        </p:spPr>
+        <p:txBody>
+          <a:bodyPr wrap="square" lIns="0" tIns="0" rIns="0" bIns="0" rtlCol="0" anchor="ctr"/>
+          <a:lstStyle/>
+          <a:p>
+            <a:pPr algn="r" indent="0" marL="0">
+              <a:buNone/>
+            </a:pPr>
+            <a:r>
+              <a:rPr lang="en-US" sz="1100" dirty="0">
+                <a:solidFill>
+                  <a:srgbClr val="6B7C77"/>
+                </a:solidFill>
+                <a:latin typeface="Manrope" pitchFamily="34" charset="0"/>
+                <a:ea typeface="Manrope" pitchFamily="34" charset="-122"/>
+                <a:cs typeface="Manrope" pitchFamily="34" charset="-120"/>
+              </a:rPr>
+              <a:t>08 / 11</a:t>
+            </a:r>
+            <a:endParaRPr lang="en-US" sz="1100" dirty="0"/>
+          </a:p>
+        </p:txBody>
+      </p:sp>
+      <p:sp>
+        <p:nvSpPr>
+          <p:cNvPr id="5" name="VIDEO_SLOT Demo 4"/>
+          <p:cNvSpPr/>
+          <p:nvPr/>
+        </p:nvSpPr>
+        <p:spPr>
+          <a:xfrm>
+            <a:off x="777240" y="868680"/>
+            <a:ext cx="2574036" cy="5577840"/>
+          </a:xfrm>
+          <a:prstGeom prst="roundRect">
+            <a:avLst>
+              <a:gd name="adj" fmla="val 14920"/>
+            </a:avLst>
+          </a:prstGeom>
+          <a:solidFill>
+            <a:srgbClr val="10201C"/>
+          </a:solidFill>
+          <a:ln/>
+          <a:effectLst>
+            <a:outerShdw sx="100000" sy="100000" kx="0" ky="0" algn="bl" rotWithShape="0" blurRad="304800" dist="50800" dir="5400000">
+              <a:srgbClr val="0F5A4F">
+                <a:alpha val="10000"/>
+              </a:srgbClr>
+            </a:outerShdw>
+          </a:effectLst>
+        </p:spPr>
+      </p:sp>
+      <p:sp>
+        <p:nvSpPr>
+          <p:cNvPr id="6" name="Shape 3"/>
+          <p:cNvSpPr/>
+          <p:nvPr/>
+        </p:nvSpPr>
+        <p:spPr>
+          <a:xfrm>
+            <a:off x="868680" y="960120"/>
+            <a:ext cx="2391156" cy="5394960"/>
+          </a:xfrm>
+          <a:prstGeom prst="roundRect">
+            <a:avLst>
+              <a:gd name="adj" fmla="val 13002"/>
+            </a:avLst>
+          </a:prstGeom>
+          <a:solidFill>
+            <a:srgbClr val="E3F1EC"/>
+          </a:solidFill>
+          <a:ln/>
+        </p:spPr>
+      </p:sp>
+      <p:sp>
+        <p:nvSpPr>
+          <p:cNvPr id="7" name="Shape 4"/>
+          <p:cNvSpPr/>
+          <p:nvPr/>
+        </p:nvSpPr>
+        <p:spPr>
+          <a:xfrm>
+            <a:off x="1652778" y="1051560"/>
+            <a:ext cx="822960" cy="201168"/>
+          </a:xfrm>
+          <a:prstGeom prst="roundRect">
+            <a:avLst>
+              <a:gd name="adj" fmla="val 50000"/>
+            </a:avLst>
+          </a:prstGeom>
+          <a:solidFill>
+            <a:srgbClr val="10201C"/>
+          </a:solidFill>
+          <a:ln/>
+        </p:spPr>
+      </p:sp>
+      <p:sp>
+        <p:nvSpPr>
+          <p:cNvPr id="8" name="Shape 5"/>
+          <p:cNvSpPr/>
+          <p:nvPr/>
+        </p:nvSpPr>
+        <p:spPr>
+          <a:xfrm>
+            <a:off x="1652778" y="2971800"/>
+            <a:ext cx="822960" cy="822960"/>
+          </a:xfrm>
+          <a:prstGeom prst="ellipse">
+            <a:avLst/>
+          </a:prstGeom>
+          <a:solidFill>
+            <a:srgbClr val="0F5A4F"/>
+          </a:solidFill>
+          <a:ln/>
+        </p:spPr>
+      </p:sp>
+      <p:sp>
+        <p:nvSpPr>
+          <p:cNvPr id="9" name="Shape 6"/>
+          <p:cNvSpPr/>
+          <p:nvPr/>
+        </p:nvSpPr>
+        <p:spPr>
+          <a:xfrm rot="5400000">
+            <a:off x="1945386" y="3218688"/>
+            <a:ext cx="329184" cy="329184"/>
+          </a:xfrm>
+          <a:prstGeom prst="triangle">
+            <a:avLst/>
+          </a:prstGeom>
+          <a:solidFill>
+            <a:srgbClr val="FFFFFF"/>
+          </a:solidFill>
+          <a:ln/>
+        </p:spPr>
+      </p:sp>
+      <p:sp>
+        <p:nvSpPr>
+          <p:cNvPr id="10" name="Text 7"/>
+          <p:cNvSpPr/>
+          <p:nvPr/>
+        </p:nvSpPr>
+        <p:spPr>
+          <a:xfrm>
+            <a:off x="777240" y="3977640"/>
+            <a:ext cx="2574036" cy="457200"/>
+          </a:xfrm>
+          <a:prstGeom prst="rect">
+            <a:avLst/>
+          </a:prstGeom>
+          <a:noFill/>
+          <a:ln/>
+        </p:spPr>
+        <p:txBody>
+          <a:bodyPr wrap="square" lIns="0" tIns="0" rIns="0" bIns="0" rtlCol="0" anchor="ctr"/>
+          <a:lstStyle/>
+          <a:p>
+            <a:pPr algn="ctr" indent="0" marL="0">
+              <a:buNone/>
+            </a:pPr>
+            <a:r>
+              <a:rPr lang="en-US" sz="2400" b="1" dirty="0">
+                <a:solidFill>
+                  <a:srgbClr val="0F5A4F"/>
+                </a:solidFill>
+                <a:latin typeface="Fraunces" pitchFamily="34" charset="0"/>
+                <a:ea typeface="Fraunces" pitchFamily="34" charset="-122"/>
+                <a:cs typeface="Fraunces" pitchFamily="34" charset="-120"/>
+              </a:rPr>
+              <a:t>Demo 4</a:t>
+            </a:r>
+            <a:endParaRPr lang="en-US" sz="2400" dirty="0"/>
+          </a:p>
+        </p:txBody>
+      </p:sp>
+      <p:sp>
+        <p:nvSpPr>
+          <p:cNvPr id="11" name="Text 8"/>
+          <p:cNvSpPr/>
+          <p:nvPr/>
+        </p:nvSpPr>
+        <p:spPr>
+          <a:xfrm>
+            <a:off x="777240" y="4434840"/>
+            <a:ext cx="2574036" cy="320040"/>
+          </a:xfrm>
+          <a:prstGeom prst="rect">
+            <a:avLst/>
+          </a:prstGeom>
+          <a:noFill/>
+          <a:ln/>
+        </p:spPr>
+        <p:txBody>
+          <a:bodyPr wrap="square" lIns="0" tIns="0" rIns="0" bIns="0" rtlCol="0" anchor="ctr"/>
+          <a:lstStyle/>
+          <a:p>
+            <a:pPr algn="ctr" indent="0" marL="0">
+              <a:buNone/>
+            </a:pPr>
+            <a:r>
+              <a:rPr lang="en-US" sz="1200" dirty="0">
+                <a:solidFill>
+                  <a:srgbClr val="6B7C77"/>
+                </a:solidFill>
+                <a:latin typeface="Manrope" pitchFamily="34" charset="0"/>
+                <a:ea typeface="Manrope" pitchFamily="34" charset="-122"/>
+                <a:cs typeface="Manrope" pitchFamily="34" charset="-120"/>
+              </a:rPr>
+              <a:t>Video plays here</a:t>
+            </a:r>
+            <a:endParaRPr lang="en-US" sz="1200" dirty="0"/>
+          </a:p>
+        </p:txBody>
+      </p:sp>
+      <p:sp>
+        <p:nvSpPr>
+          <p:cNvPr id="12" name="Text 9"/>
+          <p:cNvSpPr/>
+          <p:nvPr/>
+        </p:nvSpPr>
+        <p:spPr>
+          <a:xfrm>
+            <a:off x="4206240" y="1188720"/>
+            <a:ext cx="4572000" cy="274320"/>
+          </a:xfrm>
+          <a:prstGeom prst="rect">
+            <a:avLst/>
+          </a:prstGeom>
+          <a:noFill/>
+          <a:ln/>
+        </p:spPr>
+        <p:txBody>
+          <a:bodyPr wrap="square" lIns="0" tIns="0" rIns="0" bIns="0" rtlCol="0" anchor="t"/>
+          <a:lstStyle/>
+          <a:p>
+            <a:pPr indent="0" marL="0">
+              <a:buNone/>
+            </a:pPr>
+            <a:r>
+              <a:rPr lang="en-US" sz="1200" b="1" spc="250" kern="0" dirty="0">
+                <a:solidFill>
+                  <a:srgbClr val="1D9A84"/>
+                </a:solidFill>
+                <a:latin typeface="Manrope" pitchFamily="34" charset="0"/>
+                <a:ea typeface="Manrope" pitchFamily="34" charset="-122"/>
+                <a:cs typeface="Manrope" pitchFamily="34" charset="-120"/>
+              </a:rPr>
+              <a:t>MEMORY</a:t>
+            </a:r>
+            <a:endParaRPr lang="en-US" sz="1200" dirty="0"/>
+          </a:p>
+        </p:txBody>
+      </p:sp>
+      <p:sp>
+        <p:nvSpPr>
+          <p:cNvPr id="13" name="Text 10"/>
+          <p:cNvSpPr/>
+          <p:nvPr/>
+        </p:nvSpPr>
+        <p:spPr>
+          <a:xfrm>
+            <a:off x="4206240" y="1554480"/>
+            <a:ext cx="7315200" cy="822960"/>
+          </a:xfrm>
+          <a:prstGeom prst="rect">
+            <a:avLst/>
+          </a:prstGeom>
+          <a:noFill/>
+          <a:ln/>
+        </p:spPr>
+        <p:txBody>
+          <a:bodyPr wrap="square" lIns="0" tIns="0" rIns="0" bIns="0" rtlCol="0" anchor="t"/>
+          <a:lstStyle/>
+          <a:p>
+            <a:pPr indent="0" marL="0">
+              <a:buNone/>
+            </a:pPr>
+            <a:r>
+              <a:rPr lang="en-US" sz="4400" b="1" dirty="0">
+                <a:solidFill>
+                  <a:srgbClr val="10201C"/>
+                </a:solidFill>
+                <a:latin typeface="Fraunces" pitchFamily="34" charset="0"/>
+                <a:ea typeface="Fraunces" pitchFamily="34" charset="-122"/>
+                <a:cs typeface="Fraunces" pitchFamily="34" charset="-120"/>
+              </a:rPr>
+              <a:t>What Voxa remembers.</a:t>
+            </a:r>
+            <a:endParaRPr lang="en-US" sz="4400" dirty="0"/>
+          </a:p>
+        </p:txBody>
+      </p:sp>
+      <p:sp>
+        <p:nvSpPr>
+          <p:cNvPr id="14" name="Text 11"/>
+          <p:cNvSpPr/>
+          <p:nvPr/>
+        </p:nvSpPr>
+        <p:spPr>
+          <a:xfrm>
+            <a:off x="4206240" y="2423160"/>
+            <a:ext cx="7223760" cy="822960"/>
+          </a:xfrm>
+          <a:prstGeom prst="rect">
+            <a:avLst/>
+          </a:prstGeom>
+          <a:noFill/>
+          <a:ln/>
+        </p:spPr>
+        <p:txBody>
+          <a:bodyPr wrap="square" lIns="0" tIns="0" rIns="0" bIns="0" rtlCol="0" anchor="t"/>
+          <a:lstStyle/>
+          <a:p>
+            <a:pPr indent="0" marL="0">
+              <a:lnSpc>
+                <a:spcPct val="130000"/>
+              </a:lnSpc>
+              <a:buNone/>
+            </a:pPr>
+            <a:r>
+              <a:rPr lang="en-US" sz="1800" dirty="0">
+                <a:solidFill>
+                  <a:srgbClr val="3E504B"/>
+                </a:solidFill>
+                <a:latin typeface="Manrope" pitchFamily="34" charset="0"/>
+                <a:ea typeface="Manrope" pitchFamily="34" charset="-122"/>
+                <a:cs typeface="Manrope" pitchFamily="34" charset="-120"/>
+              </a:rPr>
+              <a:t>It learns your preferences, like how you like your captions or when you take showings.</a:t>
+            </a:r>
+            <a:endParaRPr lang="en-US" sz="1800" dirty="0"/>
+          </a:p>
+        </p:txBody>
+      </p:sp>
+      <p:sp>
+        <p:nvSpPr>
+          <p:cNvPr id="15" name="Shape 12"/>
+          <p:cNvSpPr/>
+          <p:nvPr/>
+        </p:nvSpPr>
+        <p:spPr>
+          <a:xfrm>
+            <a:off x="4206240" y="3429000"/>
+            <a:ext cx="2286000" cy="1508760"/>
+          </a:xfrm>
+          <a:prstGeom prst="roundRect">
+            <a:avLst>
+              <a:gd name="adj" fmla="val 12121"/>
+            </a:avLst>
+          </a:prstGeom>
+          <a:solidFill>
+            <a:srgbClr val="FFFFFF"/>
+          </a:solidFill>
+          <a:ln w="9525">
+            <a:solidFill>
+              <a:srgbClr val="DBE6E2"/>
+            </a:solidFill>
+            <a:prstDash val="solid"/>
+          </a:ln>
+        </p:spPr>
+      </p:sp>
+      <p:sp>
+        <p:nvSpPr>
+          <p:cNvPr id="16" name="Text 13"/>
+          <p:cNvSpPr/>
+          <p:nvPr/>
+        </p:nvSpPr>
+        <p:spPr>
+          <a:xfrm>
+            <a:off x="4480560" y="3611880"/>
+            <a:ext cx="1828800" cy="548640"/>
+          </a:xfrm>
+          <a:prstGeom prst="rect">
+            <a:avLst/>
+          </a:prstGeom>
+          <a:noFill/>
+          <a:ln/>
+        </p:spPr>
+        <p:txBody>
+          <a:bodyPr wrap="square" lIns="0" tIns="0" rIns="0" bIns="0" rtlCol="0" anchor="ctr"/>
+          <a:lstStyle/>
+          <a:p>
+            <a:pPr indent="0" marL="0">
+              <a:buNone/>
+            </a:pPr>
+            <a:r>
+              <a:rPr lang="en-US" sz="2800" b="1" dirty="0">
+                <a:solidFill>
+                  <a:srgbClr val="0F5A4F"/>
+                </a:solidFill>
+                <a:latin typeface="Fraunces" pitchFamily="34" charset="0"/>
+                <a:ea typeface="Fraunces" pitchFamily="34" charset="-122"/>
+                <a:cs typeface="Fraunces" pitchFamily="34" charset="-120"/>
+              </a:rPr>
+              <a:t>See</a:t>
+            </a:r>
+            <a:endParaRPr lang="en-US" sz="2800" dirty="0"/>
+          </a:p>
+        </p:txBody>
+      </p:sp>
+      <p:sp>
+        <p:nvSpPr>
+          <p:cNvPr id="17" name="Text 14"/>
+          <p:cNvSpPr/>
+          <p:nvPr/>
+        </p:nvSpPr>
+        <p:spPr>
+          <a:xfrm>
+            <a:off x="4480560" y="4206240"/>
+            <a:ext cx="1828800" cy="640080"/>
+          </a:xfrm>
+          <a:prstGeom prst="rect">
+            <a:avLst/>
+          </a:prstGeom>
+          <a:noFill/>
+          <a:ln/>
+        </p:spPr>
+        <p:txBody>
+          <a:bodyPr wrap="square" lIns="0" tIns="0" rIns="0" bIns="0" rtlCol="0" anchor="t"/>
+          <a:lstStyle/>
+          <a:p>
+            <a:pPr indent="0" marL="0">
+              <a:lnSpc>
+                <a:spcPct val="130000"/>
+              </a:lnSpc>
+              <a:buNone/>
+            </a:pPr>
+            <a:r>
+              <a:rPr lang="en-US" sz="1400" dirty="0">
+                <a:solidFill>
+                  <a:srgbClr val="3E504B"/>
+                </a:solidFill>
+                <a:latin typeface="Manrope" pitchFamily="34" charset="0"/>
+                <a:ea typeface="Manrope" pitchFamily="34" charset="-122"/>
+                <a:cs typeface="Manrope" pitchFamily="34" charset="-120"/>
+              </a:rPr>
+              <a:t>Every preference, in one list.</a:t>
+            </a:r>
+            <a:endParaRPr lang="en-US" sz="1400" dirty="0"/>
+          </a:p>
+        </p:txBody>
+      </p:sp>
+      <p:sp>
+        <p:nvSpPr>
+          <p:cNvPr id="18" name="Shape 15"/>
+          <p:cNvSpPr/>
+          <p:nvPr/>
+        </p:nvSpPr>
+        <p:spPr>
+          <a:xfrm>
+            <a:off x="6693408" y="3429000"/>
+            <a:ext cx="2286000" cy="1508760"/>
+          </a:xfrm>
+          <a:prstGeom prst="roundRect">
+            <a:avLst>
+              <a:gd name="adj" fmla="val 12121"/>
+            </a:avLst>
+          </a:prstGeom>
+          <a:solidFill>
+            <a:srgbClr val="FFFFFF"/>
+          </a:solidFill>
+          <a:ln w="9525">
+            <a:solidFill>
+              <a:srgbClr val="DBE6E2"/>
+            </a:solidFill>
+            <a:prstDash val="solid"/>
+          </a:ln>
+        </p:spPr>
+      </p:sp>
+      <p:sp>
+        <p:nvSpPr>
+          <p:cNvPr id="19" name="Text 16"/>
+          <p:cNvSpPr/>
+          <p:nvPr/>
+        </p:nvSpPr>
+        <p:spPr>
+          <a:xfrm>
+            <a:off x="6967728" y="3611880"/>
+            <a:ext cx="1828800" cy="548640"/>
+          </a:xfrm>
+          <a:prstGeom prst="rect">
+            <a:avLst/>
+          </a:prstGeom>
+          <a:noFill/>
+          <a:ln/>
+        </p:spPr>
+        <p:txBody>
+          <a:bodyPr wrap="square" lIns="0" tIns="0" rIns="0" bIns="0" rtlCol="0" anchor="ctr"/>
+          <a:lstStyle/>
+          <a:p>
+            <a:pPr indent="0" marL="0">
+              <a:buNone/>
+            </a:pPr>
+            <a:r>
+              <a:rPr lang="en-US" sz="2800" b="1" dirty="0">
+                <a:solidFill>
+                  <a:srgbClr val="0F5A4F"/>
+                </a:solidFill>
+                <a:latin typeface="Fraunces" pitchFamily="34" charset="0"/>
+                <a:ea typeface="Fraunces" pitchFamily="34" charset="-122"/>
+                <a:cs typeface="Fraunces" pitchFamily="34" charset="-120"/>
+              </a:rPr>
+              <a:t>Edit</a:t>
+            </a:r>
+            <a:endParaRPr lang="en-US" sz="2800" dirty="0"/>
+          </a:p>
+        </p:txBody>
+      </p:sp>
+      <p:sp>
+        <p:nvSpPr>
+          <p:cNvPr id="20" name="Text 17"/>
+          <p:cNvSpPr/>
+          <p:nvPr/>
+        </p:nvSpPr>
+        <p:spPr>
+          <a:xfrm>
+            <a:off x="6967728" y="4206240"/>
+            <a:ext cx="1828800" cy="640080"/>
+          </a:xfrm>
+          <a:prstGeom prst="rect">
+            <a:avLst/>
+          </a:prstGeom>
+          <a:noFill/>
+          <a:ln/>
+        </p:spPr>
+        <p:txBody>
+          <a:bodyPr wrap="square" lIns="0" tIns="0" rIns="0" bIns="0" rtlCol="0" anchor="t"/>
+          <a:lstStyle/>
+          <a:p>
+            <a:pPr indent="0" marL="0">
+              <a:lnSpc>
+                <a:spcPct val="130000"/>
+              </a:lnSpc>
+              <a:buNone/>
+            </a:pPr>
+            <a:r>
+              <a:rPr lang="en-US" sz="1400" dirty="0">
+                <a:solidFill>
+                  <a:srgbClr val="3E504B"/>
+                </a:solidFill>
+                <a:latin typeface="Manrope" pitchFamily="34" charset="0"/>
+                <a:ea typeface="Manrope" pitchFamily="34" charset="-122"/>
+                <a:cs typeface="Manrope" pitchFamily="34" charset="-120"/>
+              </a:rPr>
+              <a:t>Change any of them.</a:t>
+            </a:r>
+            <a:endParaRPr lang="en-US" sz="1400" dirty="0"/>
+          </a:p>
+        </p:txBody>
+      </p:sp>
+      <p:sp>
+        <p:nvSpPr>
+          <p:cNvPr id="21" name="Shape 18"/>
+          <p:cNvSpPr/>
+          <p:nvPr/>
+        </p:nvSpPr>
+        <p:spPr>
+          <a:xfrm>
+            <a:off x="9180576" y="3429000"/>
+            <a:ext cx="2286000" cy="1508760"/>
+          </a:xfrm>
+          <a:prstGeom prst="roundRect">
+            <a:avLst>
+              <a:gd name="adj" fmla="val 12121"/>
+            </a:avLst>
+          </a:prstGeom>
+          <a:solidFill>
+            <a:srgbClr val="FFFFFF"/>
+          </a:solidFill>
+          <a:ln w="9525">
+            <a:solidFill>
+              <a:srgbClr val="DBE6E2"/>
+            </a:solidFill>
+            <a:prstDash val="solid"/>
+          </a:ln>
+        </p:spPr>
+      </p:sp>
+      <p:sp>
+        <p:nvSpPr>
+          <p:cNvPr id="22" name="Text 19"/>
+          <p:cNvSpPr/>
+          <p:nvPr/>
+        </p:nvSpPr>
+        <p:spPr>
+          <a:xfrm>
+            <a:off x="9454896" y="3611880"/>
+            <a:ext cx="1828800" cy="548640"/>
+          </a:xfrm>
+          <a:prstGeom prst="rect">
+            <a:avLst/>
+          </a:prstGeom>
+          <a:noFill/>
+          <a:ln/>
+        </p:spPr>
+        <p:txBody>
+          <a:bodyPr wrap="square" lIns="0" tIns="0" rIns="0" bIns="0" rtlCol="0" anchor="ctr"/>
+          <a:lstStyle/>
+          <a:p>
+            <a:pPr indent="0" marL="0">
+              <a:buNone/>
+            </a:pPr>
+            <a:r>
+              <a:rPr lang="en-US" sz="2800" b="1" dirty="0">
+                <a:solidFill>
+                  <a:srgbClr val="0F5A4F"/>
+                </a:solidFill>
+                <a:latin typeface="Fraunces" pitchFamily="34" charset="0"/>
+                <a:ea typeface="Fraunces" pitchFamily="34" charset="-122"/>
+                <a:cs typeface="Fraunces" pitchFamily="34" charset="-120"/>
+              </a:rPr>
+              <a:t>Forget</a:t>
+            </a:r>
+            <a:endParaRPr lang="en-US" sz="2800" dirty="0"/>
+          </a:p>
+        </p:txBody>
+      </p:sp>
+      <p:sp>
+        <p:nvSpPr>
+          <p:cNvPr id="23" name="Text 20"/>
+          <p:cNvSpPr/>
+          <p:nvPr/>
+        </p:nvSpPr>
+        <p:spPr>
+          <a:xfrm>
+            <a:off x="9454896" y="4206240"/>
+            <a:ext cx="1828800" cy="640080"/>
+          </a:xfrm>
+          <a:prstGeom prst="rect">
+            <a:avLst/>
+          </a:prstGeom>
+          <a:noFill/>
+          <a:ln/>
+        </p:spPr>
+        <p:txBody>
+          <a:bodyPr wrap="square" lIns="0" tIns="0" rIns="0" bIns="0" rtlCol="0" anchor="t"/>
+          <a:lstStyle/>
+          <a:p>
+            <a:pPr indent="0" marL="0">
+              <a:lnSpc>
+                <a:spcPct val="130000"/>
+              </a:lnSpc>
+              <a:buNone/>
+            </a:pPr>
+            <a:r>
+              <a:rPr lang="en-US" sz="1400" dirty="0">
+                <a:solidFill>
+                  <a:srgbClr val="3E504B"/>
+                </a:solidFill>
+                <a:latin typeface="Manrope" pitchFamily="34" charset="0"/>
+                <a:ea typeface="Manrope" pitchFamily="34" charset="-122"/>
+                <a:cs typeface="Manrope" pitchFamily="34" charset="-120"/>
+              </a:rPr>
+              <a:t>Remove one, or all.</a:t>
+            </a:r>
+            <a:endParaRPr lang="en-US" sz="1400" dirty="0"/>
+          </a:p>
+        </p:txBody>
+      </p:sp>
+      <p:sp>
+        <p:nvSpPr>
+          <p:cNvPr id="24" name="Shape 21"/>
+          <p:cNvSpPr/>
+          <p:nvPr/>
+        </p:nvSpPr>
+        <p:spPr>
+          <a:xfrm>
+            <a:off x="4206240" y="5212080"/>
+            <a:ext cx="7269480" cy="868680"/>
+          </a:xfrm>
+          <a:prstGeom prst="roundRect">
+            <a:avLst>
+              <a:gd name="adj" fmla="val 26316"/>
+            </a:avLst>
+          </a:prstGeom>
+          <a:solidFill>
+            <a:srgbClr val="0F5A4F"/>
+          </a:solidFill>
+          <a:ln/>
+        </p:spPr>
+      </p:sp>
+      <p:sp>
+        <p:nvSpPr>
+          <p:cNvPr id="25" name="Text 22"/>
+          <p:cNvSpPr/>
+          <p:nvPr/>
+        </p:nvSpPr>
+        <p:spPr>
+          <a:xfrm>
+            <a:off x="4572000" y="5212080"/>
+            <a:ext cx="6675120" cy="868680"/>
+          </a:xfrm>
+          <a:prstGeom prst="rect">
+            <a:avLst/>
+          </a:prstGeom>
+          <a:noFill/>
+          <a:ln/>
+        </p:spPr>
+        <p:txBody>
+          <a:bodyPr wrap="square" lIns="0" tIns="0" rIns="0" bIns="0" rtlCol="0" anchor="ctr"/>
+          <a:lstStyle/>
+          <a:p>
+            <a:pPr indent="0" marL="0">
+              <a:buNone/>
+            </a:pPr>
+            <a:r>
+              <a:rPr lang="en-US" sz="1800" b="1" dirty="0">
+                <a:solidFill>
+                  <a:srgbClr val="FFFFFF"/>
+                </a:solidFill>
+                <a:latin typeface="Manrope" pitchFamily="34" charset="0"/>
+                <a:ea typeface="Manrope" pitchFamily="34" charset="-122"/>
+                <a:cs typeface="Manrope" pitchFamily="34" charset="-120"/>
+              </a:rPr>
+              <a:t>Memory storage is off by default.  </a:t>
+            </a:r>
+            <a:pPr indent="0" marL="0">
+              <a:buNone/>
+            </a:pPr>
+            <a:r>
+              <a:rPr lang="en-US" sz="1800" dirty="0">
+                <a:solidFill>
+                  <a:srgbClr val="CFE8E0"/>
+                </a:solidFill>
+                <a:latin typeface="Manrope" pitchFamily="34" charset="0"/>
+                <a:ea typeface="Manrope" pitchFamily="34" charset="-122"/>
+                <a:cs typeface="Manrope" pitchFamily="34" charset="-120"/>
+              </a:rPr>
+              <a:t>You turn it on.</a:t>
+            </a:r>
+            <a:endParaRPr lang="en-US" sz="1800" dirty="0"/>
+          </a:p>
+        </p:txBody>
+      </p:sp>
+    </p:spTree>
+  </p:cSld>
+  <p:clrMapOvr>
+    <a:masterClrMapping/>
+  </p:clrMapOvr>
+</p:sld>
+</file>
+
+<file path=ppt/slides/slide9.xml><?xml version="1.0" encoding="utf-8"?>
+<p:sld xmlns:a="http://schemas.openxmlformats.org/drawingml/2006/main" xmlns:r="http://schemas.openxmlformats.org/officeDocument/2006/relationships" xmlns:p="http://schemas.openxmlformats.org/presentationml/2006/main">
+  <p:cSld name="Slide 9">
     <p:bg>
       <p:bgPr>
         <a:solidFill>
@@ -8308,7 +9941,7 @@
                 <a:ea typeface="Manrope" pitchFamily="34" charset="-122"/>
                 <a:cs typeface="Manrope" pitchFamily="34" charset="-120"/>
               </a:rPr>
-              <a:t>08 / 10</a:t>
+              <a:t>09 / 11</a:t>
             </a:r>
             <a:endParaRPr lang="en-US" sz="1100" dirty="0"/>
           </a:p>
@@ -8873,729 +10506,6 @@
                 <a:cs typeface="Manrope" pitchFamily="34" charset="-120"/>
               </a:rPr>
               <a:t>Showings  ·  Design preview</a:t>
-            </a:r>
-            <a:endParaRPr lang="en-US" sz="1300" dirty="0"/>
-          </a:p>
-        </p:txBody>
-      </p:sp>
-    </p:spTree>
-  </p:cSld>
-  <p:clrMapOvr>
-    <a:masterClrMapping/>
-  </p:clrMapOvr>
-</p:sld>
-</file>
-
-<file path=ppt/slides/slide9.xml><?xml version="1.0" encoding="utf-8"?>
-<p:sld xmlns:a="http://schemas.openxmlformats.org/drawingml/2006/main" xmlns:r="http://schemas.openxmlformats.org/officeDocument/2006/relationships" xmlns:p="http://schemas.openxmlformats.org/presentationml/2006/main">
-  <p:cSld name="Slide 9">
-    <p:bg>
-      <p:bgPr>
-        <a:solidFill>
-          <a:srgbClr val="F6F8F7"/>
-        </a:solidFill>
-      </p:bgPr>
-    </p:bg>
-    <p:spTree>
-      <p:nvGrpSpPr>
-        <p:cNvPr id="1" name=""/>
-        <p:cNvGrpSpPr/>
-        <p:nvPr/>
-      </p:nvGrpSpPr>
-      <p:grpSpPr>
-        <a:xfrm>
-          <a:off x="0" y="0"/>
-          <a:ext cx="0" cy="0"/>
-          <a:chOff x="0" y="0"/>
-          <a:chExt cx="0" cy="0"/>
-        </a:xfrm>
-      </p:grpSpPr>
-      <p:pic>
-        <p:nvPicPr>
-          <p:cNvPr id="2" name="Image 0" descr="/workspace/slides/voxa-pitch-CTbDK0/assets/voxa-mark.png">    </p:cNvPr>
-          <p:cNvPicPr>
-            <a:picLocks noChangeAspect="1"/>
-          </p:cNvPicPr>
-          <p:nvPr/>
-        </p:nvPicPr>
-        <p:blipFill>
-          <a:blip r:embed="rId1"/>
-          <a:stretch>
-            <a:fillRect/>
-          </a:stretch>
-        </p:blipFill>
-        <p:spPr>
-          <a:xfrm>
-            <a:off x="548640" y="384048"/>
-            <a:ext cx="329184" cy="329184"/>
-          </a:xfrm>
-          <a:prstGeom prst="rect">
-            <a:avLst/>
-          </a:prstGeom>
-        </p:spPr>
-      </p:pic>
-      <p:sp>
-        <p:nvSpPr>
-          <p:cNvPr id="3" name="Text 0"/>
-          <p:cNvSpPr/>
-          <p:nvPr/>
-        </p:nvSpPr>
-        <p:spPr>
-          <a:xfrm>
-            <a:off x="969264" y="365760"/>
-            <a:ext cx="1371600" cy="365760"/>
-          </a:xfrm>
-          <a:prstGeom prst="rect">
-            <a:avLst/>
-          </a:prstGeom>
-          <a:noFill/>
-          <a:ln/>
-        </p:spPr>
-        <p:txBody>
-          <a:bodyPr wrap="square" lIns="0" tIns="0" rIns="0" bIns="0" rtlCol="0" anchor="ctr"/>
-          <a:lstStyle/>
-          <a:p>
-            <a:pPr indent="0" marL="0">
-              <a:buNone/>
-            </a:pPr>
-            <a:r>
-              <a:rPr lang="en-US" sz="1700" b="1" dirty="0">
-                <a:solidFill>
-                  <a:srgbClr val="10201C"/>
-                </a:solidFill>
-                <a:latin typeface="Fraunces" pitchFamily="34" charset="0"/>
-                <a:ea typeface="Fraunces" pitchFamily="34" charset="-122"/>
-                <a:cs typeface="Fraunces" pitchFamily="34" charset="-120"/>
-              </a:rPr>
-              <a:t>Voxa</a:t>
-            </a:r>
-            <a:endParaRPr lang="en-US" sz="1700" dirty="0"/>
-          </a:p>
-        </p:txBody>
-      </p:sp>
-      <p:sp>
-        <p:nvSpPr>
-          <p:cNvPr id="4" name="Text 1"/>
-          <p:cNvSpPr/>
-          <p:nvPr/>
-        </p:nvSpPr>
-        <p:spPr>
-          <a:xfrm>
-            <a:off x="10241280" y="365760"/>
-            <a:ext cx="1399032" cy="365760"/>
-          </a:xfrm>
-          <a:prstGeom prst="rect">
-            <a:avLst/>
-          </a:prstGeom>
-          <a:noFill/>
-          <a:ln/>
-        </p:spPr>
-        <p:txBody>
-          <a:bodyPr wrap="square" lIns="0" tIns="0" rIns="0" bIns="0" rtlCol="0" anchor="ctr"/>
-          <a:lstStyle/>
-          <a:p>
-            <a:pPr algn="r" indent="0" marL="0">
-              <a:buNone/>
-            </a:pPr>
-            <a:r>
-              <a:rPr lang="en-US" sz="1100" dirty="0">
-                <a:solidFill>
-                  <a:srgbClr val="6B7C77"/>
-                </a:solidFill>
-                <a:latin typeface="Manrope" pitchFamily="34" charset="0"/>
-                <a:ea typeface="Manrope" pitchFamily="34" charset="-122"/>
-                <a:cs typeface="Manrope" pitchFamily="34" charset="-120"/>
-              </a:rPr>
-              <a:t>09 / 10</a:t>
-            </a:r>
-            <a:endParaRPr lang="en-US" sz="1100" dirty="0"/>
-          </a:p>
-        </p:txBody>
-      </p:sp>
-      <p:sp>
-        <p:nvSpPr>
-          <p:cNvPr id="5" name="Text 2"/>
-          <p:cNvSpPr/>
-          <p:nvPr/>
-        </p:nvSpPr>
-        <p:spPr>
-          <a:xfrm>
-            <a:off x="685800" y="1051560"/>
-            <a:ext cx="10817352" cy="274320"/>
-          </a:xfrm>
-          <a:prstGeom prst="rect">
-            <a:avLst/>
-          </a:prstGeom>
-          <a:noFill/>
-          <a:ln/>
-        </p:spPr>
-        <p:txBody>
-          <a:bodyPr wrap="square" lIns="0" tIns="0" rIns="0" bIns="0" rtlCol="0" anchor="t"/>
-          <a:lstStyle/>
-          <a:p>
-            <a:pPr algn="ctr" indent="0" marL="0">
-              <a:buNone/>
-            </a:pPr>
-            <a:r>
-              <a:rPr lang="en-US" sz="1200" b="1" spc="250" kern="0" dirty="0">
-                <a:solidFill>
-                  <a:srgbClr val="1D9A84"/>
-                </a:solidFill>
-                <a:latin typeface="Manrope" pitchFamily="34" charset="0"/>
-                <a:ea typeface="Manrope" pitchFamily="34" charset="-122"/>
-                <a:cs typeface="Manrope" pitchFamily="34" charset="-120"/>
-              </a:rPr>
-              <a:t>HOW IT WORKS</a:t>
-            </a:r>
-            <a:endParaRPr lang="en-US" sz="1200" dirty="0"/>
-          </a:p>
-        </p:txBody>
-      </p:sp>
-      <p:sp>
-        <p:nvSpPr>
-          <p:cNvPr id="6" name="Text 3"/>
-          <p:cNvSpPr/>
-          <p:nvPr/>
-        </p:nvSpPr>
-        <p:spPr>
-          <a:xfrm>
-            <a:off x="685800" y="1371600"/>
-            <a:ext cx="10817352" cy="822960"/>
-          </a:xfrm>
-          <a:prstGeom prst="rect">
-            <a:avLst/>
-          </a:prstGeom>
-          <a:noFill/>
-          <a:ln/>
-        </p:spPr>
-        <p:txBody>
-          <a:bodyPr wrap="square" lIns="0" tIns="0" rIns="0" bIns="0" rtlCol="0" anchor="t"/>
-          <a:lstStyle/>
-          <a:p>
-            <a:pPr algn="ctr" indent="0" marL="0">
-              <a:buNone/>
-            </a:pPr>
-            <a:r>
-              <a:rPr lang="en-US" sz="4200" b="1" dirty="0">
-                <a:solidFill>
-                  <a:srgbClr val="10201C"/>
-                </a:solidFill>
-                <a:latin typeface="Fraunces" pitchFamily="34" charset="0"/>
-                <a:ea typeface="Fraunces" pitchFamily="34" charset="-122"/>
-                <a:cs typeface="Fraunces" pitchFamily="34" charset="-120"/>
-              </a:rPr>
-              <a:t>Speak. Voxa works. You approve.</a:t>
-            </a:r>
-            <a:endParaRPr lang="en-US" sz="4200" dirty="0"/>
-          </a:p>
-        </p:txBody>
-      </p:sp>
-      <p:sp>
-        <p:nvSpPr>
-          <p:cNvPr id="7" name="Shape 4"/>
-          <p:cNvSpPr/>
-          <p:nvPr/>
-        </p:nvSpPr>
-        <p:spPr>
-          <a:xfrm>
-            <a:off x="1249528" y="2514600"/>
-            <a:ext cx="2651760" cy="2651760"/>
-          </a:xfrm>
-          <a:prstGeom prst="ellipse">
-            <a:avLst/>
-          </a:prstGeom>
-          <a:solidFill>
-            <a:srgbClr val="0F5A4F"/>
-          </a:solidFill>
-          <a:ln/>
-          <a:effectLst>
-            <a:outerShdw sx="100000" sy="100000" kx="0" ky="0" algn="bl" rotWithShape="0" blurRad="304800" dist="50800" dir="5400000">
-              <a:srgbClr val="0F5A4F">
-                <a:alpha val="10000"/>
-              </a:srgbClr>
-            </a:outerShdw>
-          </a:effectLst>
-        </p:spPr>
-      </p:sp>
-      <p:sp>
-        <p:nvSpPr>
-          <p:cNvPr id="8" name="Text 5"/>
-          <p:cNvSpPr/>
-          <p:nvPr/>
-        </p:nvSpPr>
-        <p:spPr>
-          <a:xfrm>
-            <a:off x="1249528" y="2926080"/>
-            <a:ext cx="2651760" cy="457200"/>
-          </a:xfrm>
-          <a:prstGeom prst="rect">
-            <a:avLst/>
-          </a:prstGeom>
-          <a:noFill/>
-          <a:ln/>
-        </p:spPr>
-        <p:txBody>
-          <a:bodyPr wrap="square" lIns="0" tIns="0" rIns="0" bIns="0" rtlCol="0" anchor="ctr"/>
-          <a:lstStyle/>
-          <a:p>
-            <a:pPr algn="ctr" indent="0" marL="0">
-              <a:buNone/>
-            </a:pPr>
-            <a:r>
-              <a:rPr lang="en-US" sz="1400" b="1" dirty="0">
-                <a:solidFill>
-                  <a:srgbClr val="A9D6C9"/>
-                </a:solidFill>
-                <a:latin typeface="Manrope" pitchFamily="34" charset="0"/>
-                <a:ea typeface="Manrope" pitchFamily="34" charset="-122"/>
-                <a:cs typeface="Manrope" pitchFamily="34" charset="-120"/>
-              </a:rPr>
-              <a:t>1</a:t>
-            </a:r>
-            <a:endParaRPr lang="en-US" sz="1400" dirty="0"/>
-          </a:p>
-        </p:txBody>
-      </p:sp>
-      <p:sp>
-        <p:nvSpPr>
-          <p:cNvPr id="9" name="Text 6"/>
-          <p:cNvSpPr/>
-          <p:nvPr/>
-        </p:nvSpPr>
-        <p:spPr>
-          <a:xfrm>
-            <a:off x="1249528" y="3383280"/>
-            <a:ext cx="2651760" cy="731520"/>
-          </a:xfrm>
-          <a:prstGeom prst="rect">
-            <a:avLst/>
-          </a:prstGeom>
-          <a:noFill/>
-          <a:ln/>
-        </p:spPr>
-        <p:txBody>
-          <a:bodyPr wrap="square" lIns="0" tIns="0" rIns="0" bIns="0" rtlCol="0" anchor="ctr"/>
-          <a:lstStyle/>
-          <a:p>
-            <a:pPr algn="ctr" indent="0" marL="0">
-              <a:buNone/>
-            </a:pPr>
-            <a:r>
-              <a:rPr lang="en-US" sz="2800" b="1" dirty="0">
-                <a:solidFill>
-                  <a:srgbClr val="FFFFFF"/>
-                </a:solidFill>
-                <a:latin typeface="Fraunces" pitchFamily="34" charset="0"/>
-                <a:ea typeface="Fraunces" pitchFamily="34" charset="-122"/>
-                <a:cs typeface="Fraunces" pitchFamily="34" charset="-120"/>
-              </a:rPr>
-              <a:t>Speak</a:t>
-            </a:r>
-            <a:endParaRPr lang="en-US" sz="2800" dirty="0"/>
-          </a:p>
-        </p:txBody>
-      </p:sp>
-      <p:sp>
-        <p:nvSpPr>
-          <p:cNvPr id="10" name="Text 7"/>
-          <p:cNvSpPr/>
-          <p:nvPr/>
-        </p:nvSpPr>
-        <p:spPr>
-          <a:xfrm>
-            <a:off x="1066648" y="5349240"/>
-            <a:ext cx="3017520" cy="685800"/>
-          </a:xfrm>
-          <a:prstGeom prst="rect">
-            <a:avLst/>
-          </a:prstGeom>
-          <a:noFill/>
-          <a:ln/>
-        </p:spPr>
-        <p:txBody>
-          <a:bodyPr wrap="square" lIns="0" tIns="0" rIns="0" bIns="0" rtlCol="0" anchor="ctr"/>
-          <a:lstStyle/>
-          <a:p>
-            <a:pPr algn="ctr" indent="0" marL="0">
-              <a:buNone/>
-            </a:pPr>
-            <a:r>
-              <a:rPr lang="en-US" sz="1500" dirty="0">
-                <a:solidFill>
-                  <a:srgbClr val="3E504B"/>
-                </a:solidFill>
-                <a:latin typeface="Manrope" pitchFamily="34" charset="0"/>
-                <a:ea typeface="Manrope" pitchFamily="34" charset="-122"/>
-                <a:cs typeface="Manrope" pitchFamily="34" charset="-120"/>
-              </a:rPr>
-              <a:t>Tap the mic and say it the way you would say it.</a:t>
-            </a:r>
-            <a:endParaRPr lang="en-US" sz="1500" dirty="0"/>
-          </a:p>
-        </p:txBody>
-      </p:sp>
-      <p:sp>
-        <p:nvSpPr>
-          <p:cNvPr id="11" name="Shape 8"/>
-          <p:cNvSpPr/>
-          <p:nvPr/>
-        </p:nvSpPr>
-        <p:spPr>
-          <a:xfrm>
-            <a:off x="4102456" y="3657600"/>
-            <a:ext cx="457200" cy="365760"/>
-          </a:xfrm>
-          <a:prstGeom prst="rightArrow">
-            <a:avLst/>
-          </a:prstGeom>
-          <a:solidFill>
-            <a:srgbClr val="1D9A84"/>
-          </a:solidFill>
-          <a:ln/>
-        </p:spPr>
-      </p:sp>
-      <p:sp>
-        <p:nvSpPr>
-          <p:cNvPr id="12" name="Shape 9"/>
-          <p:cNvSpPr/>
-          <p:nvPr/>
-        </p:nvSpPr>
-        <p:spPr>
-          <a:xfrm>
-            <a:off x="4769968" y="2514600"/>
-            <a:ext cx="2651760" cy="2651760"/>
-          </a:xfrm>
-          <a:prstGeom prst="ellipse">
-            <a:avLst/>
-          </a:prstGeom>
-          <a:solidFill>
-            <a:srgbClr val="E3F1EC"/>
-          </a:solidFill>
-          <a:ln/>
-          <a:effectLst>
-            <a:outerShdw sx="100000" sy="100000" kx="0" ky="0" algn="bl" rotWithShape="0" blurRad="304800" dist="50800" dir="5400000">
-              <a:srgbClr val="0F5A4F">
-                <a:alpha val="10000"/>
-              </a:srgbClr>
-            </a:outerShdw>
-          </a:effectLst>
-        </p:spPr>
-      </p:sp>
-      <p:sp>
-        <p:nvSpPr>
-          <p:cNvPr id="13" name="Text 10"/>
-          <p:cNvSpPr/>
-          <p:nvPr/>
-        </p:nvSpPr>
-        <p:spPr>
-          <a:xfrm>
-            <a:off x="4769968" y="2926080"/>
-            <a:ext cx="2651760" cy="457200"/>
-          </a:xfrm>
-          <a:prstGeom prst="rect">
-            <a:avLst/>
-          </a:prstGeom>
-          <a:noFill/>
-          <a:ln/>
-        </p:spPr>
-        <p:txBody>
-          <a:bodyPr wrap="square" lIns="0" tIns="0" rIns="0" bIns="0" rtlCol="0" anchor="ctr"/>
-          <a:lstStyle/>
-          <a:p>
-            <a:pPr algn="ctr" indent="0" marL="0">
-              <a:buNone/>
-            </a:pPr>
-            <a:r>
-              <a:rPr lang="en-US" sz="1400" b="1" dirty="0">
-                <a:solidFill>
-                  <a:srgbClr val="1D9A84"/>
-                </a:solidFill>
-                <a:latin typeface="Manrope" pitchFamily="34" charset="0"/>
-                <a:ea typeface="Manrope" pitchFamily="34" charset="-122"/>
-                <a:cs typeface="Manrope" pitchFamily="34" charset="-120"/>
-              </a:rPr>
-              <a:t>2</a:t>
-            </a:r>
-            <a:endParaRPr lang="en-US" sz="1400" dirty="0"/>
-          </a:p>
-        </p:txBody>
-      </p:sp>
-      <p:sp>
-        <p:nvSpPr>
-          <p:cNvPr id="14" name="Text 11"/>
-          <p:cNvSpPr/>
-          <p:nvPr/>
-        </p:nvSpPr>
-        <p:spPr>
-          <a:xfrm>
-            <a:off x="4769968" y="3383280"/>
-            <a:ext cx="2651760" cy="731520"/>
-          </a:xfrm>
-          <a:prstGeom prst="rect">
-            <a:avLst/>
-          </a:prstGeom>
-          <a:noFill/>
-          <a:ln/>
-        </p:spPr>
-        <p:txBody>
-          <a:bodyPr wrap="square" lIns="0" tIns="0" rIns="0" bIns="0" rtlCol="0" anchor="ctr"/>
-          <a:lstStyle/>
-          <a:p>
-            <a:pPr algn="ctr" indent="0" marL="0">
-              <a:buNone/>
-            </a:pPr>
-            <a:r>
-              <a:rPr lang="en-US" sz="2800" b="1" dirty="0">
-                <a:solidFill>
-                  <a:srgbClr val="0F5A4F"/>
-                </a:solidFill>
-                <a:latin typeface="Fraunces" pitchFamily="34" charset="0"/>
-                <a:ea typeface="Fraunces" pitchFamily="34" charset="-122"/>
-                <a:cs typeface="Fraunces" pitchFamily="34" charset="-120"/>
-              </a:rPr>
-              <a:t>Voxa works</a:t>
-            </a:r>
-            <a:endParaRPr lang="en-US" sz="2800" dirty="0"/>
-          </a:p>
-        </p:txBody>
-      </p:sp>
-      <p:sp>
-        <p:nvSpPr>
-          <p:cNvPr id="15" name="Text 12"/>
-          <p:cNvSpPr/>
-          <p:nvPr/>
-        </p:nvSpPr>
-        <p:spPr>
-          <a:xfrm>
-            <a:off x="4587088" y="5349240"/>
-            <a:ext cx="3017520" cy="685800"/>
-          </a:xfrm>
-          <a:prstGeom prst="rect">
-            <a:avLst/>
-          </a:prstGeom>
-          <a:noFill/>
-          <a:ln/>
-        </p:spPr>
-        <p:txBody>
-          <a:bodyPr wrap="square" lIns="0" tIns="0" rIns="0" bIns="0" rtlCol="0" anchor="ctr"/>
-          <a:lstStyle/>
-          <a:p>
-            <a:pPr algn="ctr" indent="0" marL="0">
-              <a:buNone/>
-            </a:pPr>
-            <a:r>
-              <a:rPr lang="en-US" sz="1500" dirty="0">
-                <a:solidFill>
-                  <a:srgbClr val="3E504B"/>
-                </a:solidFill>
-                <a:latin typeface="Manrope" pitchFamily="34" charset="0"/>
-                <a:ea typeface="Manrope" pitchFamily="34" charset="-122"/>
-                <a:cs typeface="Manrope" pitchFamily="34" charset="-120"/>
-              </a:rPr>
-              <a:t>Drafts, research, sorting and reminders.</a:t>
-            </a:r>
-            <a:endParaRPr lang="en-US" sz="1500" dirty="0"/>
-          </a:p>
-        </p:txBody>
-      </p:sp>
-      <p:sp>
-        <p:nvSpPr>
-          <p:cNvPr id="16" name="Shape 13"/>
-          <p:cNvSpPr/>
-          <p:nvPr/>
-        </p:nvSpPr>
-        <p:spPr>
-          <a:xfrm>
-            <a:off x="7622896" y="3657600"/>
-            <a:ext cx="457200" cy="365760"/>
-          </a:xfrm>
-          <a:prstGeom prst="rightArrow">
-            <a:avLst/>
-          </a:prstGeom>
-          <a:solidFill>
-            <a:srgbClr val="1D9A84"/>
-          </a:solidFill>
-          <a:ln/>
-        </p:spPr>
-      </p:sp>
-      <p:sp>
-        <p:nvSpPr>
-          <p:cNvPr id="17" name="Shape 14"/>
-          <p:cNvSpPr/>
-          <p:nvPr/>
-        </p:nvSpPr>
-        <p:spPr>
-          <a:xfrm>
-            <a:off x="8290408" y="2514600"/>
-            <a:ext cx="2651760" cy="2651760"/>
-          </a:xfrm>
-          <a:prstGeom prst="ellipse">
-            <a:avLst/>
-          </a:prstGeom>
-          <a:solidFill>
-            <a:srgbClr val="0F5A4F"/>
-          </a:solidFill>
-          <a:ln/>
-          <a:effectLst>
-            <a:outerShdw sx="100000" sy="100000" kx="0" ky="0" algn="bl" rotWithShape="0" blurRad="304800" dist="50800" dir="5400000">
-              <a:srgbClr val="0F5A4F">
-                <a:alpha val="10000"/>
-              </a:srgbClr>
-            </a:outerShdw>
-          </a:effectLst>
-        </p:spPr>
-      </p:sp>
-      <p:sp>
-        <p:nvSpPr>
-          <p:cNvPr id="18" name="Text 15"/>
-          <p:cNvSpPr/>
-          <p:nvPr/>
-        </p:nvSpPr>
-        <p:spPr>
-          <a:xfrm>
-            <a:off x="8290408" y="2926080"/>
-            <a:ext cx="2651760" cy="457200"/>
-          </a:xfrm>
-          <a:prstGeom prst="rect">
-            <a:avLst/>
-          </a:prstGeom>
-          <a:noFill/>
-          <a:ln/>
-        </p:spPr>
-        <p:txBody>
-          <a:bodyPr wrap="square" lIns="0" tIns="0" rIns="0" bIns="0" rtlCol="0" anchor="ctr"/>
-          <a:lstStyle/>
-          <a:p>
-            <a:pPr algn="ctr" indent="0" marL="0">
-              <a:buNone/>
-            </a:pPr>
-            <a:r>
-              <a:rPr lang="en-US" sz="1400" b="1" dirty="0">
-                <a:solidFill>
-                  <a:srgbClr val="A9D6C9"/>
-                </a:solidFill>
-                <a:latin typeface="Manrope" pitchFamily="34" charset="0"/>
-                <a:ea typeface="Manrope" pitchFamily="34" charset="-122"/>
-                <a:cs typeface="Manrope" pitchFamily="34" charset="-120"/>
-              </a:rPr>
-              <a:t>3</a:t>
-            </a:r>
-            <a:endParaRPr lang="en-US" sz="1400" dirty="0"/>
-          </a:p>
-        </p:txBody>
-      </p:sp>
-      <p:sp>
-        <p:nvSpPr>
-          <p:cNvPr id="19" name="Text 16"/>
-          <p:cNvSpPr/>
-          <p:nvPr/>
-        </p:nvSpPr>
-        <p:spPr>
-          <a:xfrm>
-            <a:off x="8290408" y="3383280"/>
-            <a:ext cx="2651760" cy="731520"/>
-          </a:xfrm>
-          <a:prstGeom prst="rect">
-            <a:avLst/>
-          </a:prstGeom>
-          <a:noFill/>
-          <a:ln/>
-        </p:spPr>
-        <p:txBody>
-          <a:bodyPr wrap="square" lIns="0" tIns="0" rIns="0" bIns="0" rtlCol="0" anchor="ctr"/>
-          <a:lstStyle/>
-          <a:p>
-            <a:pPr algn="ctr" indent="0" marL="0">
-              <a:buNone/>
-            </a:pPr>
-            <a:r>
-              <a:rPr lang="en-US" sz="2800" b="1" dirty="0">
-                <a:solidFill>
-                  <a:srgbClr val="FFFFFF"/>
-                </a:solidFill>
-                <a:latin typeface="Fraunces" pitchFamily="34" charset="0"/>
-                <a:ea typeface="Fraunces" pitchFamily="34" charset="-122"/>
-                <a:cs typeface="Fraunces" pitchFamily="34" charset="-120"/>
-              </a:rPr>
-              <a:t>You approve</a:t>
-            </a:r>
-            <a:endParaRPr lang="en-US" sz="2800" dirty="0"/>
-          </a:p>
-        </p:txBody>
-      </p:sp>
-      <p:sp>
-        <p:nvSpPr>
-          <p:cNvPr id="20" name="Text 17"/>
-          <p:cNvSpPr/>
-          <p:nvPr/>
-        </p:nvSpPr>
-        <p:spPr>
-          <a:xfrm>
-            <a:off x="8107528" y="5349240"/>
-            <a:ext cx="3017520" cy="685800"/>
-          </a:xfrm>
-          <a:prstGeom prst="rect">
-            <a:avLst/>
-          </a:prstGeom>
-          <a:noFill/>
-          <a:ln/>
-        </p:spPr>
-        <p:txBody>
-          <a:bodyPr wrap="square" lIns="0" tIns="0" rIns="0" bIns="0" rtlCol="0" anchor="ctr"/>
-          <a:lstStyle/>
-          <a:p>
-            <a:pPr algn="ctr" indent="0" marL="0">
-              <a:buNone/>
-            </a:pPr>
-            <a:r>
-              <a:rPr lang="en-US" sz="1500" dirty="0">
-                <a:solidFill>
-                  <a:srgbClr val="3E504B"/>
-                </a:solidFill>
-                <a:latin typeface="Manrope" pitchFamily="34" charset="0"/>
-                <a:ea typeface="Manrope" pitchFamily="34" charset="-122"/>
-                <a:cs typeface="Manrope" pitchFamily="34" charset="-120"/>
-              </a:rPr>
-              <a:t>Nothing goes out until you tap.</a:t>
-            </a:r>
-            <a:endParaRPr lang="en-US" sz="1500" dirty="0"/>
-          </a:p>
-        </p:txBody>
-      </p:sp>
-      <p:sp>
-        <p:nvSpPr>
-          <p:cNvPr id="21" name="Text 18"/>
-          <p:cNvSpPr/>
-          <p:nvPr/>
-        </p:nvSpPr>
-        <p:spPr>
-          <a:xfrm>
-            <a:off x="685800" y="6199632"/>
-            <a:ext cx="10817352" cy="320040"/>
-          </a:xfrm>
-          <a:prstGeom prst="rect">
-            <a:avLst/>
-          </a:prstGeom>
-          <a:noFill/>
-          <a:ln/>
-        </p:spPr>
-        <p:txBody>
-          <a:bodyPr wrap="square" lIns="0" tIns="0" rIns="0" bIns="0" rtlCol="0" anchor="ctr"/>
-          <a:lstStyle/>
-          <a:p>
-            <a:pPr algn="ctr" indent="0" marL="0">
-              <a:buNone/>
-            </a:pPr>
-            <a:r>
-              <a:rPr lang="en-US" sz="1300" dirty="0">
-                <a:solidFill>
-                  <a:srgbClr val="6B7C77"/>
-                </a:solidFill>
-                <a:latin typeface="Manrope" pitchFamily="34" charset="0"/>
-                <a:ea typeface="Manrope" pitchFamily="34" charset="-122"/>
-                <a:cs typeface="Manrope" pitchFamily="34" charset="-120"/>
-              </a:rPr>
-              <a:t>What you say is sent to our AI provider so it can reply.</a:t>
             </a:r>
             <a:endParaRPr lang="en-US" sz="1300" dirty="0"/>
           </a:p>

--- a/pitch/voxa-pitch.pptx
+++ b/pitch/voxa-pitch.pptx
@@ -955,7 +955,7 @@
           <a:p>
             <a:r>
               <a:rPr lang="en-US" dirty="0"/>
-              <a:t>You don’t need perfect words. Talk the way you normally do, ums and all, and Voxa works out what you mean. It checks your calendar before booking: Friday at 2 clashes with a showing, so it offers noon or anytime Saturday. Pick noon and it fills in an event card, Lunch with client, Fri 12:00 PM, with an Add to calendar button for you to tap.</a:t>
+              <a:t>Design preview, not shipped yet; prototype screens with example data. You don’t need perfect words. Talk the way you normally do, ums and all, and Voxa works out what you mean. It checks your calendar before booking: Friday at 2 clashes with a showing, so it offers noon or anytime Saturday. Pick noon and it fills in an event card, Lunch with client, Fri 12:00 PM, with an Add to calendar button for you to tap.</a:t>
             </a:r>
             <a:endParaRPr lang="en-US" dirty="0"/>
           </a:p>
@@ -5688,38 +5688,65 @@
       </p:sp>
       <p:sp>
         <p:nvSpPr>
-          <p:cNvPr id="12" name="Text 9"/>
-          <p:cNvSpPr/>
-          <p:nvPr/>
-        </p:nvSpPr>
-        <p:spPr>
-          <a:xfrm>
-            <a:off x="4206240" y="1051560"/>
-            <a:ext cx="4572000" cy="274320"/>
-          </a:xfrm>
-          <a:prstGeom prst="rect">
-            <a:avLst/>
-          </a:prstGeom>
-          <a:noFill/>
-          <a:ln/>
-        </p:spPr>
-        <p:txBody>
-          <a:bodyPr wrap="square" lIns="0" tIns="0" rIns="0" bIns="0" rtlCol="0" anchor="t"/>
-          <a:lstStyle/>
-          <a:p>
-            <a:pPr indent="0" marL="0">
-              <a:buNone/>
-            </a:pPr>
-            <a:r>
-              <a:rPr lang="en-US" sz="1200" b="1" spc="250" kern="0" dirty="0">
-                <a:solidFill>
-                  <a:srgbClr val="1D9A84"/>
-                </a:solidFill>
-                <a:latin typeface="Manrope" pitchFamily="34" charset="0"/>
-                <a:ea typeface="Manrope" pitchFamily="34" charset="-122"/>
-                <a:cs typeface="Manrope" pitchFamily="34" charset="-120"/>
-              </a:rPr>
-              <a:t>JUST TALK</a:t>
+          <p:cNvPr id="12" name="Shape 9"/>
+          <p:cNvSpPr/>
+          <p:nvPr/>
+        </p:nvSpPr>
+        <p:spPr>
+          <a:xfrm>
+            <a:off x="4206240" y="896112"/>
+            <a:ext cx="2514600" cy="384048"/>
+          </a:xfrm>
+          <a:prstGeom prst="roundRect">
+            <a:avLst>
+              <a:gd name="adj" fmla="val 50000"/>
+            </a:avLst>
+          </a:prstGeom>
+          <a:solidFill>
+            <a:srgbClr val="FFF3D6"/>
+          </a:solidFill>
+          <a:ln w="12700">
+            <a:solidFill>
+              <a:srgbClr val="C9A227"/>
+            </a:solidFill>
+            <a:prstDash val="solid"/>
+          </a:ln>
+        </p:spPr>
+      </p:sp>
+      <p:sp>
+        <p:nvSpPr>
+          <p:cNvPr id="13" name="Text 10"/>
+          <p:cNvSpPr/>
+          <p:nvPr/>
+        </p:nvSpPr>
+        <p:spPr>
+          <a:xfrm>
+            <a:off x="4206240" y="896112"/>
+            <a:ext cx="2514600" cy="384048"/>
+          </a:xfrm>
+          <a:prstGeom prst="rect">
+            <a:avLst/>
+          </a:prstGeom>
+          <a:noFill/>
+          <a:ln/>
+        </p:spPr>
+        <p:txBody>
+          <a:bodyPr wrap="square" lIns="0" tIns="0" rIns="0" bIns="0" rtlCol="0" anchor="ctr"/>
+          <a:lstStyle/>
+          <a:p>
+            <a:pPr algn="ctr" indent="0" marL="0">
+              <a:buNone/>
+            </a:pPr>
+            <a:r>
+              <a:rPr lang="en-US" sz="1200" b="1" spc="200" kern="0" dirty="0">
+                <a:solidFill>
+                  <a:srgbClr val="7A5B00"/>
+                </a:solidFill>
+                <a:latin typeface="Manrope" pitchFamily="34" charset="0"/>
+                <a:ea typeface="Manrope" pitchFamily="34" charset="-122"/>
+                <a:cs typeface="Manrope" pitchFamily="34" charset="-120"/>
+              </a:rPr>
+              <a:t>DESIGN PREVIEW</a:t>
             </a:r>
             <a:endParaRPr lang="en-US" sz="1200" dirty="0"/>
           </a:p>
@@ -5727,7 +5754,7 @@
       </p:sp>
       <p:sp>
         <p:nvSpPr>
-          <p:cNvPr id="13" name="Text 10"/>
+          <p:cNvPr id="14" name="Text 11"/>
           <p:cNvSpPr/>
           <p:nvPr/>
         </p:nvSpPr>
@@ -5766,7 +5793,7 @@
       </p:sp>
       <p:sp>
         <p:nvSpPr>
-          <p:cNvPr id="14" name="Text 11"/>
+          <p:cNvPr id="15" name="Text 12"/>
           <p:cNvSpPr/>
           <p:nvPr/>
         </p:nvSpPr>
@@ -5808,7 +5835,7 @@
       </p:sp>
       <p:sp>
         <p:nvSpPr>
-          <p:cNvPr id="15" name="Shape 12"/>
+          <p:cNvPr id="16" name="Shape 13"/>
           <p:cNvSpPr/>
           <p:nvPr/>
         </p:nvSpPr>
@@ -5835,7 +5862,7 @@
       </p:sp>
       <p:sp>
         <p:nvSpPr>
-          <p:cNvPr id="16" name="Text 13"/>
+          <p:cNvPr id="17" name="Text 14"/>
           <p:cNvSpPr/>
           <p:nvPr/>
         </p:nvSpPr>
@@ -5877,7 +5904,7 @@
       </p:sp>
       <p:sp>
         <p:nvSpPr>
-          <p:cNvPr id="17" name="Shape 14"/>
+          <p:cNvPr id="18" name="Shape 15"/>
           <p:cNvSpPr/>
           <p:nvPr/>
         </p:nvSpPr>
@@ -5899,7 +5926,7 @@
       </p:sp>
       <p:sp>
         <p:nvSpPr>
-          <p:cNvPr id="18" name="Text 15"/>
+          <p:cNvPr id="19" name="Text 16"/>
           <p:cNvSpPr/>
           <p:nvPr/>
         </p:nvSpPr>
@@ -5938,7 +5965,7 @@
       </p:sp>
       <p:sp>
         <p:nvSpPr>
-          <p:cNvPr id="19" name="Shape 16"/>
+          <p:cNvPr id="20" name="Shape 17"/>
           <p:cNvSpPr/>
           <p:nvPr/>
         </p:nvSpPr>
@@ -5967,7 +5994,7 @@
       </p:sp>
       <p:sp>
         <p:nvSpPr>
-          <p:cNvPr id="20" name="Shape 17"/>
+          <p:cNvPr id="21" name="Shape 18"/>
           <p:cNvSpPr/>
           <p:nvPr/>
         </p:nvSpPr>
@@ -5989,7 +6016,7 @@
       </p:sp>
       <p:sp>
         <p:nvSpPr>
-          <p:cNvPr id="21" name="Shape 18"/>
+          <p:cNvPr id="22" name="Shape 19"/>
           <p:cNvSpPr/>
           <p:nvPr/>
         </p:nvSpPr>
@@ -6014,7 +6041,7 @@
       </p:sp>
       <p:sp>
         <p:nvSpPr>
-          <p:cNvPr id="22" name="Shape 19"/>
+          <p:cNvPr id="23" name="Shape 20"/>
           <p:cNvSpPr/>
           <p:nvPr/>
         </p:nvSpPr>
@@ -6034,7 +6061,7 @@
       </p:sp>
       <p:sp>
         <p:nvSpPr>
-          <p:cNvPr id="23" name="Text 20"/>
+          <p:cNvPr id="24" name="Text 21"/>
           <p:cNvSpPr/>
           <p:nvPr/>
         </p:nvSpPr>
@@ -6073,7 +6100,7 @@
       </p:sp>
       <p:sp>
         <p:nvSpPr>
-          <p:cNvPr id="24" name="Shape 21"/>
+          <p:cNvPr id="25" name="Shape 22"/>
           <p:cNvSpPr/>
           <p:nvPr/>
         </p:nvSpPr>
@@ -6100,7 +6127,7 @@
       </p:sp>
       <p:sp>
         <p:nvSpPr>
-          <p:cNvPr id="25" name="Text 22"/>
+          <p:cNvPr id="26" name="Text 23"/>
           <p:cNvSpPr/>
           <p:nvPr/>
         </p:nvSpPr>
@@ -6139,7 +6166,7 @@
       </p:sp>
       <p:sp>
         <p:nvSpPr>
-          <p:cNvPr id="26" name="Text 23"/>
+          <p:cNvPr id="27" name="Text 24"/>
           <p:cNvSpPr/>
           <p:nvPr/>
         </p:nvSpPr>

--- a/pitch/voxa-pitch.pptx
+++ b/pitch/voxa-pitch.pptx
@@ -955,7 +955,7 @@
           <a:p>
             <a:r>
               <a:rPr lang="en-US" dirty="0"/>
-              <a:t>Design preview, not shipped yet; prototype screens with example data. You don’t need perfect words. Talk the way you normally do, ums and all, and Voxa works out what you mean. It checks your calendar before booking: Friday at 2 clashes with a showing, so it offers noon or anytime Saturday. Pick noon and it fills in an event card, Lunch with client, Fri 12:00 PM, with an Add to calendar button for you to tap.</a:t>
+              <a:t>Design preview, not shipped yet; prototype screens with example data. You don’t need perfect words. Talk the way you normally do, ums and all, and Voxa works out what you mean. It checks your calendar before booking: Friday at 2 clashes with a showing, so it offers noon or anytime Saturday. Pick noon and it fills in an event card: Lunch with client, Friday the 23rd at 12:00 PM, marked Free, no conflicts, with an Add to calendar button for you to tap.</a:t>
             </a:r>
             <a:endParaRPr lang="en-US" dirty="0"/>
           </a:p>
@@ -5841,12 +5841,12 @@
         </p:nvSpPr>
         <p:spPr>
           <a:xfrm>
-            <a:off x="5257800" y="2926080"/>
-            <a:ext cx="6217920" cy="868680"/>
+            <a:off x="4526280" y="2926080"/>
+            <a:ext cx="3383280" cy="1097280"/>
           </a:xfrm>
           <a:prstGeom prst="roundRect">
             <a:avLst>
-              <a:gd name="adj" fmla="val 23158"/>
+              <a:gd name="adj" fmla="val 18333"/>
             </a:avLst>
           </a:prstGeom>
           <a:solidFill>
@@ -5868,8 +5868,8 @@
         </p:nvSpPr>
         <p:spPr>
           <a:xfrm>
-            <a:off x="5532120" y="2926080"/>
-            <a:ext cx="5669280" cy="868680"/>
+            <a:off x="4754880" y="2926080"/>
+            <a:ext cx="2926080" cy="1097280"/>
           </a:xfrm>
           <a:prstGeom prst="rect">
             <a:avLst/>
@@ -5888,7 +5888,7 @@
               <a:buNone/>
             </a:pPr>
             <a:r>
-              <a:rPr lang="en-US" sz="1550" i="1" dirty="0">
+              <a:rPr lang="en-US" sz="1500" i="1" dirty="0">
                 <a:solidFill>
                   <a:srgbClr val="10201C"/>
                 </a:solidFill>
@@ -5898,7 +5898,7 @@
               </a:rPr>
               <a:t>“Um, can you, uh… put lunch with a client on my, uh, calendar for Friday at, um, 2?”</a:t>
             </a:r>
-            <a:endParaRPr lang="en-US" sz="1550" dirty="0"/>
+            <a:endParaRPr lang="en-US" sz="1500" dirty="0"/>
           </a:p>
         </p:txBody>
       </p:sp>
@@ -5910,12 +5910,12 @@
         </p:nvSpPr>
         <p:spPr>
           <a:xfrm>
-            <a:off x="4206240" y="3931920"/>
-            <a:ext cx="6217920" cy="658368"/>
+            <a:off x="4206240" y="4160520"/>
+            <a:ext cx="3383280" cy="868680"/>
           </a:xfrm>
           <a:prstGeom prst="roundRect">
             <a:avLst>
-              <a:gd name="adj" fmla="val 30556"/>
+              <a:gd name="adj" fmla="val 23158"/>
             </a:avLst>
           </a:prstGeom>
           <a:solidFill>
@@ -5932,8 +5932,8 @@
         </p:nvSpPr>
         <p:spPr>
           <a:xfrm>
-            <a:off x="4480560" y="3931920"/>
-            <a:ext cx="5669280" cy="658368"/>
+            <a:off x="4434840" y="4160520"/>
+            <a:ext cx="2926080" cy="868680"/>
           </a:xfrm>
           <a:prstGeom prst="rect">
             <a:avLst/>
@@ -5946,10 +5946,13 @@
           <a:lstStyle/>
           <a:p>
             <a:pPr indent="0" marL="0">
-              <a:buNone/>
-            </a:pPr>
-            <a:r>
-              <a:rPr lang="en-US" sz="1550" b="1" dirty="0">
+              <a:lnSpc>
+                <a:spcPct val="110000"/>
+              </a:lnSpc>
+              <a:buNone/>
+            </a:pPr>
+            <a:r>
+              <a:rPr lang="en-US" sz="1500" b="1" dirty="0">
                 <a:solidFill>
                   <a:srgbClr val="FFFFFF"/>
                 </a:solidFill>
@@ -5959,7 +5962,7 @@
               </a:rPr>
               <a:t>“You have a showing then. You’re free at noon, or anytime Saturday.”</a:t>
             </a:r>
-            <a:endParaRPr lang="en-US" sz="1550" dirty="0"/>
+            <a:endParaRPr lang="en-US" sz="1500" dirty="0"/>
           </a:p>
         </p:txBody>
       </p:sp>
@@ -5971,22 +5974,88 @@
         </p:nvSpPr>
         <p:spPr>
           <a:xfrm>
-            <a:off x="4206240" y="4773168"/>
-            <a:ext cx="7269480" cy="804672"/>
+            <a:off x="6309360" y="5166360"/>
+            <a:ext cx="1600200" cy="457200"/>
           </a:xfrm>
           <a:prstGeom prst="roundRect">
             <a:avLst>
-              <a:gd name="adj" fmla="val 25000"/>
+              <a:gd name="adj" fmla="val 44000"/>
             </a:avLst>
           </a:prstGeom>
           <a:solidFill>
             <a:srgbClr val="FFFFFF"/>
           </a:solidFill>
+          <a:ln w="9525">
+            <a:solidFill>
+              <a:srgbClr val="DBE6E2"/>
+            </a:solidFill>
+            <a:prstDash val="solid"/>
+          </a:ln>
+        </p:spPr>
+      </p:sp>
+      <p:sp>
+        <p:nvSpPr>
+          <p:cNvPr id="21" name="Text 18"/>
+          <p:cNvSpPr/>
+          <p:nvPr/>
+        </p:nvSpPr>
+        <p:spPr>
+          <a:xfrm>
+            <a:off x="6309360" y="5166360"/>
+            <a:ext cx="1600200" cy="457200"/>
+          </a:xfrm>
+          <a:prstGeom prst="rect">
+            <a:avLst/>
+          </a:prstGeom>
+          <a:noFill/>
+          <a:ln/>
+        </p:spPr>
+        <p:txBody>
+          <a:bodyPr wrap="square" lIns="0" tIns="0" rIns="0" bIns="0" rtlCol="0" anchor="ctr"/>
+          <a:lstStyle/>
+          <a:p>
+            <a:pPr algn="ctr" indent="0" marL="0">
+              <a:buNone/>
+            </a:pPr>
+            <a:r>
+              <a:rPr lang="en-US" sz="1500" i="1" dirty="0">
+                <a:solidFill>
+                  <a:srgbClr val="10201C"/>
+                </a:solidFill>
+                <a:latin typeface="Manrope" pitchFamily="34" charset="0"/>
+                <a:ea typeface="Manrope" pitchFamily="34" charset="-122"/>
+                <a:cs typeface="Manrope" pitchFamily="34" charset="-120"/>
+              </a:rPr>
+              <a:t>“Noon works.”</a:t>
+            </a:r>
+            <a:endParaRPr lang="en-US" sz="1500" dirty="0"/>
+          </a:p>
+        </p:txBody>
+      </p:sp>
+      <p:sp>
+        <p:nvSpPr>
+          <p:cNvPr id="22" name="Shape 19"/>
+          <p:cNvSpPr/>
+          <p:nvPr/>
+        </p:nvSpPr>
+        <p:spPr>
+          <a:xfrm>
+            <a:off x="8183880" y="2926080"/>
+            <a:ext cx="3291840" cy="2697480"/>
+          </a:xfrm>
+          <a:prstGeom prst="roundRect">
+            <a:avLst>
+              <a:gd name="adj" fmla="val 3766"/>
+            </a:avLst>
+          </a:prstGeom>
+          <a:solidFill>
+            <a:srgbClr val="0E5A52"/>
+          </a:solidFill>
           <a:ln/>
           <a:effectLst>
-            <a:outerShdw sx="100000" sy="100000" kx="0" ky="0" algn="bl" rotWithShape="0" blurRad="304800" dist="50800" dir="5400000">
-              <a:srgbClr val="0F5A4F">
-                <a:alpha val="10000"/>
+            <a:outerShdw sx="100000" sy="100000" kx="0" ky="0" algn="bl" rotWithShape="0" blurRad="228600" dist="63500" dir="5400000">
+              <a:srgbClr val="0E3A34">
+                <a:alpha val="16000"/>
               </a:srgbClr>
             </a:outerShdw>
           </a:effectLst>
@@ -5994,18 +6063,40 @@
       </p:sp>
       <p:sp>
         <p:nvSpPr>
-          <p:cNvPr id="21" name="Shape 18"/>
-          <p:cNvSpPr/>
-          <p:nvPr/>
-        </p:nvSpPr>
-        <p:spPr>
-          <a:xfrm>
-            <a:off x="4407408" y="4937760"/>
-            <a:ext cx="475488" cy="475488"/>
+          <p:cNvPr id="23" name="Shape 20"/>
+          <p:cNvSpPr/>
+          <p:nvPr/>
+        </p:nvSpPr>
+        <p:spPr>
+          <a:xfrm>
+            <a:off x="8234172" y="2926080"/>
+            <a:ext cx="3241548" cy="2697480"/>
           </a:xfrm>
           <a:prstGeom prst="roundRect">
             <a:avLst>
-              <a:gd name="adj" fmla="val 26923"/>
+              <a:gd name="adj" fmla="val 3766"/>
+            </a:avLst>
+          </a:prstGeom>
+          <a:solidFill>
+            <a:srgbClr val="F5FAF9"/>
+          </a:solidFill>
+          <a:ln/>
+        </p:spPr>
+      </p:sp>
+      <p:sp>
+        <p:nvSpPr>
+          <p:cNvPr id="24" name="Shape 21"/>
+          <p:cNvSpPr/>
+          <p:nvPr/>
+        </p:nvSpPr>
+        <p:spPr>
+          <a:xfrm>
+            <a:off x="8476488" y="3200400"/>
+            <a:ext cx="749808" cy="841248"/>
+          </a:xfrm>
+          <a:prstGeom prst="roundRect">
+            <a:avLst>
+              <a:gd name="adj" fmla="val 14634"/>
             </a:avLst>
           </a:prstGeom>
           <a:solidFill>
@@ -6016,59 +6107,92 @@
       </p:sp>
       <p:sp>
         <p:nvSpPr>
-          <p:cNvPr id="22" name="Shape 19"/>
-          <p:cNvSpPr/>
-          <p:nvPr/>
-        </p:nvSpPr>
-        <p:spPr>
-          <a:xfrm>
-            <a:off x="4517136" y="5047488"/>
-            <a:ext cx="256032" cy="237744"/>
-          </a:xfrm>
-          <a:prstGeom prst="rect">
-            <a:avLst/>
-          </a:prstGeom>
-          <a:solidFill>
-            <a:srgbClr val="FFFFFF"/>
-          </a:solidFill>
-          <a:ln w="19050">
-            <a:solidFill>
-              <a:srgbClr val="0F5A4F"/>
-            </a:solidFill>
-            <a:prstDash val="solid"/>
-          </a:ln>
-        </p:spPr>
-      </p:sp>
-      <p:sp>
-        <p:nvSpPr>
-          <p:cNvPr id="23" name="Shape 20"/>
-          <p:cNvSpPr/>
-          <p:nvPr/>
-        </p:nvSpPr>
-        <p:spPr>
-          <a:xfrm>
-            <a:off x="4517136" y="5047488"/>
-            <a:ext cx="256032" cy="73152"/>
-          </a:xfrm>
-          <a:prstGeom prst="rect">
-            <a:avLst/>
-          </a:prstGeom>
-          <a:solidFill>
-            <a:srgbClr val="0F5A4F"/>
-          </a:solidFill>
-          <a:ln/>
-        </p:spPr>
-      </p:sp>
-      <p:sp>
-        <p:nvSpPr>
-          <p:cNvPr id="24" name="Text 21"/>
-          <p:cNvSpPr/>
-          <p:nvPr/>
-        </p:nvSpPr>
-        <p:spPr>
-          <a:xfrm>
-            <a:off x="5074920" y="4773168"/>
-            <a:ext cx="4023360" cy="804672"/>
+          <p:cNvPr id="25" name="Text 22"/>
+          <p:cNvSpPr/>
+          <p:nvPr/>
+        </p:nvSpPr>
+        <p:spPr>
+          <a:xfrm>
+            <a:off x="8476488" y="3282696"/>
+            <a:ext cx="749808" cy="219456"/>
+          </a:xfrm>
+          <a:prstGeom prst="rect">
+            <a:avLst/>
+          </a:prstGeom>
+          <a:noFill/>
+          <a:ln/>
+        </p:spPr>
+        <p:txBody>
+          <a:bodyPr wrap="square" lIns="0" tIns="0" rIns="0" bIns="0" rtlCol="0" anchor="ctr"/>
+          <a:lstStyle/>
+          <a:p>
+            <a:pPr algn="ctr" indent="0" marL="0">
+              <a:buNone/>
+            </a:pPr>
+            <a:r>
+              <a:rPr lang="en-US" sz="1100" b="1" spc="200" kern="0" dirty="0">
+                <a:solidFill>
+                  <a:srgbClr val="0E5A52"/>
+                </a:solidFill>
+                <a:latin typeface="Manrope" pitchFamily="34" charset="0"/>
+                <a:ea typeface="Manrope" pitchFamily="34" charset="-122"/>
+                <a:cs typeface="Manrope" pitchFamily="34" charset="-120"/>
+              </a:rPr>
+              <a:t>FRI</a:t>
+            </a:r>
+            <a:endParaRPr lang="en-US" sz="1100" dirty="0"/>
+          </a:p>
+        </p:txBody>
+      </p:sp>
+      <p:sp>
+        <p:nvSpPr>
+          <p:cNvPr id="26" name="Text 23"/>
+          <p:cNvSpPr/>
+          <p:nvPr/>
+        </p:nvSpPr>
+        <p:spPr>
+          <a:xfrm>
+            <a:off x="8476488" y="3474720"/>
+            <a:ext cx="749808" cy="512064"/>
+          </a:xfrm>
+          <a:prstGeom prst="rect">
+            <a:avLst/>
+          </a:prstGeom>
+          <a:noFill/>
+          <a:ln/>
+        </p:spPr>
+        <p:txBody>
+          <a:bodyPr wrap="square" lIns="0" tIns="0" rIns="0" bIns="0" rtlCol="0" anchor="ctr"/>
+          <a:lstStyle/>
+          <a:p>
+            <a:pPr algn="ctr" indent="0" marL="0">
+              <a:buNone/>
+            </a:pPr>
+            <a:r>
+              <a:rPr lang="en-US" sz="3000" b="1" dirty="0">
+                <a:solidFill>
+                  <a:srgbClr val="10201C"/>
+                </a:solidFill>
+                <a:latin typeface="Manrope" pitchFamily="34" charset="0"/>
+                <a:ea typeface="Manrope" pitchFamily="34" charset="-122"/>
+                <a:cs typeface="Manrope" pitchFamily="34" charset="-120"/>
+              </a:rPr>
+              <a:t>23</a:t>
+            </a:r>
+            <a:endParaRPr lang="en-US" sz="3000" dirty="0"/>
+          </a:p>
+        </p:txBody>
+      </p:sp>
+      <p:sp>
+        <p:nvSpPr>
+          <p:cNvPr id="27" name="Text 24"/>
+          <p:cNvSpPr/>
+          <p:nvPr/>
+        </p:nvSpPr>
+        <p:spPr>
+          <a:xfrm>
+            <a:off x="9436608" y="3218688"/>
+            <a:ext cx="1810512" cy="201168"/>
           </a:xfrm>
           <a:prstGeom prst="rect">
             <a:avLst/>
@@ -6084,6 +6208,45 @@
               <a:buNone/>
             </a:pPr>
             <a:r>
+              <a:rPr lang="en-US" sz="1000" b="1" spc="250" kern="0" dirty="0">
+                <a:solidFill>
+                  <a:srgbClr val="6B7C77"/>
+                </a:solidFill>
+                <a:latin typeface="Manrope" pitchFamily="34" charset="0"/>
+                <a:ea typeface="Manrope" pitchFamily="34" charset="-122"/>
+                <a:cs typeface="Manrope" pitchFamily="34" charset="-120"/>
+              </a:rPr>
+              <a:t>EVENT</a:t>
+            </a:r>
+            <a:endParaRPr lang="en-US" sz="1000" dirty="0"/>
+          </a:p>
+        </p:txBody>
+      </p:sp>
+      <p:sp>
+        <p:nvSpPr>
+          <p:cNvPr id="28" name="Text 25"/>
+          <p:cNvSpPr/>
+          <p:nvPr/>
+        </p:nvSpPr>
+        <p:spPr>
+          <a:xfrm>
+            <a:off x="9436608" y="3447288"/>
+            <a:ext cx="1810512" cy="329184"/>
+          </a:xfrm>
+          <a:prstGeom prst="rect">
+            <a:avLst/>
+          </a:prstGeom>
+          <a:noFill/>
+          <a:ln/>
+        </p:spPr>
+        <p:txBody>
+          <a:bodyPr wrap="square" lIns="0" tIns="0" rIns="0" bIns="0" rtlCol="0" anchor="ctr"/>
+          <a:lstStyle/>
+          <a:p>
+            <a:pPr indent="0" marL="0">
+              <a:buNone/>
+            </a:pPr>
+            <a:r>
               <a:rPr lang="en-US" sz="1700" b="1" dirty="0">
                 <a:solidFill>
                   <a:srgbClr val="10201C"/>
@@ -6092,7 +6255,7 @@
                 <a:ea typeface="Manrope" pitchFamily="34" charset="-122"/>
                 <a:cs typeface="Manrope" pitchFamily="34" charset="-120"/>
               </a:rPr>
-              <a:t>Lunch with client · Fri 12:00 PM</a:t>
+              <a:t>Lunch with client</a:t>
             </a:r>
             <a:endParaRPr lang="en-US" sz="1700" dirty="0"/>
           </a:p>
@@ -6100,14 +6263,53 @@
       </p:sp>
       <p:sp>
         <p:nvSpPr>
-          <p:cNvPr id="25" name="Shape 22"/>
-          <p:cNvSpPr/>
-          <p:nvPr/>
-        </p:nvSpPr>
-        <p:spPr>
-          <a:xfrm>
-            <a:off x="9235440" y="4937760"/>
-            <a:ext cx="2011680" cy="475488"/>
+          <p:cNvPr id="29" name="Text 26"/>
+          <p:cNvSpPr/>
+          <p:nvPr/>
+        </p:nvSpPr>
+        <p:spPr>
+          <a:xfrm>
+            <a:off x="9436608" y="3776472"/>
+            <a:ext cx="1810512" cy="274320"/>
+          </a:xfrm>
+          <a:prstGeom prst="rect">
+            <a:avLst/>
+          </a:prstGeom>
+          <a:noFill/>
+          <a:ln/>
+        </p:spPr>
+        <p:txBody>
+          <a:bodyPr wrap="square" lIns="0" tIns="0" rIns="0" bIns="0" rtlCol="0" anchor="ctr"/>
+          <a:lstStyle/>
+          <a:p>
+            <a:pPr indent="0" marL="0">
+              <a:buNone/>
+            </a:pPr>
+            <a:r>
+              <a:rPr lang="en-US" sz="1500" dirty="0">
+                <a:solidFill>
+                  <a:srgbClr val="3E504B"/>
+                </a:solidFill>
+                <a:latin typeface="Manrope" pitchFamily="34" charset="0"/>
+                <a:ea typeface="Manrope" pitchFamily="34" charset="-122"/>
+                <a:cs typeface="Manrope" pitchFamily="34" charset="-120"/>
+              </a:rPr>
+              <a:t>12:00 PM</a:t>
+            </a:r>
+            <a:endParaRPr lang="en-US" sz="1500" dirty="0"/>
+          </a:p>
+        </p:txBody>
+      </p:sp>
+      <p:sp>
+        <p:nvSpPr>
+          <p:cNvPr id="30" name="Shape 27"/>
+          <p:cNvSpPr/>
+          <p:nvPr/>
+        </p:nvSpPr>
+        <p:spPr>
+          <a:xfrm>
+            <a:off x="8476488" y="4251960"/>
+            <a:ext cx="2011680" cy="329184"/>
           </a:xfrm>
           <a:prstGeom prst="roundRect">
             <a:avLst>
@@ -6115,26 +6317,21 @@
             </a:avLst>
           </a:prstGeom>
           <a:solidFill>
-            <a:srgbClr val="0F5A4F"/>
+            <a:srgbClr val="E1F4EA"/>
           </a:solidFill>
-          <a:ln w="12700">
-            <a:solidFill>
-              <a:srgbClr val="0F5A4F"/>
-            </a:solidFill>
-            <a:prstDash val="solid"/>
-          </a:ln>
-        </p:spPr>
-      </p:sp>
-      <p:sp>
-        <p:nvSpPr>
-          <p:cNvPr id="26" name="Text 23"/>
-          <p:cNvSpPr/>
-          <p:nvPr/>
-        </p:nvSpPr>
-        <p:spPr>
-          <a:xfrm>
-            <a:off x="9418320" y="4937760"/>
-            <a:ext cx="1645920" cy="475488"/>
+          <a:ln/>
+        </p:spPr>
+      </p:sp>
+      <p:sp>
+        <p:nvSpPr>
+          <p:cNvPr id="31" name="Text 28"/>
+          <p:cNvSpPr/>
+          <p:nvPr/>
+        </p:nvSpPr>
+        <p:spPr>
+          <a:xfrm>
+            <a:off x="8476488" y="4251960"/>
+            <a:ext cx="2011680" cy="329184"/>
           </a:xfrm>
           <a:prstGeom prst="rect">
             <a:avLst/>
@@ -6150,7 +6347,68 @@
               <a:buNone/>
             </a:pPr>
             <a:r>
-              <a:rPr lang="en-US" sz="1400" b="1" dirty="0">
+              <a:rPr lang="en-US" sz="1200" b="1" dirty="0">
+                <a:solidFill>
+                  <a:srgbClr val="177245"/>
+                </a:solidFill>
+                <a:latin typeface="Manrope" pitchFamily="34" charset="0"/>
+                <a:ea typeface="Manrope" pitchFamily="34" charset="-122"/>
+                <a:cs typeface="Manrope" pitchFamily="34" charset="-120"/>
+              </a:rPr>
+              <a:t>✓  Free · no conflicts</a:t>
+            </a:r>
+            <a:endParaRPr lang="en-US" sz="1200" dirty="0"/>
+          </a:p>
+        </p:txBody>
+      </p:sp>
+      <p:sp>
+        <p:nvSpPr>
+          <p:cNvPr id="32" name="Shape 29"/>
+          <p:cNvSpPr/>
+          <p:nvPr/>
+        </p:nvSpPr>
+        <p:spPr>
+          <a:xfrm>
+            <a:off x="8476488" y="4846320"/>
+            <a:ext cx="2706624" cy="512064"/>
+          </a:xfrm>
+          <a:prstGeom prst="roundRect">
+            <a:avLst>
+              <a:gd name="adj" fmla="val 50000"/>
+            </a:avLst>
+          </a:prstGeom>
+          <a:solidFill>
+            <a:srgbClr val="0E5A52"/>
+          </a:solidFill>
+          <a:ln/>
+        </p:spPr>
+      </p:sp>
+      <p:sp>
+        <p:nvSpPr>
+          <p:cNvPr id="33" name="Text 30"/>
+          <p:cNvSpPr/>
+          <p:nvPr/>
+        </p:nvSpPr>
+        <p:spPr>
+          <a:xfrm>
+            <a:off x="8476488" y="4846320"/>
+            <a:ext cx="2706624" cy="512064"/>
+          </a:xfrm>
+          <a:prstGeom prst="rect">
+            <a:avLst/>
+          </a:prstGeom>
+          <a:noFill/>
+          <a:ln/>
+        </p:spPr>
+        <p:txBody>
+          <a:bodyPr wrap="square" lIns="0" tIns="0" rIns="0" bIns="0" rtlCol="0" anchor="ctr"/>
+          <a:lstStyle/>
+          <a:p>
+            <a:pPr algn="ctr" indent="0" marL="0">
+              <a:buNone/>
+            </a:pPr>
+            <a:r>
+              <a:rPr lang="en-US" sz="1500" b="1" dirty="0">
                 <a:solidFill>
                   <a:srgbClr val="FFFFFF"/>
                 </a:solidFill>
@@ -6160,19 +6418,19 @@
               </a:rPr>
               <a:t>Add to calendar</a:t>
             </a:r>
-            <a:endParaRPr lang="en-US" sz="1400" dirty="0"/>
-          </a:p>
-        </p:txBody>
-      </p:sp>
-      <p:sp>
-        <p:nvSpPr>
-          <p:cNvPr id="27" name="Text 24"/>
-          <p:cNvSpPr/>
-          <p:nvPr/>
-        </p:nvSpPr>
-        <p:spPr>
-          <a:xfrm>
-            <a:off x="4206240" y="5760720"/>
+            <a:endParaRPr lang="en-US" sz="1500" dirty="0"/>
+          </a:p>
+        </p:txBody>
+      </p:sp>
+      <p:sp>
+        <p:nvSpPr>
+          <p:cNvPr id="34" name="Text 31"/>
+          <p:cNvSpPr/>
+          <p:nvPr/>
+        </p:nvSpPr>
+        <p:spPr>
+          <a:xfrm>
+            <a:off x="4206240" y="5870448"/>
             <a:ext cx="7269480" cy="411480"/>
           </a:xfrm>
           <a:prstGeom prst="rect">
